--- a/output/wordlabs-transport-3day.pptx
+++ b/output/wordlabs-transport-3day.pptx
@@ -4240,7 +4240,7 @@
                 <a:ea typeface="Calibri" pitchFamily="34" charset="-122"/>
                 <a:cs typeface="Calibri" pitchFamily="34" charset="-120"/>
               </a:rPr>
-              <a:t>"carry across or over"</a:t>
+              <a:t>"carry across or beyond"</a:t>
             </a:r>
             <a:endParaRPr lang="en-US" sz="2200" dirty="0"/>
           </a:p>
@@ -5288,7 +5288,7 @@
                 <a:ea typeface="Calibri" pitchFamily="34" charset="-122"/>
                 <a:cs typeface="Calibri" pitchFamily="34" charset="-120"/>
               </a:rPr>
-              <a:t>Word Labs  •  wordlabs.app  •  Root: 'transport' = carry across or over</a:t>
+              <a:t>Word Labs  •  wordlabs.app  •  Root: 'transport' = carry across or beyond</a:t>
             </a:r>
             <a:endParaRPr lang="en-US" sz="800" dirty="0"/>
           </a:p>
@@ -5928,7 +5928,7 @@
                 <a:ea typeface="Calibri" pitchFamily="34" charset="-122"/>
                 <a:cs typeface="Calibri" pitchFamily="34" charset="-120"/>
               </a:rPr>
-              <a:t>Word Labs  •  wordlabs.app  •  Root: 'transport' = carry across or over</a:t>
+              <a:t>Word Labs  •  wordlabs.app  •  Root: 'transport' = carry across or beyond</a:t>
             </a:r>
             <a:endParaRPr lang="en-US" sz="800" dirty="0"/>
           </a:p>
@@ -6071,7 +6071,7 @@
                 <a:ea typeface="Calibri" pitchFamily="34" charset="-122"/>
                 <a:cs typeface="Calibri" pitchFamily="34" charset="-120"/>
               </a:rPr>
-              <a:t> of fresh food requires careful planning, and every </a:t>
+              <a:t> of supplies was carefully planned, and the </a:t>
             </a:r>
             <a:pPr algn="l" indent="0" marL="0">
               <a:buNone/>
@@ -6102,7 +6102,7 @@
                 <a:ea typeface="Calibri" pitchFamily="34" charset="-122"/>
                 <a:cs typeface="Calibri" pitchFamily="34" charset="-120"/>
               </a:rPr>
-              <a:t> must follow strict safety rules.</a:t>
+              <a:t> arrived on time.</a:t>
             </a:r>
             <a:endParaRPr lang="en-US" sz="1800" dirty="0"/>
           </a:p>
@@ -6716,7 +6716,7 @@
                 <a:ea typeface="Calibri" pitchFamily="34" charset="-122"/>
                 <a:cs typeface="Calibri" pitchFamily="34" charset="-120"/>
               </a:rPr>
-              <a:t>Word Labs  •  wordlabs.app  •  Root: 'transport' = carry across or over</a:t>
+              <a:t>Word Labs  •  wordlabs.app  •  Root: 'transport' = carry across or beyond</a:t>
             </a:r>
             <a:endParaRPr lang="en-US" sz="800" dirty="0"/>
           </a:p>
@@ -7543,7 +7543,7 @@
                 <a:ea typeface="Calibri" pitchFamily="34" charset="-122"/>
                 <a:cs typeface="Calibri" pitchFamily="34" charset="-120"/>
               </a:rPr>
-              <a:t>Word Labs  •  wordlabs.app  •  Root: 'transport' = carry across or over</a:t>
+              <a:t>Word Labs  •  wordlabs.app  •  Root: 'transport' = carry across or beyond</a:t>
             </a:r>
             <a:endParaRPr lang="en-US" sz="800" dirty="0"/>
           </a:p>
@@ -7762,7 +7762,7 @@
         </p:nvSpPr>
         <p:spPr>
           <a:xfrm>
-            <a:off x="2938272" y="2258568"/>
+            <a:off x="2221992" y="2258568"/>
             <a:ext cx="1828800" cy="292608"/>
           </a:xfrm>
           <a:prstGeom prst="rect">
@@ -7771,11 +7771,11 @@
             </a:avLst>
           </a:prstGeom>
           <a:solidFill>
-            <a:srgbClr val="CCFBF1"/>
+            <a:srgbClr val="DDD6FE"/>
           </a:solidFill>
           <a:ln w="19050">
             <a:solidFill>
-              <a:srgbClr val="0D9488"/>
+              <a:srgbClr val="7C3AED"/>
             </a:solidFill>
             <a:prstDash val="solid"/>
           </a:ln>
@@ -7796,7 +7796,7 @@
         </p:nvSpPr>
         <p:spPr>
           <a:xfrm>
-            <a:off x="2938272" y="2258568"/>
+            <a:off x="2221992" y="2258568"/>
             <a:ext cx="1828800" cy="292608"/>
           </a:xfrm>
           <a:prstGeom prst="rect">
@@ -7815,13 +7815,13 @@
             <a:r>
               <a:rPr lang="en-US" sz="1300" b="1" dirty="0">
                 <a:solidFill>
-                  <a:srgbClr val="0F766E"/>
+                  <a:srgbClr val="4C1D95"/>
                 </a:solidFill>
                 <a:latin typeface="Trebuchet MS" pitchFamily="34" charset="0"/>
                 <a:ea typeface="Trebuchet MS" pitchFamily="34" charset="-122"/>
                 <a:cs typeface="Trebuchet MS" pitchFamily="34" charset="-120"/>
               </a:rPr>
-              <a:t>transport</a:t>
+              <a:t>trans</a:t>
             </a:r>
             <a:endParaRPr lang="en-US" sz="1300" dirty="0"/>
           </a:p>
@@ -7835,7 +7835,7 @@
         </p:nvSpPr>
         <p:spPr>
           <a:xfrm>
-            <a:off x="2938272" y="2569464"/>
+            <a:off x="2221992" y="2569464"/>
             <a:ext cx="1828800" cy="201168"/>
           </a:xfrm>
           <a:prstGeom prst="rect">
@@ -7860,7 +7860,7 @@
                 <a:ea typeface="Calibri" pitchFamily="34" charset="-122"/>
                 <a:cs typeface="Calibri" pitchFamily="34" charset="-120"/>
               </a:rPr>
-              <a:t>carry across</a:t>
+              <a:t>across, beyond</a:t>
             </a:r>
             <a:endParaRPr lang="en-US" sz="850" dirty="0"/>
           </a:p>
@@ -7874,7 +7874,7 @@
         </p:nvSpPr>
         <p:spPr>
           <a:xfrm>
-            <a:off x="5803392" y="2258568"/>
+            <a:off x="4370832" y="2258568"/>
             <a:ext cx="1828800" cy="292608"/>
           </a:xfrm>
           <a:prstGeom prst="rect">
@@ -7908,7 +7908,7 @@
         </p:nvSpPr>
         <p:spPr>
           <a:xfrm>
-            <a:off x="5803392" y="2258568"/>
+            <a:off x="4370832" y="2258568"/>
             <a:ext cx="1828800" cy="292608"/>
           </a:xfrm>
           <a:prstGeom prst="rect">
@@ -7933,7 +7933,7 @@
                 <a:ea typeface="Trebuchet MS" pitchFamily="34" charset="-122"/>
                 <a:cs typeface="Trebuchet MS" pitchFamily="34" charset="-120"/>
               </a:rPr>
-              <a:t>ation</a:t>
+              <a:t>port</a:t>
             </a:r>
             <a:endParaRPr lang="en-US" sz="1300" dirty="0"/>
           </a:p>
@@ -7947,7 +7947,7 @@
         </p:nvSpPr>
         <p:spPr>
           <a:xfrm>
-            <a:off x="5803392" y="2569464"/>
+            <a:off x="4370832" y="2569464"/>
             <a:ext cx="1828800" cy="201168"/>
           </a:xfrm>
           <a:prstGeom prst="rect">
@@ -7972,7 +7972,7 @@
                 <a:ea typeface="Calibri" pitchFamily="34" charset="-122"/>
                 <a:cs typeface="Calibri" pitchFamily="34" charset="-120"/>
               </a:rPr>
-              <a:t>the act or process of</a:t>
+              <a:t>carry</a:t>
             </a:r>
             <a:endParaRPr lang="en-US" sz="850" dirty="0"/>
           </a:p>
@@ -7981,6 +7981,118 @@
       <p:sp>
         <p:nvSpPr>
           <p:cNvPr id="22" name="Shape 20"/>
+          <p:cNvSpPr/>
+          <p:nvPr/>
+        </p:nvSpPr>
+        <p:spPr>
+          <a:xfrm>
+            <a:off x="6519672" y="2258568"/>
+            <a:ext cx="1828800" cy="292608"/>
+          </a:xfrm>
+          <a:prstGeom prst="rect">
+            <a:avLst>
+              <a:gd name="adj" fmla="val 25000"/>
+            </a:avLst>
+          </a:prstGeom>
+          <a:solidFill>
+            <a:srgbClr val="FCE7F3"/>
+          </a:solidFill>
+          <a:ln w="19050">
+            <a:solidFill>
+              <a:srgbClr val="DB2777"/>
+            </a:solidFill>
+            <a:prstDash val="solid"/>
+          </a:ln>
+          <a:effectLst>
+            <a:outerShdw sx="100000" sy="100000" kx="0" ky="0" algn="bl" rotWithShape="0" blurRad="101600" dist="38100" dir="8100000">
+              <a:srgbClr val="000000">
+                <a:alpha val="12000"/>
+              </a:srgbClr>
+            </a:outerShdw>
+          </a:effectLst>
+        </p:spPr>
+      </p:sp>
+      <p:sp>
+        <p:nvSpPr>
+          <p:cNvPr id="23" name="Text 21"/>
+          <p:cNvSpPr/>
+          <p:nvPr/>
+        </p:nvSpPr>
+        <p:spPr>
+          <a:xfrm>
+            <a:off x="6519672" y="2258568"/>
+            <a:ext cx="1828800" cy="292608"/>
+          </a:xfrm>
+          <a:prstGeom prst="rect">
+            <a:avLst/>
+          </a:prstGeom>
+          <a:noFill/>
+          <a:ln/>
+        </p:spPr>
+        <p:txBody>
+          <a:bodyPr wrap="square" lIns="0" tIns="0" rIns="0" bIns="0" rtlCol="0" anchor="ctr"/>
+          <a:lstStyle/>
+          <a:p>
+            <a:pPr algn="ctr" indent="0" marL="0">
+              <a:buNone/>
+            </a:pPr>
+            <a:r>
+              <a:rPr lang="en-US" sz="1300" b="1" dirty="0">
+                <a:solidFill>
+                  <a:srgbClr val="9D174D"/>
+                </a:solidFill>
+                <a:latin typeface="Trebuchet MS" pitchFamily="34" charset="0"/>
+                <a:ea typeface="Trebuchet MS" pitchFamily="34" charset="-122"/>
+                <a:cs typeface="Trebuchet MS" pitchFamily="34" charset="-120"/>
+              </a:rPr>
+              <a:t>ation</a:t>
+            </a:r>
+            <a:endParaRPr lang="en-US" sz="1300" dirty="0"/>
+          </a:p>
+        </p:txBody>
+      </p:sp>
+      <p:sp>
+        <p:nvSpPr>
+          <p:cNvPr id="24" name="Text 22"/>
+          <p:cNvSpPr/>
+          <p:nvPr/>
+        </p:nvSpPr>
+        <p:spPr>
+          <a:xfrm>
+            <a:off x="6519672" y="2569464"/>
+            <a:ext cx="1828800" cy="201168"/>
+          </a:xfrm>
+          <a:prstGeom prst="rect">
+            <a:avLst/>
+          </a:prstGeom>
+          <a:noFill/>
+          <a:ln/>
+        </p:spPr>
+        <p:txBody>
+          <a:bodyPr wrap="square" lIns="0" tIns="0" rIns="0" bIns="0" rtlCol="0" anchor="t"/>
+          <a:lstStyle/>
+          <a:p>
+            <a:pPr algn="ctr" indent="0" marL="0">
+              <a:buNone/>
+            </a:pPr>
+            <a:r>
+              <a:rPr lang="en-US" sz="850" dirty="0">
+                <a:solidFill>
+                  <a:srgbClr val="475569"/>
+                </a:solidFill>
+                <a:latin typeface="Calibri" pitchFamily="34" charset="0"/>
+                <a:ea typeface="Calibri" pitchFamily="34" charset="-122"/>
+                <a:cs typeface="Calibri" pitchFamily="34" charset="-120"/>
+              </a:rPr>
+              <a:t>act or process of</a:t>
+            </a:r>
+            <a:endParaRPr lang="en-US" sz="850" dirty="0"/>
+          </a:p>
+        </p:txBody>
+      </p:sp>
+      <p:sp>
+        <p:nvSpPr>
+          <p:cNvPr id="25" name="Shape 23"/>
           <p:cNvSpPr/>
           <p:nvPr/>
         </p:nvSpPr>
@@ -8007,7 +8119,7 @@
       </p:sp>
       <p:sp>
         <p:nvSpPr>
-          <p:cNvPr id="23" name="Text 21"/>
+          <p:cNvPr id="26" name="Text 24"/>
           <p:cNvSpPr/>
           <p:nvPr/>
         </p:nvSpPr>
@@ -8046,7 +8158,7 @@
       </p:sp>
       <p:sp>
         <p:nvSpPr>
-          <p:cNvPr id="24" name="Shape 22"/>
+          <p:cNvPr id="27" name="Shape 25"/>
           <p:cNvSpPr/>
           <p:nvPr/>
         </p:nvSpPr>
@@ -8073,7 +8185,7 @@
       </p:sp>
       <p:sp>
         <p:nvSpPr>
-          <p:cNvPr id="25" name="Text 23"/>
+          <p:cNvPr id="28" name="Text 26"/>
           <p:cNvSpPr/>
           <p:nvPr/>
         </p:nvSpPr>
@@ -8112,7 +8224,7 @@
       </p:sp>
       <p:sp>
         <p:nvSpPr>
-          <p:cNvPr id="26" name="Shape 24"/>
+          <p:cNvPr id="29" name="Shape 27"/>
           <p:cNvSpPr/>
           <p:nvPr/>
         </p:nvSpPr>
@@ -8139,7 +8251,7 @@
       </p:sp>
       <p:sp>
         <p:nvSpPr>
-          <p:cNvPr id="27" name="Text 25"/>
+          <p:cNvPr id="30" name="Text 28"/>
           <p:cNvSpPr/>
           <p:nvPr/>
         </p:nvSpPr>
@@ -8178,7 +8290,7 @@
       </p:sp>
       <p:sp>
         <p:nvSpPr>
-          <p:cNvPr id="28" name="Shape 26"/>
+          <p:cNvPr id="31" name="Shape 29"/>
           <p:cNvSpPr/>
           <p:nvPr/>
         </p:nvSpPr>
@@ -8205,7 +8317,7 @@
       </p:sp>
       <p:sp>
         <p:nvSpPr>
-          <p:cNvPr id="29" name="Text 27"/>
+          <p:cNvPr id="32" name="Text 30"/>
           <p:cNvSpPr/>
           <p:nvPr/>
         </p:nvSpPr>
@@ -8528,7 +8640,7 @@
                 <a:ea typeface="Calibri" pitchFamily="34" charset="-122"/>
                 <a:cs typeface="Calibri" pitchFamily="34" charset="-120"/>
               </a:rPr>
-              <a:t>Word Labs  •  wordlabs.app  •  Root: 'transport' = carry across or over</a:t>
+              <a:t>Word Labs  •  wordlabs.app  •  Root: 'transport' = carry across or beyond</a:t>
             </a:r>
             <a:endParaRPr lang="en-US" sz="800" dirty="0"/>
           </a:p>
@@ -8747,7 +8859,7 @@
         </p:nvSpPr>
         <p:spPr>
           <a:xfrm>
-            <a:off x="2938272" y="2258568"/>
+            <a:off x="2221992" y="2258568"/>
             <a:ext cx="1828800" cy="292608"/>
           </a:xfrm>
           <a:prstGeom prst="rect">
@@ -8756,11 +8868,11 @@
             </a:avLst>
           </a:prstGeom>
           <a:solidFill>
-            <a:srgbClr val="CCFBF1"/>
+            <a:srgbClr val="DDD6FE"/>
           </a:solidFill>
           <a:ln w="19050">
             <a:solidFill>
-              <a:srgbClr val="0D9488"/>
+              <a:srgbClr val="7C3AED"/>
             </a:solidFill>
             <a:prstDash val="solid"/>
           </a:ln>
@@ -8781,7 +8893,7 @@
         </p:nvSpPr>
         <p:spPr>
           <a:xfrm>
-            <a:off x="2938272" y="2258568"/>
+            <a:off x="2221992" y="2258568"/>
             <a:ext cx="1828800" cy="292608"/>
           </a:xfrm>
           <a:prstGeom prst="rect">
@@ -8800,13 +8912,13 @@
             <a:r>
               <a:rPr lang="en-US" sz="1300" b="1" dirty="0">
                 <a:solidFill>
-                  <a:srgbClr val="0F766E"/>
+                  <a:srgbClr val="4C1D95"/>
                 </a:solidFill>
                 <a:latin typeface="Trebuchet MS" pitchFamily="34" charset="0"/>
                 <a:ea typeface="Trebuchet MS" pitchFamily="34" charset="-122"/>
                 <a:cs typeface="Trebuchet MS" pitchFamily="34" charset="-120"/>
               </a:rPr>
-              <a:t>transport</a:t>
+              <a:t>trans</a:t>
             </a:r>
             <a:endParaRPr lang="en-US" sz="1300" dirty="0"/>
           </a:p>
@@ -8820,7 +8932,7 @@
         </p:nvSpPr>
         <p:spPr>
           <a:xfrm>
-            <a:off x="2938272" y="2569464"/>
+            <a:off x="2221992" y="2569464"/>
             <a:ext cx="1828800" cy="201168"/>
           </a:xfrm>
           <a:prstGeom prst="rect">
@@ -8845,7 +8957,7 @@
                 <a:ea typeface="Calibri" pitchFamily="34" charset="-122"/>
                 <a:cs typeface="Calibri" pitchFamily="34" charset="-120"/>
               </a:rPr>
-              <a:t>carry across</a:t>
+              <a:t>across, beyond</a:t>
             </a:r>
             <a:endParaRPr lang="en-US" sz="850" dirty="0"/>
           </a:p>
@@ -8859,7 +8971,7 @@
         </p:nvSpPr>
         <p:spPr>
           <a:xfrm>
-            <a:off x="5803392" y="2258568"/>
+            <a:off x="4370832" y="2258568"/>
             <a:ext cx="1828800" cy="292608"/>
           </a:xfrm>
           <a:prstGeom prst="rect">
@@ -8893,7 +9005,7 @@
         </p:nvSpPr>
         <p:spPr>
           <a:xfrm>
-            <a:off x="5803392" y="2258568"/>
+            <a:off x="4370832" y="2258568"/>
             <a:ext cx="1828800" cy="292608"/>
           </a:xfrm>
           <a:prstGeom prst="rect">
@@ -8918,7 +9030,7 @@
                 <a:ea typeface="Trebuchet MS" pitchFamily="34" charset="-122"/>
                 <a:cs typeface="Trebuchet MS" pitchFamily="34" charset="-120"/>
               </a:rPr>
-              <a:t>ation</a:t>
+              <a:t>port</a:t>
             </a:r>
             <a:endParaRPr lang="en-US" sz="1300" dirty="0"/>
           </a:p>
@@ -8932,7 +9044,7 @@
         </p:nvSpPr>
         <p:spPr>
           <a:xfrm>
-            <a:off x="5803392" y="2569464"/>
+            <a:off x="4370832" y="2569464"/>
             <a:ext cx="1828800" cy="201168"/>
           </a:xfrm>
           <a:prstGeom prst="rect">
@@ -8957,7 +9069,7 @@
                 <a:ea typeface="Calibri" pitchFamily="34" charset="-122"/>
                 <a:cs typeface="Calibri" pitchFamily="34" charset="-120"/>
               </a:rPr>
-              <a:t>the act or process of</a:t>
+              <a:t>carry</a:t>
             </a:r>
             <a:endParaRPr lang="en-US" sz="850" dirty="0"/>
           </a:p>
@@ -8966,6 +9078,118 @@
       <p:sp>
         <p:nvSpPr>
           <p:cNvPr id="22" name="Shape 20"/>
+          <p:cNvSpPr/>
+          <p:nvPr/>
+        </p:nvSpPr>
+        <p:spPr>
+          <a:xfrm>
+            <a:off x="6519672" y="2258568"/>
+            <a:ext cx="1828800" cy="292608"/>
+          </a:xfrm>
+          <a:prstGeom prst="rect">
+            <a:avLst>
+              <a:gd name="adj" fmla="val 25000"/>
+            </a:avLst>
+          </a:prstGeom>
+          <a:solidFill>
+            <a:srgbClr val="FCE7F3"/>
+          </a:solidFill>
+          <a:ln w="19050">
+            <a:solidFill>
+              <a:srgbClr val="DB2777"/>
+            </a:solidFill>
+            <a:prstDash val="solid"/>
+          </a:ln>
+          <a:effectLst>
+            <a:outerShdw sx="100000" sy="100000" kx="0" ky="0" algn="bl" rotWithShape="0" blurRad="101600" dist="38100" dir="8100000">
+              <a:srgbClr val="000000">
+                <a:alpha val="12000"/>
+              </a:srgbClr>
+            </a:outerShdw>
+          </a:effectLst>
+        </p:spPr>
+      </p:sp>
+      <p:sp>
+        <p:nvSpPr>
+          <p:cNvPr id="23" name="Text 21"/>
+          <p:cNvSpPr/>
+          <p:nvPr/>
+        </p:nvSpPr>
+        <p:spPr>
+          <a:xfrm>
+            <a:off x="6519672" y="2258568"/>
+            <a:ext cx="1828800" cy="292608"/>
+          </a:xfrm>
+          <a:prstGeom prst="rect">
+            <a:avLst/>
+          </a:prstGeom>
+          <a:noFill/>
+          <a:ln/>
+        </p:spPr>
+        <p:txBody>
+          <a:bodyPr wrap="square" lIns="0" tIns="0" rIns="0" bIns="0" rtlCol="0" anchor="ctr"/>
+          <a:lstStyle/>
+          <a:p>
+            <a:pPr algn="ctr" indent="0" marL="0">
+              <a:buNone/>
+            </a:pPr>
+            <a:r>
+              <a:rPr lang="en-US" sz="1300" b="1" dirty="0">
+                <a:solidFill>
+                  <a:srgbClr val="9D174D"/>
+                </a:solidFill>
+                <a:latin typeface="Trebuchet MS" pitchFamily="34" charset="0"/>
+                <a:ea typeface="Trebuchet MS" pitchFamily="34" charset="-122"/>
+                <a:cs typeface="Trebuchet MS" pitchFamily="34" charset="-120"/>
+              </a:rPr>
+              <a:t>ation</a:t>
+            </a:r>
+            <a:endParaRPr lang="en-US" sz="1300" dirty="0"/>
+          </a:p>
+        </p:txBody>
+      </p:sp>
+      <p:sp>
+        <p:nvSpPr>
+          <p:cNvPr id="24" name="Text 22"/>
+          <p:cNvSpPr/>
+          <p:nvPr/>
+        </p:nvSpPr>
+        <p:spPr>
+          <a:xfrm>
+            <a:off x="6519672" y="2569464"/>
+            <a:ext cx="1828800" cy="201168"/>
+          </a:xfrm>
+          <a:prstGeom prst="rect">
+            <a:avLst/>
+          </a:prstGeom>
+          <a:noFill/>
+          <a:ln/>
+        </p:spPr>
+        <p:txBody>
+          <a:bodyPr wrap="square" lIns="0" tIns="0" rIns="0" bIns="0" rtlCol="0" anchor="t"/>
+          <a:lstStyle/>
+          <a:p>
+            <a:pPr algn="ctr" indent="0" marL="0">
+              <a:buNone/>
+            </a:pPr>
+            <a:r>
+              <a:rPr lang="en-US" sz="850" dirty="0">
+                <a:solidFill>
+                  <a:srgbClr val="475569"/>
+                </a:solidFill>
+                <a:latin typeface="Calibri" pitchFamily="34" charset="0"/>
+                <a:ea typeface="Calibri" pitchFamily="34" charset="-122"/>
+                <a:cs typeface="Calibri" pitchFamily="34" charset="-120"/>
+              </a:rPr>
+              <a:t>act or process of</a:t>
+            </a:r>
+            <a:endParaRPr lang="en-US" sz="850" dirty="0"/>
+          </a:p>
+        </p:txBody>
+      </p:sp>
+      <p:sp>
+        <p:nvSpPr>
+          <p:cNvPr id="25" name="Shape 23"/>
           <p:cNvSpPr/>
           <p:nvPr/>
         </p:nvSpPr>
@@ -8992,7 +9216,7 @@
       </p:sp>
       <p:sp>
         <p:nvSpPr>
-          <p:cNvPr id="23" name="Text 21"/>
+          <p:cNvPr id="26" name="Text 24"/>
           <p:cNvSpPr/>
           <p:nvPr/>
         </p:nvSpPr>
@@ -9031,7 +9255,7 @@
       </p:sp>
       <p:sp>
         <p:nvSpPr>
-          <p:cNvPr id="24" name="Shape 22"/>
+          <p:cNvPr id="27" name="Shape 25"/>
           <p:cNvSpPr/>
           <p:nvPr/>
         </p:nvSpPr>
@@ -9058,7 +9282,7 @@
       </p:sp>
       <p:sp>
         <p:nvSpPr>
-          <p:cNvPr id="25" name="Shape 23"/>
+          <p:cNvPr id="28" name="Shape 26"/>
           <p:cNvSpPr/>
           <p:nvPr/>
         </p:nvSpPr>
@@ -9085,7 +9309,7 @@
       </p:sp>
       <p:sp>
         <p:nvSpPr>
-          <p:cNvPr id="26" name="Text 24"/>
+          <p:cNvPr id="29" name="Text 27"/>
           <p:cNvSpPr/>
           <p:nvPr/>
         </p:nvSpPr>
@@ -9124,7 +9348,7 @@
       </p:sp>
       <p:sp>
         <p:nvSpPr>
-          <p:cNvPr id="27" name="Text 25"/>
+          <p:cNvPr id="30" name="Text 28"/>
           <p:cNvSpPr/>
           <p:nvPr/>
         </p:nvSpPr>
@@ -9163,7 +9387,7 @@
       </p:sp>
       <p:sp>
         <p:nvSpPr>
-          <p:cNvPr id="28" name="Shape 26"/>
+          <p:cNvPr id="31" name="Shape 29"/>
           <p:cNvSpPr/>
           <p:nvPr/>
         </p:nvSpPr>
@@ -9190,7 +9414,7 @@
       </p:sp>
       <p:sp>
         <p:nvSpPr>
-          <p:cNvPr id="29" name="Text 27"/>
+          <p:cNvPr id="32" name="Text 30"/>
           <p:cNvSpPr/>
           <p:nvPr/>
         </p:nvSpPr>
@@ -9229,7 +9453,7 @@
       </p:sp>
       <p:sp>
         <p:nvSpPr>
-          <p:cNvPr id="30" name="Text 28"/>
+          <p:cNvPr id="33" name="Text 31"/>
           <p:cNvSpPr/>
           <p:nvPr/>
         </p:nvSpPr>
@@ -9268,7 +9492,7 @@
       </p:sp>
       <p:sp>
         <p:nvSpPr>
-          <p:cNvPr id="31" name="Shape 29"/>
+          <p:cNvPr id="34" name="Shape 32"/>
           <p:cNvSpPr/>
           <p:nvPr/>
         </p:nvSpPr>
@@ -9295,7 +9519,7 @@
       </p:sp>
       <p:sp>
         <p:nvSpPr>
-          <p:cNvPr id="32" name="Text 30"/>
+          <p:cNvPr id="35" name="Text 33"/>
           <p:cNvSpPr/>
           <p:nvPr/>
         </p:nvSpPr>
@@ -9334,7 +9558,7 @@
       </p:sp>
       <p:sp>
         <p:nvSpPr>
-          <p:cNvPr id="33" name="Text 31"/>
+          <p:cNvPr id="36" name="Text 34"/>
           <p:cNvSpPr/>
           <p:nvPr/>
         </p:nvSpPr>
@@ -9373,7 +9597,7 @@
       </p:sp>
       <p:sp>
         <p:nvSpPr>
-          <p:cNvPr id="34" name="Shape 32"/>
+          <p:cNvPr id="37" name="Shape 35"/>
           <p:cNvSpPr/>
           <p:nvPr/>
         </p:nvSpPr>
@@ -9400,7 +9624,7 @@
       </p:sp>
       <p:sp>
         <p:nvSpPr>
-          <p:cNvPr id="35" name="Text 33"/>
+          <p:cNvPr id="38" name="Text 36"/>
           <p:cNvSpPr/>
           <p:nvPr/>
         </p:nvSpPr>
@@ -9439,7 +9663,7 @@
       </p:sp>
       <p:sp>
         <p:nvSpPr>
-          <p:cNvPr id="36" name="Shape 34"/>
+          <p:cNvPr id="39" name="Shape 37"/>
           <p:cNvSpPr/>
           <p:nvPr/>
         </p:nvSpPr>
@@ -9466,7 +9690,7 @@
       </p:sp>
       <p:sp>
         <p:nvSpPr>
-          <p:cNvPr id="37" name="Text 35"/>
+          <p:cNvPr id="40" name="Text 38"/>
           <p:cNvSpPr/>
           <p:nvPr/>
         </p:nvSpPr>
@@ -9505,7 +9729,7 @@
       </p:sp>
       <p:sp>
         <p:nvSpPr>
-          <p:cNvPr id="38" name="Shape 36"/>
+          <p:cNvPr id="41" name="Shape 39"/>
           <p:cNvSpPr/>
           <p:nvPr/>
         </p:nvSpPr>
@@ -9532,7 +9756,7 @@
       </p:sp>
       <p:sp>
         <p:nvSpPr>
-          <p:cNvPr id="39" name="Text 37"/>
+          <p:cNvPr id="42" name="Text 40"/>
           <p:cNvSpPr/>
           <p:nvPr/>
         </p:nvSpPr>
@@ -9855,7 +10079,7 @@
                 <a:ea typeface="Calibri" pitchFamily="34" charset="-122"/>
                 <a:cs typeface="Calibri" pitchFamily="34" charset="-120"/>
               </a:rPr>
-              <a:t>Word Labs  •  wordlabs.app  •  Root: 'transport' = carry across or over</a:t>
+              <a:t>Word Labs  •  wordlabs.app  •  Root: 'transport' = carry across or beyond</a:t>
             </a:r>
             <a:endParaRPr lang="en-US" sz="800" dirty="0"/>
           </a:p>
@@ -10074,7 +10298,7 @@
         </p:nvSpPr>
         <p:spPr>
           <a:xfrm>
-            <a:off x="2938272" y="2258568"/>
+            <a:off x="2221992" y="2258568"/>
             <a:ext cx="1828800" cy="292608"/>
           </a:xfrm>
           <a:prstGeom prst="rect">
@@ -10083,11 +10307,11 @@
             </a:avLst>
           </a:prstGeom>
           <a:solidFill>
-            <a:srgbClr val="CCFBF1"/>
+            <a:srgbClr val="DDD6FE"/>
           </a:solidFill>
           <a:ln w="19050">
             <a:solidFill>
-              <a:srgbClr val="0D9488"/>
+              <a:srgbClr val="7C3AED"/>
             </a:solidFill>
             <a:prstDash val="solid"/>
           </a:ln>
@@ -10108,7 +10332,7 @@
         </p:nvSpPr>
         <p:spPr>
           <a:xfrm>
-            <a:off x="2938272" y="2258568"/>
+            <a:off x="2221992" y="2258568"/>
             <a:ext cx="1828800" cy="292608"/>
           </a:xfrm>
           <a:prstGeom prst="rect">
@@ -10127,13 +10351,13 @@
             <a:r>
               <a:rPr lang="en-US" sz="1300" b="1" dirty="0">
                 <a:solidFill>
-                  <a:srgbClr val="0F766E"/>
+                  <a:srgbClr val="4C1D95"/>
                 </a:solidFill>
                 <a:latin typeface="Trebuchet MS" pitchFamily="34" charset="0"/>
                 <a:ea typeface="Trebuchet MS" pitchFamily="34" charset="-122"/>
                 <a:cs typeface="Trebuchet MS" pitchFamily="34" charset="-120"/>
               </a:rPr>
-              <a:t>transport</a:t>
+              <a:t>trans</a:t>
             </a:r>
             <a:endParaRPr lang="en-US" sz="1300" dirty="0"/>
           </a:p>
@@ -10147,7 +10371,7 @@
         </p:nvSpPr>
         <p:spPr>
           <a:xfrm>
-            <a:off x="2938272" y="2569464"/>
+            <a:off x="2221992" y="2569464"/>
             <a:ext cx="1828800" cy="201168"/>
           </a:xfrm>
           <a:prstGeom prst="rect">
@@ -10172,7 +10396,7 @@
                 <a:ea typeface="Calibri" pitchFamily="34" charset="-122"/>
                 <a:cs typeface="Calibri" pitchFamily="34" charset="-120"/>
               </a:rPr>
-              <a:t>carry across</a:t>
+              <a:t>across, beyond</a:t>
             </a:r>
             <a:endParaRPr lang="en-US" sz="850" dirty="0"/>
           </a:p>
@@ -10186,7 +10410,7 @@
         </p:nvSpPr>
         <p:spPr>
           <a:xfrm>
-            <a:off x="5803392" y="2258568"/>
+            <a:off x="4370832" y="2258568"/>
             <a:ext cx="1828800" cy="292608"/>
           </a:xfrm>
           <a:prstGeom prst="rect">
@@ -10220,7 +10444,7 @@
         </p:nvSpPr>
         <p:spPr>
           <a:xfrm>
-            <a:off x="5803392" y="2258568"/>
+            <a:off x="4370832" y="2258568"/>
             <a:ext cx="1828800" cy="292608"/>
           </a:xfrm>
           <a:prstGeom prst="rect">
@@ -10245,7 +10469,7 @@
                 <a:ea typeface="Trebuchet MS" pitchFamily="34" charset="-122"/>
                 <a:cs typeface="Trebuchet MS" pitchFamily="34" charset="-120"/>
               </a:rPr>
-              <a:t>ation</a:t>
+              <a:t>port</a:t>
             </a:r>
             <a:endParaRPr lang="en-US" sz="1300" dirty="0"/>
           </a:p>
@@ -10259,7 +10483,7 @@
         </p:nvSpPr>
         <p:spPr>
           <a:xfrm>
-            <a:off x="5803392" y="2569464"/>
+            <a:off x="4370832" y="2569464"/>
             <a:ext cx="1828800" cy="201168"/>
           </a:xfrm>
           <a:prstGeom prst="rect">
@@ -10284,7 +10508,7 @@
                 <a:ea typeface="Calibri" pitchFamily="34" charset="-122"/>
                 <a:cs typeface="Calibri" pitchFamily="34" charset="-120"/>
               </a:rPr>
-              <a:t>the act or process of</a:t>
+              <a:t>carry</a:t>
             </a:r>
             <a:endParaRPr lang="en-US" sz="850" dirty="0"/>
           </a:p>
@@ -10293,6 +10517,118 @@
       <p:sp>
         <p:nvSpPr>
           <p:cNvPr id="22" name="Shape 20"/>
+          <p:cNvSpPr/>
+          <p:nvPr/>
+        </p:nvSpPr>
+        <p:spPr>
+          <a:xfrm>
+            <a:off x="6519672" y="2258568"/>
+            <a:ext cx="1828800" cy="292608"/>
+          </a:xfrm>
+          <a:prstGeom prst="rect">
+            <a:avLst>
+              <a:gd name="adj" fmla="val 25000"/>
+            </a:avLst>
+          </a:prstGeom>
+          <a:solidFill>
+            <a:srgbClr val="FCE7F3"/>
+          </a:solidFill>
+          <a:ln w="19050">
+            <a:solidFill>
+              <a:srgbClr val="DB2777"/>
+            </a:solidFill>
+            <a:prstDash val="solid"/>
+          </a:ln>
+          <a:effectLst>
+            <a:outerShdw sx="100000" sy="100000" kx="0" ky="0" algn="bl" rotWithShape="0" blurRad="101600" dist="38100" dir="8100000">
+              <a:srgbClr val="000000">
+                <a:alpha val="12000"/>
+              </a:srgbClr>
+            </a:outerShdw>
+          </a:effectLst>
+        </p:spPr>
+      </p:sp>
+      <p:sp>
+        <p:nvSpPr>
+          <p:cNvPr id="23" name="Text 21"/>
+          <p:cNvSpPr/>
+          <p:nvPr/>
+        </p:nvSpPr>
+        <p:spPr>
+          <a:xfrm>
+            <a:off x="6519672" y="2258568"/>
+            <a:ext cx="1828800" cy="292608"/>
+          </a:xfrm>
+          <a:prstGeom prst="rect">
+            <a:avLst/>
+          </a:prstGeom>
+          <a:noFill/>
+          <a:ln/>
+        </p:spPr>
+        <p:txBody>
+          <a:bodyPr wrap="square" lIns="0" tIns="0" rIns="0" bIns="0" rtlCol="0" anchor="ctr"/>
+          <a:lstStyle/>
+          <a:p>
+            <a:pPr algn="ctr" indent="0" marL="0">
+              <a:buNone/>
+            </a:pPr>
+            <a:r>
+              <a:rPr lang="en-US" sz="1300" b="1" dirty="0">
+                <a:solidFill>
+                  <a:srgbClr val="9D174D"/>
+                </a:solidFill>
+                <a:latin typeface="Trebuchet MS" pitchFamily="34" charset="0"/>
+                <a:ea typeface="Trebuchet MS" pitchFamily="34" charset="-122"/>
+                <a:cs typeface="Trebuchet MS" pitchFamily="34" charset="-120"/>
+              </a:rPr>
+              <a:t>ation</a:t>
+            </a:r>
+            <a:endParaRPr lang="en-US" sz="1300" dirty="0"/>
+          </a:p>
+        </p:txBody>
+      </p:sp>
+      <p:sp>
+        <p:nvSpPr>
+          <p:cNvPr id="24" name="Text 22"/>
+          <p:cNvSpPr/>
+          <p:nvPr/>
+        </p:nvSpPr>
+        <p:spPr>
+          <a:xfrm>
+            <a:off x="6519672" y="2569464"/>
+            <a:ext cx="1828800" cy="201168"/>
+          </a:xfrm>
+          <a:prstGeom prst="rect">
+            <a:avLst/>
+          </a:prstGeom>
+          <a:noFill/>
+          <a:ln/>
+        </p:spPr>
+        <p:txBody>
+          <a:bodyPr wrap="square" lIns="0" tIns="0" rIns="0" bIns="0" rtlCol="0" anchor="t"/>
+          <a:lstStyle/>
+          <a:p>
+            <a:pPr algn="ctr" indent="0" marL="0">
+              <a:buNone/>
+            </a:pPr>
+            <a:r>
+              <a:rPr lang="en-US" sz="850" dirty="0">
+                <a:solidFill>
+                  <a:srgbClr val="475569"/>
+                </a:solidFill>
+                <a:latin typeface="Calibri" pitchFamily="34" charset="0"/>
+                <a:ea typeface="Calibri" pitchFamily="34" charset="-122"/>
+                <a:cs typeface="Calibri" pitchFamily="34" charset="-120"/>
+              </a:rPr>
+              <a:t>act or process of</a:t>
+            </a:r>
+            <a:endParaRPr lang="en-US" sz="850" dirty="0"/>
+          </a:p>
+        </p:txBody>
+      </p:sp>
+      <p:sp>
+        <p:nvSpPr>
+          <p:cNvPr id="25" name="Shape 23"/>
           <p:cNvSpPr/>
           <p:nvPr/>
         </p:nvSpPr>
@@ -10319,7 +10655,7 @@
       </p:sp>
       <p:sp>
         <p:nvSpPr>
-          <p:cNvPr id="23" name="Text 21"/>
+          <p:cNvPr id="26" name="Text 24"/>
           <p:cNvSpPr/>
           <p:nvPr/>
         </p:nvSpPr>
@@ -10358,7 +10694,7 @@
       </p:sp>
       <p:sp>
         <p:nvSpPr>
-          <p:cNvPr id="24" name="Shape 22"/>
+          <p:cNvPr id="27" name="Shape 25"/>
           <p:cNvSpPr/>
           <p:nvPr/>
         </p:nvSpPr>
@@ -10385,7 +10721,7 @@
       </p:sp>
       <p:sp>
         <p:nvSpPr>
-          <p:cNvPr id="25" name="Shape 23"/>
+          <p:cNvPr id="28" name="Shape 26"/>
           <p:cNvSpPr/>
           <p:nvPr/>
         </p:nvSpPr>
@@ -10412,7 +10748,7 @@
       </p:sp>
       <p:sp>
         <p:nvSpPr>
-          <p:cNvPr id="26" name="Text 24"/>
+          <p:cNvPr id="29" name="Text 27"/>
           <p:cNvSpPr/>
           <p:nvPr/>
         </p:nvSpPr>
@@ -10451,7 +10787,7 @@
       </p:sp>
       <p:sp>
         <p:nvSpPr>
-          <p:cNvPr id="27" name="Text 25"/>
+          <p:cNvPr id="30" name="Text 28"/>
           <p:cNvSpPr/>
           <p:nvPr/>
         </p:nvSpPr>
@@ -10490,7 +10826,7 @@
       </p:sp>
       <p:sp>
         <p:nvSpPr>
-          <p:cNvPr id="28" name="Shape 26"/>
+          <p:cNvPr id="31" name="Shape 29"/>
           <p:cNvSpPr/>
           <p:nvPr/>
         </p:nvSpPr>
@@ -10517,7 +10853,7 @@
       </p:sp>
       <p:sp>
         <p:nvSpPr>
-          <p:cNvPr id="29" name="Text 27"/>
+          <p:cNvPr id="32" name="Text 30"/>
           <p:cNvSpPr/>
           <p:nvPr/>
         </p:nvSpPr>
@@ -10556,7 +10892,7 @@
       </p:sp>
       <p:sp>
         <p:nvSpPr>
-          <p:cNvPr id="30" name="Text 28"/>
+          <p:cNvPr id="33" name="Text 31"/>
           <p:cNvSpPr/>
           <p:nvPr/>
         </p:nvSpPr>
@@ -10595,7 +10931,7 @@
       </p:sp>
       <p:sp>
         <p:nvSpPr>
-          <p:cNvPr id="31" name="Shape 29"/>
+          <p:cNvPr id="34" name="Shape 32"/>
           <p:cNvSpPr/>
           <p:nvPr/>
         </p:nvSpPr>
@@ -10622,7 +10958,7 @@
       </p:sp>
       <p:sp>
         <p:nvSpPr>
-          <p:cNvPr id="32" name="Text 30"/>
+          <p:cNvPr id="35" name="Text 33"/>
           <p:cNvSpPr/>
           <p:nvPr/>
         </p:nvSpPr>
@@ -10661,7 +10997,7 @@
       </p:sp>
       <p:sp>
         <p:nvSpPr>
-          <p:cNvPr id="33" name="Text 31"/>
+          <p:cNvPr id="36" name="Text 34"/>
           <p:cNvSpPr/>
           <p:nvPr/>
         </p:nvSpPr>
@@ -10700,7 +11036,7 @@
       </p:sp>
       <p:sp>
         <p:nvSpPr>
-          <p:cNvPr id="34" name="Shape 32"/>
+          <p:cNvPr id="37" name="Shape 35"/>
           <p:cNvSpPr/>
           <p:nvPr/>
         </p:nvSpPr>
@@ -10727,7 +11063,7 @@
       </p:sp>
       <p:sp>
         <p:nvSpPr>
-          <p:cNvPr id="35" name="Text 33"/>
+          <p:cNvPr id="38" name="Text 36"/>
           <p:cNvSpPr/>
           <p:nvPr/>
         </p:nvSpPr>
@@ -10766,7 +11102,7 @@
       </p:sp>
       <p:sp>
         <p:nvSpPr>
-          <p:cNvPr id="36" name="Shape 34"/>
+          <p:cNvPr id="39" name="Shape 37"/>
           <p:cNvSpPr/>
           <p:nvPr/>
         </p:nvSpPr>
@@ -10793,7 +11129,7 @@
       </p:sp>
       <p:sp>
         <p:nvSpPr>
-          <p:cNvPr id="37" name="Text 35"/>
+          <p:cNvPr id="40" name="Text 38"/>
           <p:cNvSpPr/>
           <p:nvPr/>
         </p:nvSpPr>
@@ -10832,7 +11168,7 @@
       </p:sp>
       <p:sp>
         <p:nvSpPr>
-          <p:cNvPr id="38" name="Shape 36"/>
+          <p:cNvPr id="41" name="Shape 39"/>
           <p:cNvSpPr/>
           <p:nvPr/>
         </p:nvSpPr>
@@ -10859,7 +11195,7 @@
       </p:sp>
       <p:sp>
         <p:nvSpPr>
-          <p:cNvPr id="39" name="Shape 37"/>
+          <p:cNvPr id="42" name="Shape 40"/>
           <p:cNvSpPr/>
           <p:nvPr/>
         </p:nvSpPr>
@@ -10886,7 +11222,7 @@
       </p:sp>
       <p:sp>
         <p:nvSpPr>
-          <p:cNvPr id="40" name="Text 38"/>
+          <p:cNvPr id="43" name="Text 41"/>
           <p:cNvSpPr/>
           <p:nvPr/>
         </p:nvSpPr>
@@ -10925,7 +11261,7 @@
       </p:sp>
       <p:sp>
         <p:nvSpPr>
-          <p:cNvPr id="41" name="Shape 39"/>
+          <p:cNvPr id="44" name="Shape 42"/>
           <p:cNvSpPr/>
           <p:nvPr/>
         </p:nvSpPr>
@@ -10952,7 +11288,7 @@
       </p:sp>
       <p:sp>
         <p:nvSpPr>
-          <p:cNvPr id="42" name="Text 40"/>
+          <p:cNvPr id="45" name="Text 43"/>
           <p:cNvSpPr/>
           <p:nvPr/>
         </p:nvSpPr>
@@ -10991,7 +11327,7 @@
       </p:sp>
       <p:sp>
         <p:nvSpPr>
-          <p:cNvPr id="43" name="Shape 41"/>
+          <p:cNvPr id="46" name="Shape 44"/>
           <p:cNvSpPr/>
           <p:nvPr/>
         </p:nvSpPr>
@@ -11018,7 +11354,7 @@
       </p:sp>
       <p:sp>
         <p:nvSpPr>
-          <p:cNvPr id="44" name="Text 42"/>
+          <p:cNvPr id="47" name="Text 45"/>
           <p:cNvSpPr/>
           <p:nvPr/>
         </p:nvSpPr>
@@ -11057,7 +11393,7 @@
       </p:sp>
       <p:sp>
         <p:nvSpPr>
-          <p:cNvPr id="45" name="Shape 43"/>
+          <p:cNvPr id="48" name="Shape 46"/>
           <p:cNvSpPr/>
           <p:nvPr/>
         </p:nvSpPr>
@@ -11084,7 +11420,7 @@
       </p:sp>
       <p:sp>
         <p:nvSpPr>
-          <p:cNvPr id="46" name="Text 44"/>
+          <p:cNvPr id="49" name="Text 47"/>
           <p:cNvSpPr/>
           <p:nvPr/>
         </p:nvSpPr>
@@ -11123,7 +11459,7 @@
       </p:sp>
       <p:sp>
         <p:nvSpPr>
-          <p:cNvPr id="47" name="Shape 45"/>
+          <p:cNvPr id="50" name="Shape 48"/>
           <p:cNvSpPr/>
           <p:nvPr/>
         </p:nvSpPr>
@@ -11150,7 +11486,7 @@
       </p:sp>
       <p:sp>
         <p:nvSpPr>
-          <p:cNvPr id="48" name="Text 46"/>
+          <p:cNvPr id="51" name="Text 49"/>
           <p:cNvSpPr/>
           <p:nvPr/>
         </p:nvSpPr>
@@ -11189,7 +11525,7 @@
       </p:sp>
       <p:sp>
         <p:nvSpPr>
-          <p:cNvPr id="49" name="Shape 47"/>
+          <p:cNvPr id="52" name="Shape 50"/>
           <p:cNvSpPr/>
           <p:nvPr/>
         </p:nvSpPr>
@@ -11216,7 +11552,7 @@
       </p:sp>
       <p:sp>
         <p:nvSpPr>
-          <p:cNvPr id="50" name="Text 48"/>
+          <p:cNvPr id="53" name="Text 51"/>
           <p:cNvSpPr/>
           <p:nvPr/>
         </p:nvSpPr>
@@ -11255,7 +11591,7 @@
       </p:sp>
       <p:sp>
         <p:nvSpPr>
-          <p:cNvPr id="51" name="Shape 49"/>
+          <p:cNvPr id="54" name="Shape 52"/>
           <p:cNvSpPr/>
           <p:nvPr/>
         </p:nvSpPr>
@@ -11282,7 +11618,7 @@
       </p:sp>
       <p:sp>
         <p:nvSpPr>
-          <p:cNvPr id="52" name="Text 50"/>
+          <p:cNvPr id="55" name="Text 53"/>
           <p:cNvSpPr/>
           <p:nvPr/>
         </p:nvSpPr>
@@ -11321,7 +11657,7 @@
       </p:sp>
       <p:sp>
         <p:nvSpPr>
-          <p:cNvPr id="53" name="Shape 51"/>
+          <p:cNvPr id="56" name="Shape 54"/>
           <p:cNvSpPr/>
           <p:nvPr/>
         </p:nvSpPr>
@@ -11348,7 +11684,7 @@
       </p:sp>
       <p:sp>
         <p:nvSpPr>
-          <p:cNvPr id="54" name="Text 52"/>
+          <p:cNvPr id="57" name="Text 55"/>
           <p:cNvSpPr/>
           <p:nvPr/>
         </p:nvSpPr>
@@ -11387,7 +11723,7 @@
       </p:sp>
       <p:sp>
         <p:nvSpPr>
-          <p:cNvPr id="55" name="Shape 53"/>
+          <p:cNvPr id="58" name="Shape 56"/>
           <p:cNvSpPr/>
           <p:nvPr/>
         </p:nvSpPr>
@@ -11414,7 +11750,7 @@
       </p:sp>
       <p:sp>
         <p:nvSpPr>
-          <p:cNvPr id="56" name="Text 54"/>
+          <p:cNvPr id="59" name="Text 57"/>
           <p:cNvSpPr/>
           <p:nvPr/>
         </p:nvSpPr>
@@ -11453,7 +11789,7 @@
       </p:sp>
       <p:sp>
         <p:nvSpPr>
-          <p:cNvPr id="57" name="Shape 55"/>
+          <p:cNvPr id="60" name="Shape 58"/>
           <p:cNvSpPr/>
           <p:nvPr/>
         </p:nvSpPr>
@@ -11480,7 +11816,7 @@
       </p:sp>
       <p:sp>
         <p:nvSpPr>
-          <p:cNvPr id="58" name="Text 56"/>
+          <p:cNvPr id="61" name="Text 59"/>
           <p:cNvSpPr/>
           <p:nvPr/>
         </p:nvSpPr>
@@ -11519,7 +11855,7 @@
       </p:sp>
       <p:sp>
         <p:nvSpPr>
-          <p:cNvPr id="59" name="Text 57"/>
+          <p:cNvPr id="62" name="Text 60"/>
           <p:cNvSpPr/>
           <p:nvPr/>
         </p:nvSpPr>
@@ -11558,7 +11894,7 @@
       </p:sp>
       <p:sp>
         <p:nvSpPr>
-          <p:cNvPr id="60" name="Shape 58"/>
+          <p:cNvPr id="63" name="Shape 61"/>
           <p:cNvSpPr/>
           <p:nvPr/>
         </p:nvSpPr>
@@ -11585,7 +11921,7 @@
       </p:sp>
       <p:sp>
         <p:nvSpPr>
-          <p:cNvPr id="61" name="Text 59"/>
+          <p:cNvPr id="64" name="Text 62"/>
           <p:cNvSpPr/>
           <p:nvPr/>
         </p:nvSpPr>
@@ -11624,7 +11960,7 @@
       </p:sp>
       <p:sp>
         <p:nvSpPr>
-          <p:cNvPr id="62" name="Shape 60"/>
+          <p:cNvPr id="65" name="Shape 63"/>
           <p:cNvSpPr/>
           <p:nvPr/>
         </p:nvSpPr>
@@ -11651,7 +11987,7 @@
       </p:sp>
       <p:sp>
         <p:nvSpPr>
-          <p:cNvPr id="63" name="Text 61"/>
+          <p:cNvPr id="66" name="Text 64"/>
           <p:cNvSpPr/>
           <p:nvPr/>
         </p:nvSpPr>
@@ -11974,7 +12310,7 @@
                 <a:ea typeface="Calibri" pitchFamily="34" charset="-122"/>
                 <a:cs typeface="Calibri" pitchFamily="34" charset="-120"/>
               </a:rPr>
-              <a:t>Word Labs  •  wordlabs.app  •  Root: 'transport' = carry across or over</a:t>
+              <a:t>Word Labs  •  wordlabs.app  •  Root: 'transport' = carry across or beyond</a:t>
             </a:r>
             <a:endParaRPr lang="en-US" sz="800" dirty="0"/>
           </a:p>
@@ -12801,7 +13137,7 @@
                 <a:ea typeface="Calibri" pitchFamily="34" charset="-122"/>
                 <a:cs typeface="Calibri" pitchFamily="34" charset="-120"/>
               </a:rPr>
-              <a:t>Word Labs  •  wordlabs.app  •  Root: 'transport' = carry across or over</a:t>
+              <a:t>Word Labs  •  wordlabs.app  •  Root: 'transport' = carry across or beyond</a:t>
             </a:r>
             <a:endParaRPr lang="en-US" sz="800" dirty="0"/>
           </a:p>
@@ -13020,7 +13356,7 @@
         </p:nvSpPr>
         <p:spPr>
           <a:xfrm>
-            <a:off x="2938272" y="2258568"/>
+            <a:off x="2221992" y="2258568"/>
             <a:ext cx="1828800" cy="292608"/>
           </a:xfrm>
           <a:prstGeom prst="rect">
@@ -13029,11 +13365,11 @@
             </a:avLst>
           </a:prstGeom>
           <a:solidFill>
-            <a:srgbClr val="CCFBF1"/>
+            <a:srgbClr val="DDD6FE"/>
           </a:solidFill>
           <a:ln w="19050">
             <a:solidFill>
-              <a:srgbClr val="0D9488"/>
+              <a:srgbClr val="7C3AED"/>
             </a:solidFill>
             <a:prstDash val="solid"/>
           </a:ln>
@@ -13054,7 +13390,7 @@
         </p:nvSpPr>
         <p:spPr>
           <a:xfrm>
-            <a:off x="2938272" y="2258568"/>
+            <a:off x="2221992" y="2258568"/>
             <a:ext cx="1828800" cy="292608"/>
           </a:xfrm>
           <a:prstGeom prst="rect">
@@ -13073,13 +13409,13 @@
             <a:r>
               <a:rPr lang="en-US" sz="1300" b="1" dirty="0">
                 <a:solidFill>
-                  <a:srgbClr val="0F766E"/>
+                  <a:srgbClr val="4C1D95"/>
                 </a:solidFill>
                 <a:latin typeface="Trebuchet MS" pitchFamily="34" charset="0"/>
                 <a:ea typeface="Trebuchet MS" pitchFamily="34" charset="-122"/>
                 <a:cs typeface="Trebuchet MS" pitchFamily="34" charset="-120"/>
               </a:rPr>
-              <a:t>transport</a:t>
+              <a:t>trans</a:t>
             </a:r>
             <a:endParaRPr lang="en-US" sz="1300" dirty="0"/>
           </a:p>
@@ -13093,7 +13429,7 @@
         </p:nvSpPr>
         <p:spPr>
           <a:xfrm>
-            <a:off x="2938272" y="2569464"/>
+            <a:off x="2221992" y="2569464"/>
             <a:ext cx="1828800" cy="201168"/>
           </a:xfrm>
           <a:prstGeom prst="rect">
@@ -13118,7 +13454,7 @@
                 <a:ea typeface="Calibri" pitchFamily="34" charset="-122"/>
                 <a:cs typeface="Calibri" pitchFamily="34" charset="-120"/>
               </a:rPr>
-              <a:t>carry across</a:t>
+              <a:t>across, beyond</a:t>
             </a:r>
             <a:endParaRPr lang="en-US" sz="850" dirty="0"/>
           </a:p>
@@ -13132,7 +13468,7 @@
         </p:nvSpPr>
         <p:spPr>
           <a:xfrm>
-            <a:off x="5803392" y="2258568"/>
+            <a:off x="4370832" y="2258568"/>
             <a:ext cx="1828800" cy="292608"/>
           </a:xfrm>
           <a:prstGeom prst="rect">
@@ -13166,7 +13502,7 @@
         </p:nvSpPr>
         <p:spPr>
           <a:xfrm>
-            <a:off x="5803392" y="2258568"/>
+            <a:off x="4370832" y="2258568"/>
             <a:ext cx="1828800" cy="292608"/>
           </a:xfrm>
           <a:prstGeom prst="rect">
@@ -13191,7 +13527,7 @@
                 <a:ea typeface="Trebuchet MS" pitchFamily="34" charset="-122"/>
                 <a:cs typeface="Trebuchet MS" pitchFamily="34" charset="-120"/>
               </a:rPr>
-              <a:t>er</a:t>
+              <a:t>port</a:t>
             </a:r>
             <a:endParaRPr lang="en-US" sz="1300" dirty="0"/>
           </a:p>
@@ -13205,7 +13541,7 @@
         </p:nvSpPr>
         <p:spPr>
           <a:xfrm>
-            <a:off x="5803392" y="2569464"/>
+            <a:off x="4370832" y="2569464"/>
             <a:ext cx="1828800" cy="201168"/>
           </a:xfrm>
           <a:prstGeom prst="rect">
@@ -13230,6 +13566,118 @@
                 <a:ea typeface="Calibri" pitchFamily="34" charset="-122"/>
                 <a:cs typeface="Calibri" pitchFamily="34" charset="-120"/>
               </a:rPr>
+              <a:t>carry</a:t>
+            </a:r>
+            <a:endParaRPr lang="en-US" sz="850" dirty="0"/>
+          </a:p>
+        </p:txBody>
+      </p:sp>
+      <p:sp>
+        <p:nvSpPr>
+          <p:cNvPr id="22" name="Shape 20"/>
+          <p:cNvSpPr/>
+          <p:nvPr/>
+        </p:nvSpPr>
+        <p:spPr>
+          <a:xfrm>
+            <a:off x="6519672" y="2258568"/>
+            <a:ext cx="1828800" cy="292608"/>
+          </a:xfrm>
+          <a:prstGeom prst="rect">
+            <a:avLst>
+              <a:gd name="adj" fmla="val 25000"/>
+            </a:avLst>
+          </a:prstGeom>
+          <a:solidFill>
+            <a:srgbClr val="FCE7F3"/>
+          </a:solidFill>
+          <a:ln w="19050">
+            <a:solidFill>
+              <a:srgbClr val="DB2777"/>
+            </a:solidFill>
+            <a:prstDash val="solid"/>
+          </a:ln>
+          <a:effectLst>
+            <a:outerShdw sx="100000" sy="100000" kx="0" ky="0" algn="bl" rotWithShape="0" blurRad="101600" dist="38100" dir="8100000">
+              <a:srgbClr val="000000">
+                <a:alpha val="12000"/>
+              </a:srgbClr>
+            </a:outerShdw>
+          </a:effectLst>
+        </p:spPr>
+      </p:sp>
+      <p:sp>
+        <p:nvSpPr>
+          <p:cNvPr id="23" name="Text 21"/>
+          <p:cNvSpPr/>
+          <p:nvPr/>
+        </p:nvSpPr>
+        <p:spPr>
+          <a:xfrm>
+            <a:off x="6519672" y="2258568"/>
+            <a:ext cx="1828800" cy="292608"/>
+          </a:xfrm>
+          <a:prstGeom prst="rect">
+            <a:avLst/>
+          </a:prstGeom>
+          <a:noFill/>
+          <a:ln/>
+        </p:spPr>
+        <p:txBody>
+          <a:bodyPr wrap="square" lIns="0" tIns="0" rIns="0" bIns="0" rtlCol="0" anchor="ctr"/>
+          <a:lstStyle/>
+          <a:p>
+            <a:pPr algn="ctr" indent="0" marL="0">
+              <a:buNone/>
+            </a:pPr>
+            <a:r>
+              <a:rPr lang="en-US" sz="1300" b="1" dirty="0">
+                <a:solidFill>
+                  <a:srgbClr val="9D174D"/>
+                </a:solidFill>
+                <a:latin typeface="Trebuchet MS" pitchFamily="34" charset="0"/>
+                <a:ea typeface="Trebuchet MS" pitchFamily="34" charset="-122"/>
+                <a:cs typeface="Trebuchet MS" pitchFamily="34" charset="-120"/>
+              </a:rPr>
+              <a:t>er</a:t>
+            </a:r>
+            <a:endParaRPr lang="en-US" sz="1300" dirty="0"/>
+          </a:p>
+        </p:txBody>
+      </p:sp>
+      <p:sp>
+        <p:nvSpPr>
+          <p:cNvPr id="24" name="Text 22"/>
+          <p:cNvSpPr/>
+          <p:nvPr/>
+        </p:nvSpPr>
+        <p:spPr>
+          <a:xfrm>
+            <a:off x="6519672" y="2569464"/>
+            <a:ext cx="1828800" cy="201168"/>
+          </a:xfrm>
+          <a:prstGeom prst="rect">
+            <a:avLst/>
+          </a:prstGeom>
+          <a:noFill/>
+          <a:ln/>
+        </p:spPr>
+        <p:txBody>
+          <a:bodyPr wrap="square" lIns="0" tIns="0" rIns="0" bIns="0" rtlCol="0" anchor="t"/>
+          <a:lstStyle/>
+          <a:p>
+            <a:pPr algn="ctr" indent="0" marL="0">
+              <a:buNone/>
+            </a:pPr>
+            <a:r>
+              <a:rPr lang="en-US" sz="850" dirty="0">
+                <a:solidFill>
+                  <a:srgbClr val="475569"/>
+                </a:solidFill>
+                <a:latin typeface="Calibri" pitchFamily="34" charset="0"/>
+                <a:ea typeface="Calibri" pitchFamily="34" charset="-122"/>
+                <a:cs typeface="Calibri" pitchFamily="34" charset="-120"/>
+              </a:rPr>
               <a:t>one who does</a:t>
             </a:r>
             <a:endParaRPr lang="en-US" sz="850" dirty="0"/>
@@ -13238,7 +13686,7 @@
       </p:sp>
       <p:sp>
         <p:nvSpPr>
-          <p:cNvPr id="22" name="Shape 20"/>
+          <p:cNvPr id="25" name="Shape 23"/>
           <p:cNvSpPr/>
           <p:nvPr/>
         </p:nvSpPr>
@@ -13265,7 +13713,7 @@
       </p:sp>
       <p:sp>
         <p:nvSpPr>
-          <p:cNvPr id="23" name="Text 21"/>
+          <p:cNvPr id="26" name="Text 24"/>
           <p:cNvSpPr/>
           <p:nvPr/>
         </p:nvSpPr>
@@ -13304,7 +13752,7 @@
       </p:sp>
       <p:sp>
         <p:nvSpPr>
-          <p:cNvPr id="24" name="Shape 22"/>
+          <p:cNvPr id="27" name="Shape 25"/>
           <p:cNvSpPr/>
           <p:nvPr/>
         </p:nvSpPr>
@@ -13331,7 +13779,7 @@
       </p:sp>
       <p:sp>
         <p:nvSpPr>
-          <p:cNvPr id="25" name="Text 23"/>
+          <p:cNvPr id="28" name="Text 26"/>
           <p:cNvSpPr/>
           <p:nvPr/>
         </p:nvSpPr>
@@ -13370,7 +13818,7 @@
       </p:sp>
       <p:sp>
         <p:nvSpPr>
-          <p:cNvPr id="26" name="Shape 24"/>
+          <p:cNvPr id="29" name="Shape 27"/>
           <p:cNvSpPr/>
           <p:nvPr/>
         </p:nvSpPr>
@@ -13397,7 +13845,7 @@
       </p:sp>
       <p:sp>
         <p:nvSpPr>
-          <p:cNvPr id="27" name="Text 25"/>
+          <p:cNvPr id="30" name="Text 28"/>
           <p:cNvSpPr/>
           <p:nvPr/>
         </p:nvSpPr>
@@ -13436,7 +13884,7 @@
       </p:sp>
       <p:sp>
         <p:nvSpPr>
-          <p:cNvPr id="28" name="Shape 26"/>
+          <p:cNvPr id="31" name="Shape 29"/>
           <p:cNvSpPr/>
           <p:nvPr/>
         </p:nvSpPr>
@@ -13463,7 +13911,7 @@
       </p:sp>
       <p:sp>
         <p:nvSpPr>
-          <p:cNvPr id="29" name="Text 27"/>
+          <p:cNvPr id="32" name="Text 30"/>
           <p:cNvSpPr/>
           <p:nvPr/>
         </p:nvSpPr>
@@ -13786,7 +14234,7 @@
                 <a:ea typeface="Calibri" pitchFamily="34" charset="-122"/>
                 <a:cs typeface="Calibri" pitchFamily="34" charset="-120"/>
               </a:rPr>
-              <a:t>Word Labs  •  wordlabs.app  •  Root: 'transport' = carry across or over</a:t>
+              <a:t>Word Labs  •  wordlabs.app  •  Root: 'transport' = carry across or beyond</a:t>
             </a:r>
             <a:endParaRPr lang="en-US" sz="800" dirty="0"/>
           </a:p>
@@ -14005,7 +14453,7 @@
         </p:nvSpPr>
         <p:spPr>
           <a:xfrm>
-            <a:off x="2938272" y="2258568"/>
+            <a:off x="2221992" y="2258568"/>
             <a:ext cx="1828800" cy="292608"/>
           </a:xfrm>
           <a:prstGeom prst="rect">
@@ -14014,11 +14462,11 @@
             </a:avLst>
           </a:prstGeom>
           <a:solidFill>
-            <a:srgbClr val="CCFBF1"/>
+            <a:srgbClr val="DDD6FE"/>
           </a:solidFill>
           <a:ln w="19050">
             <a:solidFill>
-              <a:srgbClr val="0D9488"/>
+              <a:srgbClr val="7C3AED"/>
             </a:solidFill>
             <a:prstDash val="solid"/>
           </a:ln>
@@ -14039,7 +14487,7 @@
         </p:nvSpPr>
         <p:spPr>
           <a:xfrm>
-            <a:off x="2938272" y="2258568"/>
+            <a:off x="2221992" y="2258568"/>
             <a:ext cx="1828800" cy="292608"/>
           </a:xfrm>
           <a:prstGeom prst="rect">
@@ -14058,13 +14506,13 @@
             <a:r>
               <a:rPr lang="en-US" sz="1300" b="1" dirty="0">
                 <a:solidFill>
-                  <a:srgbClr val="0F766E"/>
+                  <a:srgbClr val="4C1D95"/>
                 </a:solidFill>
                 <a:latin typeface="Trebuchet MS" pitchFamily="34" charset="0"/>
                 <a:ea typeface="Trebuchet MS" pitchFamily="34" charset="-122"/>
                 <a:cs typeface="Trebuchet MS" pitchFamily="34" charset="-120"/>
               </a:rPr>
-              <a:t>transport</a:t>
+              <a:t>trans</a:t>
             </a:r>
             <a:endParaRPr lang="en-US" sz="1300" dirty="0"/>
           </a:p>
@@ -14078,7 +14526,7 @@
         </p:nvSpPr>
         <p:spPr>
           <a:xfrm>
-            <a:off x="2938272" y="2569464"/>
+            <a:off x="2221992" y="2569464"/>
             <a:ext cx="1828800" cy="201168"/>
           </a:xfrm>
           <a:prstGeom prst="rect">
@@ -14103,7 +14551,7 @@
                 <a:ea typeface="Calibri" pitchFamily="34" charset="-122"/>
                 <a:cs typeface="Calibri" pitchFamily="34" charset="-120"/>
               </a:rPr>
-              <a:t>carry across</a:t>
+              <a:t>across, beyond</a:t>
             </a:r>
             <a:endParaRPr lang="en-US" sz="850" dirty="0"/>
           </a:p>
@@ -14117,7 +14565,7 @@
         </p:nvSpPr>
         <p:spPr>
           <a:xfrm>
-            <a:off x="5803392" y="2258568"/>
+            <a:off x="4370832" y="2258568"/>
             <a:ext cx="1828800" cy="292608"/>
           </a:xfrm>
           <a:prstGeom prst="rect">
@@ -14151,7 +14599,7 @@
         </p:nvSpPr>
         <p:spPr>
           <a:xfrm>
-            <a:off x="5803392" y="2258568"/>
+            <a:off x="4370832" y="2258568"/>
             <a:ext cx="1828800" cy="292608"/>
           </a:xfrm>
           <a:prstGeom prst="rect">
@@ -14176,7 +14624,7 @@
                 <a:ea typeface="Trebuchet MS" pitchFamily="34" charset="-122"/>
                 <a:cs typeface="Trebuchet MS" pitchFamily="34" charset="-120"/>
               </a:rPr>
-              <a:t>er</a:t>
+              <a:t>port</a:t>
             </a:r>
             <a:endParaRPr lang="en-US" sz="1300" dirty="0"/>
           </a:p>
@@ -14190,7 +14638,7 @@
         </p:nvSpPr>
         <p:spPr>
           <a:xfrm>
-            <a:off x="5803392" y="2569464"/>
+            <a:off x="4370832" y="2569464"/>
             <a:ext cx="1828800" cy="201168"/>
           </a:xfrm>
           <a:prstGeom prst="rect">
@@ -14215,6 +14663,118 @@
                 <a:ea typeface="Calibri" pitchFamily="34" charset="-122"/>
                 <a:cs typeface="Calibri" pitchFamily="34" charset="-120"/>
               </a:rPr>
+              <a:t>carry</a:t>
+            </a:r>
+            <a:endParaRPr lang="en-US" sz="850" dirty="0"/>
+          </a:p>
+        </p:txBody>
+      </p:sp>
+      <p:sp>
+        <p:nvSpPr>
+          <p:cNvPr id="22" name="Shape 20"/>
+          <p:cNvSpPr/>
+          <p:nvPr/>
+        </p:nvSpPr>
+        <p:spPr>
+          <a:xfrm>
+            <a:off x="6519672" y="2258568"/>
+            <a:ext cx="1828800" cy="292608"/>
+          </a:xfrm>
+          <a:prstGeom prst="rect">
+            <a:avLst>
+              <a:gd name="adj" fmla="val 25000"/>
+            </a:avLst>
+          </a:prstGeom>
+          <a:solidFill>
+            <a:srgbClr val="FCE7F3"/>
+          </a:solidFill>
+          <a:ln w="19050">
+            <a:solidFill>
+              <a:srgbClr val="DB2777"/>
+            </a:solidFill>
+            <a:prstDash val="solid"/>
+          </a:ln>
+          <a:effectLst>
+            <a:outerShdw sx="100000" sy="100000" kx="0" ky="0" algn="bl" rotWithShape="0" blurRad="101600" dist="38100" dir="8100000">
+              <a:srgbClr val="000000">
+                <a:alpha val="12000"/>
+              </a:srgbClr>
+            </a:outerShdw>
+          </a:effectLst>
+        </p:spPr>
+      </p:sp>
+      <p:sp>
+        <p:nvSpPr>
+          <p:cNvPr id="23" name="Text 21"/>
+          <p:cNvSpPr/>
+          <p:nvPr/>
+        </p:nvSpPr>
+        <p:spPr>
+          <a:xfrm>
+            <a:off x="6519672" y="2258568"/>
+            <a:ext cx="1828800" cy="292608"/>
+          </a:xfrm>
+          <a:prstGeom prst="rect">
+            <a:avLst/>
+          </a:prstGeom>
+          <a:noFill/>
+          <a:ln/>
+        </p:spPr>
+        <p:txBody>
+          <a:bodyPr wrap="square" lIns="0" tIns="0" rIns="0" bIns="0" rtlCol="0" anchor="ctr"/>
+          <a:lstStyle/>
+          <a:p>
+            <a:pPr algn="ctr" indent="0" marL="0">
+              <a:buNone/>
+            </a:pPr>
+            <a:r>
+              <a:rPr lang="en-US" sz="1300" b="1" dirty="0">
+                <a:solidFill>
+                  <a:srgbClr val="9D174D"/>
+                </a:solidFill>
+                <a:latin typeface="Trebuchet MS" pitchFamily="34" charset="0"/>
+                <a:ea typeface="Trebuchet MS" pitchFamily="34" charset="-122"/>
+                <a:cs typeface="Trebuchet MS" pitchFamily="34" charset="-120"/>
+              </a:rPr>
+              <a:t>er</a:t>
+            </a:r>
+            <a:endParaRPr lang="en-US" sz="1300" dirty="0"/>
+          </a:p>
+        </p:txBody>
+      </p:sp>
+      <p:sp>
+        <p:nvSpPr>
+          <p:cNvPr id="24" name="Text 22"/>
+          <p:cNvSpPr/>
+          <p:nvPr/>
+        </p:nvSpPr>
+        <p:spPr>
+          <a:xfrm>
+            <a:off x="6519672" y="2569464"/>
+            <a:ext cx="1828800" cy="201168"/>
+          </a:xfrm>
+          <a:prstGeom prst="rect">
+            <a:avLst/>
+          </a:prstGeom>
+          <a:noFill/>
+          <a:ln/>
+        </p:spPr>
+        <p:txBody>
+          <a:bodyPr wrap="square" lIns="0" tIns="0" rIns="0" bIns="0" rtlCol="0" anchor="t"/>
+          <a:lstStyle/>
+          <a:p>
+            <a:pPr algn="ctr" indent="0" marL="0">
+              <a:buNone/>
+            </a:pPr>
+            <a:r>
+              <a:rPr lang="en-US" sz="850" dirty="0">
+                <a:solidFill>
+                  <a:srgbClr val="475569"/>
+                </a:solidFill>
+                <a:latin typeface="Calibri" pitchFamily="34" charset="0"/>
+                <a:ea typeface="Calibri" pitchFamily="34" charset="-122"/>
+                <a:cs typeface="Calibri" pitchFamily="34" charset="-120"/>
+              </a:rPr>
               <a:t>one who does</a:t>
             </a:r>
             <a:endParaRPr lang="en-US" sz="850" dirty="0"/>
@@ -14223,7 +14783,7 @@
       </p:sp>
       <p:sp>
         <p:nvSpPr>
-          <p:cNvPr id="22" name="Shape 20"/>
+          <p:cNvPr id="25" name="Shape 23"/>
           <p:cNvSpPr/>
           <p:nvPr/>
         </p:nvSpPr>
@@ -14250,7 +14810,7 @@
       </p:sp>
       <p:sp>
         <p:nvSpPr>
-          <p:cNvPr id="23" name="Text 21"/>
+          <p:cNvPr id="26" name="Text 24"/>
           <p:cNvSpPr/>
           <p:nvPr/>
         </p:nvSpPr>
@@ -14289,7 +14849,7 @@
       </p:sp>
       <p:sp>
         <p:nvSpPr>
-          <p:cNvPr id="24" name="Shape 22"/>
+          <p:cNvPr id="27" name="Shape 25"/>
           <p:cNvSpPr/>
           <p:nvPr/>
         </p:nvSpPr>
@@ -14316,7 +14876,7 @@
       </p:sp>
       <p:sp>
         <p:nvSpPr>
-          <p:cNvPr id="25" name="Shape 23"/>
+          <p:cNvPr id="28" name="Shape 26"/>
           <p:cNvSpPr/>
           <p:nvPr/>
         </p:nvSpPr>
@@ -14343,7 +14903,7 @@
       </p:sp>
       <p:sp>
         <p:nvSpPr>
-          <p:cNvPr id="26" name="Text 24"/>
+          <p:cNvPr id="29" name="Text 27"/>
           <p:cNvSpPr/>
           <p:nvPr/>
         </p:nvSpPr>
@@ -14382,7 +14942,7 @@
       </p:sp>
       <p:sp>
         <p:nvSpPr>
-          <p:cNvPr id="27" name="Text 25"/>
+          <p:cNvPr id="30" name="Text 28"/>
           <p:cNvSpPr/>
           <p:nvPr/>
         </p:nvSpPr>
@@ -14421,7 +14981,7 @@
       </p:sp>
       <p:sp>
         <p:nvSpPr>
-          <p:cNvPr id="28" name="Shape 26"/>
+          <p:cNvPr id="31" name="Shape 29"/>
           <p:cNvSpPr/>
           <p:nvPr/>
         </p:nvSpPr>
@@ -14448,7 +15008,7 @@
       </p:sp>
       <p:sp>
         <p:nvSpPr>
-          <p:cNvPr id="29" name="Text 27"/>
+          <p:cNvPr id="32" name="Text 30"/>
           <p:cNvSpPr/>
           <p:nvPr/>
         </p:nvSpPr>
@@ -14487,7 +15047,7 @@
       </p:sp>
       <p:sp>
         <p:nvSpPr>
-          <p:cNvPr id="30" name="Text 28"/>
+          <p:cNvPr id="33" name="Text 31"/>
           <p:cNvSpPr/>
           <p:nvPr/>
         </p:nvSpPr>
@@ -14526,7 +15086,7 @@
       </p:sp>
       <p:sp>
         <p:nvSpPr>
-          <p:cNvPr id="31" name="Shape 29"/>
+          <p:cNvPr id="34" name="Shape 32"/>
           <p:cNvSpPr/>
           <p:nvPr/>
         </p:nvSpPr>
@@ -14553,7 +15113,7 @@
       </p:sp>
       <p:sp>
         <p:nvSpPr>
-          <p:cNvPr id="32" name="Text 30"/>
+          <p:cNvPr id="35" name="Text 33"/>
           <p:cNvSpPr/>
           <p:nvPr/>
         </p:nvSpPr>
@@ -14592,7 +15152,7 @@
       </p:sp>
       <p:sp>
         <p:nvSpPr>
-          <p:cNvPr id="33" name="Shape 31"/>
+          <p:cNvPr id="36" name="Shape 34"/>
           <p:cNvSpPr/>
           <p:nvPr/>
         </p:nvSpPr>
@@ -14619,7 +15179,7 @@
       </p:sp>
       <p:sp>
         <p:nvSpPr>
-          <p:cNvPr id="34" name="Text 32"/>
+          <p:cNvPr id="37" name="Text 35"/>
           <p:cNvSpPr/>
           <p:nvPr/>
         </p:nvSpPr>
@@ -14658,7 +15218,7 @@
       </p:sp>
       <p:sp>
         <p:nvSpPr>
-          <p:cNvPr id="35" name="Shape 33"/>
+          <p:cNvPr id="38" name="Shape 36"/>
           <p:cNvSpPr/>
           <p:nvPr/>
         </p:nvSpPr>
@@ -14685,7 +15245,7 @@
       </p:sp>
       <p:sp>
         <p:nvSpPr>
-          <p:cNvPr id="36" name="Text 34"/>
+          <p:cNvPr id="39" name="Text 37"/>
           <p:cNvSpPr/>
           <p:nvPr/>
         </p:nvSpPr>
@@ -14917,7 +15477,7 @@
                 <a:ea typeface="Calibri" pitchFamily="34" charset="-122"/>
                 <a:cs typeface="Calibri" pitchFamily="34" charset="-120"/>
               </a:rPr>
-              <a:t>Root 'transport' — carry across or over</a:t>
+              <a:t>Root 'transport' — carry across or beyond</a:t>
             </a:r>
             <a:endParaRPr lang="en-US" sz="1600" dirty="0"/>
           </a:p>
@@ -15273,7 +15833,7 @@
                 <a:ea typeface="Calibri" pitchFamily="34" charset="-122"/>
                 <a:cs typeface="Calibri" pitchFamily="34" charset="-120"/>
               </a:rPr>
-              <a:t>Word Labs  •  wordlabs.app  •  Root: 'transport' = carry across or over</a:t>
+              <a:t>Word Labs  •  wordlabs.app  •  Root: 'transport' = carry across or beyond</a:t>
             </a:r>
             <a:endParaRPr lang="en-US" sz="800" dirty="0"/>
           </a:p>
@@ -15492,7 +16052,7 @@
         </p:nvSpPr>
         <p:spPr>
           <a:xfrm>
-            <a:off x="2938272" y="2258568"/>
+            <a:off x="2221992" y="2258568"/>
             <a:ext cx="1828800" cy="292608"/>
           </a:xfrm>
           <a:prstGeom prst="rect">
@@ -15501,11 +16061,11 @@
             </a:avLst>
           </a:prstGeom>
           <a:solidFill>
-            <a:srgbClr val="CCFBF1"/>
+            <a:srgbClr val="DDD6FE"/>
           </a:solidFill>
           <a:ln w="19050">
             <a:solidFill>
-              <a:srgbClr val="0D9488"/>
+              <a:srgbClr val="7C3AED"/>
             </a:solidFill>
             <a:prstDash val="solid"/>
           </a:ln>
@@ -15526,7 +16086,7 @@
         </p:nvSpPr>
         <p:spPr>
           <a:xfrm>
-            <a:off x="2938272" y="2258568"/>
+            <a:off x="2221992" y="2258568"/>
             <a:ext cx="1828800" cy="292608"/>
           </a:xfrm>
           <a:prstGeom prst="rect">
@@ -15545,13 +16105,13 @@
             <a:r>
               <a:rPr lang="en-US" sz="1300" b="1" dirty="0">
                 <a:solidFill>
-                  <a:srgbClr val="0F766E"/>
+                  <a:srgbClr val="4C1D95"/>
                 </a:solidFill>
                 <a:latin typeface="Trebuchet MS" pitchFamily="34" charset="0"/>
                 <a:ea typeface="Trebuchet MS" pitchFamily="34" charset="-122"/>
                 <a:cs typeface="Trebuchet MS" pitchFamily="34" charset="-120"/>
               </a:rPr>
-              <a:t>transport</a:t>
+              <a:t>trans</a:t>
             </a:r>
             <a:endParaRPr lang="en-US" sz="1300" dirty="0"/>
           </a:p>
@@ -15565,7 +16125,7 @@
         </p:nvSpPr>
         <p:spPr>
           <a:xfrm>
-            <a:off x="2938272" y="2569464"/>
+            <a:off x="2221992" y="2569464"/>
             <a:ext cx="1828800" cy="201168"/>
           </a:xfrm>
           <a:prstGeom prst="rect">
@@ -15590,7 +16150,7 @@
                 <a:ea typeface="Calibri" pitchFamily="34" charset="-122"/>
                 <a:cs typeface="Calibri" pitchFamily="34" charset="-120"/>
               </a:rPr>
-              <a:t>carry across</a:t>
+              <a:t>across, beyond</a:t>
             </a:r>
             <a:endParaRPr lang="en-US" sz="850" dirty="0"/>
           </a:p>
@@ -15604,7 +16164,7 @@
         </p:nvSpPr>
         <p:spPr>
           <a:xfrm>
-            <a:off x="5803392" y="2258568"/>
+            <a:off x="4370832" y="2258568"/>
             <a:ext cx="1828800" cy="292608"/>
           </a:xfrm>
           <a:prstGeom prst="rect">
@@ -15638,7 +16198,7 @@
         </p:nvSpPr>
         <p:spPr>
           <a:xfrm>
-            <a:off x="5803392" y="2258568"/>
+            <a:off x="4370832" y="2258568"/>
             <a:ext cx="1828800" cy="292608"/>
           </a:xfrm>
           <a:prstGeom prst="rect">
@@ -15663,7 +16223,7 @@
                 <a:ea typeface="Trebuchet MS" pitchFamily="34" charset="-122"/>
                 <a:cs typeface="Trebuchet MS" pitchFamily="34" charset="-120"/>
               </a:rPr>
-              <a:t>er</a:t>
+              <a:t>port</a:t>
             </a:r>
             <a:endParaRPr lang="en-US" sz="1300" dirty="0"/>
           </a:p>
@@ -15677,7 +16237,7 @@
         </p:nvSpPr>
         <p:spPr>
           <a:xfrm>
-            <a:off x="5803392" y="2569464"/>
+            <a:off x="4370832" y="2569464"/>
             <a:ext cx="1828800" cy="201168"/>
           </a:xfrm>
           <a:prstGeom prst="rect">
@@ -15702,6 +16262,118 @@
                 <a:ea typeface="Calibri" pitchFamily="34" charset="-122"/>
                 <a:cs typeface="Calibri" pitchFamily="34" charset="-120"/>
               </a:rPr>
+              <a:t>carry</a:t>
+            </a:r>
+            <a:endParaRPr lang="en-US" sz="850" dirty="0"/>
+          </a:p>
+        </p:txBody>
+      </p:sp>
+      <p:sp>
+        <p:nvSpPr>
+          <p:cNvPr id="22" name="Shape 20"/>
+          <p:cNvSpPr/>
+          <p:nvPr/>
+        </p:nvSpPr>
+        <p:spPr>
+          <a:xfrm>
+            <a:off x="6519672" y="2258568"/>
+            <a:ext cx="1828800" cy="292608"/>
+          </a:xfrm>
+          <a:prstGeom prst="rect">
+            <a:avLst>
+              <a:gd name="adj" fmla="val 25000"/>
+            </a:avLst>
+          </a:prstGeom>
+          <a:solidFill>
+            <a:srgbClr val="FCE7F3"/>
+          </a:solidFill>
+          <a:ln w="19050">
+            <a:solidFill>
+              <a:srgbClr val="DB2777"/>
+            </a:solidFill>
+            <a:prstDash val="solid"/>
+          </a:ln>
+          <a:effectLst>
+            <a:outerShdw sx="100000" sy="100000" kx="0" ky="0" algn="bl" rotWithShape="0" blurRad="101600" dist="38100" dir="8100000">
+              <a:srgbClr val="000000">
+                <a:alpha val="12000"/>
+              </a:srgbClr>
+            </a:outerShdw>
+          </a:effectLst>
+        </p:spPr>
+      </p:sp>
+      <p:sp>
+        <p:nvSpPr>
+          <p:cNvPr id="23" name="Text 21"/>
+          <p:cNvSpPr/>
+          <p:nvPr/>
+        </p:nvSpPr>
+        <p:spPr>
+          <a:xfrm>
+            <a:off x="6519672" y="2258568"/>
+            <a:ext cx="1828800" cy="292608"/>
+          </a:xfrm>
+          <a:prstGeom prst="rect">
+            <a:avLst/>
+          </a:prstGeom>
+          <a:noFill/>
+          <a:ln/>
+        </p:spPr>
+        <p:txBody>
+          <a:bodyPr wrap="square" lIns="0" tIns="0" rIns="0" bIns="0" rtlCol="0" anchor="ctr"/>
+          <a:lstStyle/>
+          <a:p>
+            <a:pPr algn="ctr" indent="0" marL="0">
+              <a:buNone/>
+            </a:pPr>
+            <a:r>
+              <a:rPr lang="en-US" sz="1300" b="1" dirty="0">
+                <a:solidFill>
+                  <a:srgbClr val="9D174D"/>
+                </a:solidFill>
+                <a:latin typeface="Trebuchet MS" pitchFamily="34" charset="0"/>
+                <a:ea typeface="Trebuchet MS" pitchFamily="34" charset="-122"/>
+                <a:cs typeface="Trebuchet MS" pitchFamily="34" charset="-120"/>
+              </a:rPr>
+              <a:t>er</a:t>
+            </a:r>
+            <a:endParaRPr lang="en-US" sz="1300" dirty="0"/>
+          </a:p>
+        </p:txBody>
+      </p:sp>
+      <p:sp>
+        <p:nvSpPr>
+          <p:cNvPr id="24" name="Text 22"/>
+          <p:cNvSpPr/>
+          <p:nvPr/>
+        </p:nvSpPr>
+        <p:spPr>
+          <a:xfrm>
+            <a:off x="6519672" y="2569464"/>
+            <a:ext cx="1828800" cy="201168"/>
+          </a:xfrm>
+          <a:prstGeom prst="rect">
+            <a:avLst/>
+          </a:prstGeom>
+          <a:noFill/>
+          <a:ln/>
+        </p:spPr>
+        <p:txBody>
+          <a:bodyPr wrap="square" lIns="0" tIns="0" rIns="0" bIns="0" rtlCol="0" anchor="t"/>
+          <a:lstStyle/>
+          <a:p>
+            <a:pPr algn="ctr" indent="0" marL="0">
+              <a:buNone/>
+            </a:pPr>
+            <a:r>
+              <a:rPr lang="en-US" sz="850" dirty="0">
+                <a:solidFill>
+                  <a:srgbClr val="475569"/>
+                </a:solidFill>
+                <a:latin typeface="Calibri" pitchFamily="34" charset="0"/>
+                <a:ea typeface="Calibri" pitchFamily="34" charset="-122"/>
+                <a:cs typeface="Calibri" pitchFamily="34" charset="-120"/>
+              </a:rPr>
               <a:t>one who does</a:t>
             </a:r>
             <a:endParaRPr lang="en-US" sz="850" dirty="0"/>
@@ -15710,7 +16382,7 @@
       </p:sp>
       <p:sp>
         <p:nvSpPr>
-          <p:cNvPr id="22" name="Shape 20"/>
+          <p:cNvPr id="25" name="Shape 23"/>
           <p:cNvSpPr/>
           <p:nvPr/>
         </p:nvSpPr>
@@ -15737,7 +16409,7 @@
       </p:sp>
       <p:sp>
         <p:nvSpPr>
-          <p:cNvPr id="23" name="Text 21"/>
+          <p:cNvPr id="26" name="Text 24"/>
           <p:cNvSpPr/>
           <p:nvPr/>
         </p:nvSpPr>
@@ -15776,7 +16448,7 @@
       </p:sp>
       <p:sp>
         <p:nvSpPr>
-          <p:cNvPr id="24" name="Shape 22"/>
+          <p:cNvPr id="27" name="Shape 25"/>
           <p:cNvSpPr/>
           <p:nvPr/>
         </p:nvSpPr>
@@ -15803,7 +16475,7 @@
       </p:sp>
       <p:sp>
         <p:nvSpPr>
-          <p:cNvPr id="25" name="Shape 23"/>
+          <p:cNvPr id="28" name="Shape 26"/>
           <p:cNvSpPr/>
           <p:nvPr/>
         </p:nvSpPr>
@@ -15830,7 +16502,7 @@
       </p:sp>
       <p:sp>
         <p:nvSpPr>
-          <p:cNvPr id="26" name="Text 24"/>
+          <p:cNvPr id="29" name="Text 27"/>
           <p:cNvSpPr/>
           <p:nvPr/>
         </p:nvSpPr>
@@ -15869,7 +16541,7 @@
       </p:sp>
       <p:sp>
         <p:nvSpPr>
-          <p:cNvPr id="27" name="Text 25"/>
+          <p:cNvPr id="30" name="Text 28"/>
           <p:cNvSpPr/>
           <p:nvPr/>
         </p:nvSpPr>
@@ -15908,7 +16580,7 @@
       </p:sp>
       <p:sp>
         <p:nvSpPr>
-          <p:cNvPr id="28" name="Shape 26"/>
+          <p:cNvPr id="31" name="Shape 29"/>
           <p:cNvSpPr/>
           <p:nvPr/>
         </p:nvSpPr>
@@ -15935,7 +16607,7 @@
       </p:sp>
       <p:sp>
         <p:nvSpPr>
-          <p:cNvPr id="29" name="Text 27"/>
+          <p:cNvPr id="32" name="Text 30"/>
           <p:cNvSpPr/>
           <p:nvPr/>
         </p:nvSpPr>
@@ -15974,7 +16646,7 @@
       </p:sp>
       <p:sp>
         <p:nvSpPr>
-          <p:cNvPr id="30" name="Text 28"/>
+          <p:cNvPr id="33" name="Text 31"/>
           <p:cNvSpPr/>
           <p:nvPr/>
         </p:nvSpPr>
@@ -16013,7 +16685,7 @@
       </p:sp>
       <p:sp>
         <p:nvSpPr>
-          <p:cNvPr id="31" name="Shape 29"/>
+          <p:cNvPr id="34" name="Shape 32"/>
           <p:cNvSpPr/>
           <p:nvPr/>
         </p:nvSpPr>
@@ -16040,7 +16712,7 @@
       </p:sp>
       <p:sp>
         <p:nvSpPr>
-          <p:cNvPr id="32" name="Text 30"/>
+          <p:cNvPr id="35" name="Text 33"/>
           <p:cNvSpPr/>
           <p:nvPr/>
         </p:nvSpPr>
@@ -16079,7 +16751,7 @@
       </p:sp>
       <p:sp>
         <p:nvSpPr>
-          <p:cNvPr id="33" name="Shape 31"/>
+          <p:cNvPr id="36" name="Shape 34"/>
           <p:cNvSpPr/>
           <p:nvPr/>
         </p:nvSpPr>
@@ -16106,7 +16778,7 @@
       </p:sp>
       <p:sp>
         <p:nvSpPr>
-          <p:cNvPr id="34" name="Text 32"/>
+          <p:cNvPr id="37" name="Text 35"/>
           <p:cNvSpPr/>
           <p:nvPr/>
         </p:nvSpPr>
@@ -16145,7 +16817,7 @@
       </p:sp>
       <p:sp>
         <p:nvSpPr>
-          <p:cNvPr id="35" name="Shape 33"/>
+          <p:cNvPr id="38" name="Shape 36"/>
           <p:cNvSpPr/>
           <p:nvPr/>
         </p:nvSpPr>
@@ -16172,7 +16844,7 @@
       </p:sp>
       <p:sp>
         <p:nvSpPr>
-          <p:cNvPr id="36" name="Shape 34"/>
+          <p:cNvPr id="39" name="Shape 37"/>
           <p:cNvSpPr/>
           <p:nvPr/>
         </p:nvSpPr>
@@ -16199,7 +16871,7 @@
       </p:sp>
       <p:sp>
         <p:nvSpPr>
-          <p:cNvPr id="37" name="Text 35"/>
+          <p:cNvPr id="40" name="Text 38"/>
           <p:cNvSpPr/>
           <p:nvPr/>
         </p:nvSpPr>
@@ -16238,7 +16910,7 @@
       </p:sp>
       <p:sp>
         <p:nvSpPr>
-          <p:cNvPr id="38" name="Shape 36"/>
+          <p:cNvPr id="41" name="Shape 39"/>
           <p:cNvSpPr/>
           <p:nvPr/>
         </p:nvSpPr>
@@ -16265,7 +16937,7 @@
       </p:sp>
       <p:sp>
         <p:nvSpPr>
-          <p:cNvPr id="39" name="Text 37"/>
+          <p:cNvPr id="42" name="Text 40"/>
           <p:cNvSpPr/>
           <p:nvPr/>
         </p:nvSpPr>
@@ -16304,7 +16976,7 @@
       </p:sp>
       <p:sp>
         <p:nvSpPr>
-          <p:cNvPr id="40" name="Shape 38"/>
+          <p:cNvPr id="43" name="Shape 41"/>
           <p:cNvSpPr/>
           <p:nvPr/>
         </p:nvSpPr>
@@ -16331,7 +17003,7 @@
       </p:sp>
       <p:sp>
         <p:nvSpPr>
-          <p:cNvPr id="41" name="Text 39"/>
+          <p:cNvPr id="44" name="Text 42"/>
           <p:cNvSpPr/>
           <p:nvPr/>
         </p:nvSpPr>
@@ -16370,7 +17042,7 @@
       </p:sp>
       <p:sp>
         <p:nvSpPr>
-          <p:cNvPr id="42" name="Shape 40"/>
+          <p:cNvPr id="45" name="Shape 43"/>
           <p:cNvSpPr/>
           <p:nvPr/>
         </p:nvSpPr>
@@ -16397,7 +17069,7 @@
       </p:sp>
       <p:sp>
         <p:nvSpPr>
-          <p:cNvPr id="43" name="Text 41"/>
+          <p:cNvPr id="46" name="Text 44"/>
           <p:cNvSpPr/>
           <p:nvPr/>
         </p:nvSpPr>
@@ -16436,7 +17108,7 @@
       </p:sp>
       <p:sp>
         <p:nvSpPr>
-          <p:cNvPr id="44" name="Shape 42"/>
+          <p:cNvPr id="47" name="Shape 45"/>
           <p:cNvSpPr/>
           <p:nvPr/>
         </p:nvSpPr>
@@ -16463,7 +17135,7 @@
       </p:sp>
       <p:sp>
         <p:nvSpPr>
-          <p:cNvPr id="45" name="Text 43"/>
+          <p:cNvPr id="48" name="Text 46"/>
           <p:cNvSpPr/>
           <p:nvPr/>
         </p:nvSpPr>
@@ -16502,7 +17174,7 @@
       </p:sp>
       <p:sp>
         <p:nvSpPr>
-          <p:cNvPr id="46" name="Shape 44"/>
+          <p:cNvPr id="49" name="Shape 47"/>
           <p:cNvSpPr/>
           <p:nvPr/>
         </p:nvSpPr>
@@ -16529,7 +17201,7 @@
       </p:sp>
       <p:sp>
         <p:nvSpPr>
-          <p:cNvPr id="47" name="Text 45"/>
+          <p:cNvPr id="50" name="Text 48"/>
           <p:cNvSpPr/>
           <p:nvPr/>
         </p:nvSpPr>
@@ -16568,7 +17240,7 @@
       </p:sp>
       <p:sp>
         <p:nvSpPr>
-          <p:cNvPr id="48" name="Shape 46"/>
+          <p:cNvPr id="51" name="Shape 49"/>
           <p:cNvSpPr/>
           <p:nvPr/>
         </p:nvSpPr>
@@ -16595,7 +17267,7 @@
       </p:sp>
       <p:sp>
         <p:nvSpPr>
-          <p:cNvPr id="49" name="Text 47"/>
+          <p:cNvPr id="52" name="Text 50"/>
           <p:cNvSpPr/>
           <p:nvPr/>
         </p:nvSpPr>
@@ -16634,7 +17306,7 @@
       </p:sp>
       <p:sp>
         <p:nvSpPr>
-          <p:cNvPr id="50" name="Shape 48"/>
+          <p:cNvPr id="53" name="Shape 51"/>
           <p:cNvSpPr/>
           <p:nvPr/>
         </p:nvSpPr>
@@ -16661,7 +17333,7 @@
       </p:sp>
       <p:sp>
         <p:nvSpPr>
-          <p:cNvPr id="51" name="Text 49"/>
+          <p:cNvPr id="54" name="Text 52"/>
           <p:cNvSpPr/>
           <p:nvPr/>
         </p:nvSpPr>
@@ -16700,7 +17372,7 @@
       </p:sp>
       <p:sp>
         <p:nvSpPr>
-          <p:cNvPr id="52" name="Shape 50"/>
+          <p:cNvPr id="55" name="Shape 53"/>
           <p:cNvSpPr/>
           <p:nvPr/>
         </p:nvSpPr>
@@ -16727,7 +17399,7 @@
       </p:sp>
       <p:sp>
         <p:nvSpPr>
-          <p:cNvPr id="53" name="Text 51"/>
+          <p:cNvPr id="56" name="Text 54"/>
           <p:cNvSpPr/>
           <p:nvPr/>
         </p:nvSpPr>
@@ -17332,7 +18004,7 @@
                 <a:ea typeface="Calibri" pitchFamily="34" charset="-122"/>
                 <a:cs typeface="Calibri" pitchFamily="34" charset="-120"/>
               </a:rPr>
-              <a:t>Word Labs  •  wordlabs.app  •  Root: 'transport' = carry across or over</a:t>
+              <a:t>Word Labs  •  wordlabs.app  •  Root: 'transport' = carry across or beyond</a:t>
             </a:r>
             <a:endParaRPr lang="en-US" sz="800" dirty="0"/>
           </a:p>
@@ -17666,7 +18338,7 @@
                 <a:ea typeface="Trebuchet MS" pitchFamily="34" charset="-122"/>
                 <a:cs typeface="Trebuchet MS" pitchFamily="34" charset="-120"/>
               </a:rPr>
-              <a:t>2</a:t>
+              <a:t>1</a:t>
             </a:r>
             <a:pPr algn="ctr" indent="0" marL="0">
               <a:buNone/>
@@ -17680,7 +18352,7 @@
                 <a:ea typeface="Trebuchet MS" pitchFamily="34" charset="-122"/>
                 <a:cs typeface="Trebuchet MS" pitchFamily="34" charset="-120"/>
               </a:rPr>
-              <a:t>  punctuation marks</a:t>
+              <a:t>  punctuation mark</a:t>
             </a:r>
             <a:endParaRPr lang="en-US" sz="2800" dirty="0"/>
           </a:p>
@@ -17972,7 +18644,7 @@
                 <a:ea typeface="Calibri" pitchFamily="34" charset="-122"/>
                 <a:cs typeface="Calibri" pitchFamily="34" charset="-120"/>
               </a:rPr>
-              <a:t>Word Labs  •  wordlabs.app  •  Root: 'transport' = carry across or over</a:t>
+              <a:t>Word Labs  •  wordlabs.app  •  Root: 'transport' = carry across or beyond</a:t>
             </a:r>
             <a:endParaRPr lang="en-US" sz="800" dirty="0"/>
           </a:p>
@@ -18076,6 +18748,20 @@
               <a:buNone/>
             </a:pPr>
             <a:r>
+              <a:rPr lang="en-US" sz="1800" dirty="0">
+                <a:solidFill>
+                  <a:srgbClr val="0F172A"/>
+                </a:solidFill>
+                <a:latin typeface="Calibri" pitchFamily="34" charset="0"/>
+                <a:ea typeface="Calibri" pitchFamily="34" charset="-122"/>
+                <a:cs typeface="Calibri" pitchFamily="34" charset="-120"/>
+              </a:rPr>
+              <a:t>Although </a:t>
+            </a:r>
+            <a:pPr algn="l" indent="0" marL="0">
+              <a:buNone/>
+            </a:pPr>
+            <a:r>
               <a:rPr lang="en-US" sz="1800" b="1" dirty="0">
                 <a:solidFill>
                   <a:srgbClr val="0D9488"/>
@@ -18087,7 +18773,7 @@
                 <a:ea typeface="Calibri" pitchFamily="34" charset="-122"/>
                 <a:cs typeface="Calibri" pitchFamily="34" charset="-120"/>
               </a:rPr>
-              <a:t>Transporting</a:t>
+              <a:t>retransportation</a:t>
             </a:r>
             <a:pPr algn="l" indent="0" marL="0">
               <a:buNone/>
@@ -18101,7 +18787,7 @@
                 <a:ea typeface="Calibri" pitchFamily="34" charset="-122"/>
                 <a:cs typeface="Calibri" pitchFamily="34" charset="-120"/>
               </a:rPr>
-              <a:t> live animals is complicated; however, a skilled </a:t>
+              <a:t> was costly, the </a:t>
             </a:r>
             <a:pPr algn="l" indent="0" marL="0">
               <a:buNone/>
@@ -18118,7 +18804,7 @@
                 <a:ea typeface="Calibri" pitchFamily="34" charset="-122"/>
                 <a:cs typeface="Calibri" pitchFamily="34" charset="-120"/>
               </a:rPr>
-              <a:t>transporter</a:t>
+              <a:t>transported</a:t>
             </a:r>
             <a:pPr algn="l" indent="0" marL="0">
               <a:buNone/>
@@ -18132,7 +18818,7 @@
                 <a:ea typeface="Calibri" pitchFamily="34" charset="-122"/>
                 <a:cs typeface="Calibri" pitchFamily="34" charset="-120"/>
               </a:rPr>
-              <a:t> uses safe </a:t>
+              <a:t> goods were </a:t>
             </a:r>
             <a:pPr algn="l" indent="0" marL="0">
               <a:buNone/>
@@ -18149,7 +18835,7 @@
                 <a:ea typeface="Calibri" pitchFamily="34" charset="-122"/>
                 <a:cs typeface="Calibri" pitchFamily="34" charset="-120"/>
               </a:rPr>
-              <a:t>transportation</a:t>
+              <a:t>retransported</a:t>
             </a:r>
             <a:pPr algn="l" indent="0" marL="0">
               <a:buNone/>
@@ -18163,7 +18849,7 @@
                 <a:ea typeface="Calibri" pitchFamily="34" charset="-122"/>
                 <a:cs typeface="Calibri" pitchFamily="34" charset="-120"/>
               </a:rPr>
-              <a:t> methods to keep them calm.</a:t>
+              <a:t> safely to the new warehouse.</a:t>
             </a:r>
             <a:endParaRPr lang="en-US" sz="1800" dirty="0"/>
           </a:p>
@@ -18318,7 +19004,7 @@
                 <a:ea typeface="Trebuchet MS" pitchFamily="34" charset="-122"/>
                 <a:cs typeface="Trebuchet MS" pitchFamily="34" charset="-120"/>
               </a:rPr>
-              <a:t>Transporting</a:t>
+              <a:t>retransportation</a:t>
             </a:r>
             <a:endParaRPr lang="en-US" sz="1400" dirty="0"/>
           </a:p>
@@ -18446,7 +19132,7 @@
                 <a:ea typeface="Trebuchet MS" pitchFamily="34" charset="-122"/>
                 <a:cs typeface="Trebuchet MS" pitchFamily="34" charset="-120"/>
               </a:rPr>
-              <a:t>transporter</a:t>
+              <a:t>transported</a:t>
             </a:r>
             <a:endParaRPr lang="en-US" sz="1400" dirty="0"/>
           </a:p>
@@ -18574,7 +19260,7 @@
                 <a:ea typeface="Trebuchet MS" pitchFamily="34" charset="-122"/>
                 <a:cs typeface="Trebuchet MS" pitchFamily="34" charset="-120"/>
               </a:rPr>
-              <a:t>transportation</a:t>
+              <a:t>retransported</a:t>
             </a:r>
             <a:endParaRPr lang="en-US" sz="1400" dirty="0"/>
           </a:p>
@@ -18905,7 +19591,7 @@
                 <a:ea typeface="Calibri" pitchFamily="34" charset="-122"/>
                 <a:cs typeface="Calibri" pitchFamily="34" charset="-120"/>
               </a:rPr>
-              <a:t>Word Labs  •  wordlabs.app  •  Root: 'transport' = carry across or over</a:t>
+              <a:t>Word Labs  •  wordlabs.app  •  Root: 'transport' = carry across or beyond</a:t>
             </a:r>
             <a:endParaRPr lang="en-US" sz="800" dirty="0"/>
           </a:p>
@@ -19044,7 +19730,7 @@
                 <a:ea typeface="Trebuchet MS" pitchFamily="34" charset="-122"/>
                 <a:cs typeface="Trebuchet MS" pitchFamily="34" charset="-120"/>
               </a:rPr>
-              <a:t>Transporting</a:t>
+              <a:t>retransportation</a:t>
             </a:r>
             <a:endParaRPr lang="en-US" sz="2800" dirty="0"/>
           </a:p>
@@ -19732,7 +20418,7 @@
                 <a:ea typeface="Calibri" pitchFamily="34" charset="-122"/>
                 <a:cs typeface="Calibri" pitchFamily="34" charset="-120"/>
               </a:rPr>
-              <a:t>Word Labs  •  wordlabs.app  •  Root: 'transport' = carry across or over</a:t>
+              <a:t>Word Labs  •  wordlabs.app  •  Root: 'transport' = carry across or beyond</a:t>
             </a:r>
             <a:endParaRPr lang="en-US" sz="800" dirty="0"/>
           </a:p>
@@ -19871,7 +20557,7 @@
                 <a:ea typeface="Trebuchet MS" pitchFamily="34" charset="-122"/>
                 <a:cs typeface="Trebuchet MS" pitchFamily="34" charset="-120"/>
               </a:rPr>
-              <a:t>Transporting</a:t>
+              <a:t>retransportation</a:t>
             </a:r>
             <a:endParaRPr lang="en-US" sz="2800" dirty="0"/>
           </a:p>
@@ -19951,8 +20637,8 @@
         </p:nvSpPr>
         <p:spPr>
           <a:xfrm>
-            <a:off x="2938272" y="2258568"/>
-            <a:ext cx="1828800" cy="292608"/>
+            <a:off x="1989734" y="2258568"/>
+            <a:ext cx="1581912" cy="292608"/>
           </a:xfrm>
           <a:prstGeom prst="rect">
             <a:avLst>
@@ -19960,11 +20646,11 @@
             </a:avLst>
           </a:prstGeom>
           <a:solidFill>
-            <a:srgbClr val="CCFBF1"/>
+            <a:srgbClr val="DDD6FE"/>
           </a:solidFill>
           <a:ln w="19050">
             <a:solidFill>
-              <a:srgbClr val="0D9488"/>
+              <a:srgbClr val="7C3AED"/>
             </a:solidFill>
             <a:prstDash val="solid"/>
           </a:ln>
@@ -19985,8 +20671,8 @@
         </p:nvSpPr>
         <p:spPr>
           <a:xfrm>
-            <a:off x="2938272" y="2258568"/>
-            <a:ext cx="1828800" cy="292608"/>
+            <a:off x="1989734" y="2258568"/>
+            <a:ext cx="1581912" cy="292608"/>
           </a:xfrm>
           <a:prstGeom prst="rect">
             <a:avLst/>
@@ -20004,13 +20690,13 @@
             <a:r>
               <a:rPr lang="en-US" sz="1300" b="1" dirty="0">
                 <a:solidFill>
-                  <a:srgbClr val="0F766E"/>
+                  <a:srgbClr val="4C1D95"/>
                 </a:solidFill>
                 <a:latin typeface="Trebuchet MS" pitchFamily="34" charset="0"/>
                 <a:ea typeface="Trebuchet MS" pitchFamily="34" charset="-122"/>
                 <a:cs typeface="Trebuchet MS" pitchFamily="34" charset="-120"/>
               </a:rPr>
-              <a:t>transport</a:t>
+              <a:t>re</a:t>
             </a:r>
             <a:endParaRPr lang="en-US" sz="1300" dirty="0"/>
           </a:p>
@@ -20024,8 +20710,8 @@
         </p:nvSpPr>
         <p:spPr>
           <a:xfrm>
-            <a:off x="2938272" y="2569464"/>
-            <a:ext cx="1828800" cy="201168"/>
+            <a:off x="1989734" y="2569464"/>
+            <a:ext cx="1581912" cy="201168"/>
           </a:xfrm>
           <a:prstGeom prst="rect">
             <a:avLst/>
@@ -20049,7 +20735,7 @@
                 <a:ea typeface="Calibri" pitchFamily="34" charset="-122"/>
                 <a:cs typeface="Calibri" pitchFamily="34" charset="-120"/>
               </a:rPr>
-              <a:t>carry across</a:t>
+              <a:t>again</a:t>
             </a:r>
             <a:endParaRPr lang="en-US" sz="850" dirty="0"/>
           </a:p>
@@ -20063,8 +20749,8 @@
         </p:nvSpPr>
         <p:spPr>
           <a:xfrm>
-            <a:off x="5803392" y="2258568"/>
-            <a:ext cx="1828800" cy="292608"/>
+            <a:off x="3659429" y="2258568"/>
+            <a:ext cx="1581912" cy="292608"/>
           </a:xfrm>
           <a:prstGeom prst="rect">
             <a:avLst>
@@ -20097,8 +20783,8 @@
         </p:nvSpPr>
         <p:spPr>
           <a:xfrm>
-            <a:off x="5803392" y="2258568"/>
-            <a:ext cx="1828800" cy="292608"/>
+            <a:off x="3659429" y="2258568"/>
+            <a:ext cx="1581912" cy="292608"/>
           </a:xfrm>
           <a:prstGeom prst="rect">
             <a:avLst/>
@@ -20122,7 +20808,7 @@
                 <a:ea typeface="Trebuchet MS" pitchFamily="34" charset="-122"/>
                 <a:cs typeface="Trebuchet MS" pitchFamily="34" charset="-120"/>
               </a:rPr>
-              <a:t>ing</a:t>
+              <a:t>trans</a:t>
             </a:r>
             <a:endParaRPr lang="en-US" sz="1300" dirty="0"/>
           </a:p>
@@ -20136,8 +20822,8 @@
         </p:nvSpPr>
         <p:spPr>
           <a:xfrm>
-            <a:off x="5803392" y="2569464"/>
-            <a:ext cx="1828800" cy="201168"/>
+            <a:off x="3659429" y="2569464"/>
+            <a:ext cx="1581912" cy="201168"/>
           </a:xfrm>
           <a:prstGeom prst="rect">
             <a:avLst/>
@@ -20161,7 +20847,7 @@
                 <a:ea typeface="Calibri" pitchFamily="34" charset="-122"/>
                 <a:cs typeface="Calibri" pitchFamily="34" charset="-120"/>
               </a:rPr>
-              <a:t>ongoing action</a:t>
+              <a:t>across, beyond</a:t>
             </a:r>
             <a:endParaRPr lang="en-US" sz="850" dirty="0"/>
           </a:p>
@@ -20170,6 +20856,230 @@
       <p:sp>
         <p:nvSpPr>
           <p:cNvPr id="22" name="Shape 20"/>
+          <p:cNvSpPr/>
+          <p:nvPr/>
+        </p:nvSpPr>
+        <p:spPr>
+          <a:xfrm>
+            <a:off x="5329123" y="2258568"/>
+            <a:ext cx="1581912" cy="292608"/>
+          </a:xfrm>
+          <a:prstGeom prst="rect">
+            <a:avLst>
+              <a:gd name="adj" fmla="val 25000"/>
+            </a:avLst>
+          </a:prstGeom>
+          <a:solidFill>
+            <a:srgbClr val="FCE7F3"/>
+          </a:solidFill>
+          <a:ln w="19050">
+            <a:solidFill>
+              <a:srgbClr val="DB2777"/>
+            </a:solidFill>
+            <a:prstDash val="solid"/>
+          </a:ln>
+          <a:effectLst>
+            <a:outerShdw sx="100000" sy="100000" kx="0" ky="0" algn="bl" rotWithShape="0" blurRad="101600" dist="38100" dir="8100000">
+              <a:srgbClr val="000000">
+                <a:alpha val="12000"/>
+              </a:srgbClr>
+            </a:outerShdw>
+          </a:effectLst>
+        </p:spPr>
+      </p:sp>
+      <p:sp>
+        <p:nvSpPr>
+          <p:cNvPr id="23" name="Text 21"/>
+          <p:cNvSpPr/>
+          <p:nvPr/>
+        </p:nvSpPr>
+        <p:spPr>
+          <a:xfrm>
+            <a:off x="5329123" y="2258568"/>
+            <a:ext cx="1581912" cy="292608"/>
+          </a:xfrm>
+          <a:prstGeom prst="rect">
+            <a:avLst/>
+          </a:prstGeom>
+          <a:noFill/>
+          <a:ln/>
+        </p:spPr>
+        <p:txBody>
+          <a:bodyPr wrap="square" lIns="0" tIns="0" rIns="0" bIns="0" rtlCol="0" anchor="ctr"/>
+          <a:lstStyle/>
+          <a:p>
+            <a:pPr algn="ctr" indent="0" marL="0">
+              <a:buNone/>
+            </a:pPr>
+            <a:r>
+              <a:rPr lang="en-US" sz="1300" b="1" dirty="0">
+                <a:solidFill>
+                  <a:srgbClr val="9D174D"/>
+                </a:solidFill>
+                <a:latin typeface="Trebuchet MS" pitchFamily="34" charset="0"/>
+                <a:ea typeface="Trebuchet MS" pitchFamily="34" charset="-122"/>
+                <a:cs typeface="Trebuchet MS" pitchFamily="34" charset="-120"/>
+              </a:rPr>
+              <a:t>port</a:t>
+            </a:r>
+            <a:endParaRPr lang="en-US" sz="1300" dirty="0"/>
+          </a:p>
+        </p:txBody>
+      </p:sp>
+      <p:sp>
+        <p:nvSpPr>
+          <p:cNvPr id="24" name="Text 22"/>
+          <p:cNvSpPr/>
+          <p:nvPr/>
+        </p:nvSpPr>
+        <p:spPr>
+          <a:xfrm>
+            <a:off x="5329123" y="2569464"/>
+            <a:ext cx="1581912" cy="201168"/>
+          </a:xfrm>
+          <a:prstGeom prst="rect">
+            <a:avLst/>
+          </a:prstGeom>
+          <a:noFill/>
+          <a:ln/>
+        </p:spPr>
+        <p:txBody>
+          <a:bodyPr wrap="square" lIns="0" tIns="0" rIns="0" bIns="0" rtlCol="0" anchor="t"/>
+          <a:lstStyle/>
+          <a:p>
+            <a:pPr algn="ctr" indent="0" marL="0">
+              <a:buNone/>
+            </a:pPr>
+            <a:r>
+              <a:rPr lang="en-US" sz="850" dirty="0">
+                <a:solidFill>
+                  <a:srgbClr val="475569"/>
+                </a:solidFill>
+                <a:latin typeface="Calibri" pitchFamily="34" charset="0"/>
+                <a:ea typeface="Calibri" pitchFamily="34" charset="-122"/>
+                <a:cs typeface="Calibri" pitchFamily="34" charset="-120"/>
+              </a:rPr>
+              <a:t>carry</a:t>
+            </a:r>
+            <a:endParaRPr lang="en-US" sz="850" dirty="0"/>
+          </a:p>
+        </p:txBody>
+      </p:sp>
+      <p:sp>
+        <p:nvSpPr>
+          <p:cNvPr id="25" name="Shape 23"/>
+          <p:cNvSpPr/>
+          <p:nvPr/>
+        </p:nvSpPr>
+        <p:spPr>
+          <a:xfrm>
+            <a:off x="6998818" y="2258568"/>
+            <a:ext cx="1581912" cy="292608"/>
+          </a:xfrm>
+          <a:prstGeom prst="rect">
+            <a:avLst>
+              <a:gd name="adj" fmla="val 25000"/>
+            </a:avLst>
+          </a:prstGeom>
+          <a:solidFill>
+            <a:srgbClr val="FCE7F3"/>
+          </a:solidFill>
+          <a:ln w="19050">
+            <a:solidFill>
+              <a:srgbClr val="DB2777"/>
+            </a:solidFill>
+            <a:prstDash val="solid"/>
+          </a:ln>
+          <a:effectLst>
+            <a:outerShdw sx="100000" sy="100000" kx="0" ky="0" algn="bl" rotWithShape="0" blurRad="101600" dist="38100" dir="8100000">
+              <a:srgbClr val="000000">
+                <a:alpha val="12000"/>
+              </a:srgbClr>
+            </a:outerShdw>
+          </a:effectLst>
+        </p:spPr>
+      </p:sp>
+      <p:sp>
+        <p:nvSpPr>
+          <p:cNvPr id="26" name="Text 24"/>
+          <p:cNvSpPr/>
+          <p:nvPr/>
+        </p:nvSpPr>
+        <p:spPr>
+          <a:xfrm>
+            <a:off x="6998818" y="2258568"/>
+            <a:ext cx="1581912" cy="292608"/>
+          </a:xfrm>
+          <a:prstGeom prst="rect">
+            <a:avLst/>
+          </a:prstGeom>
+          <a:noFill/>
+          <a:ln/>
+        </p:spPr>
+        <p:txBody>
+          <a:bodyPr wrap="square" lIns="0" tIns="0" rIns="0" bIns="0" rtlCol="0" anchor="ctr"/>
+          <a:lstStyle/>
+          <a:p>
+            <a:pPr algn="ctr" indent="0" marL="0">
+              <a:buNone/>
+            </a:pPr>
+            <a:r>
+              <a:rPr lang="en-US" sz="1300" b="1" dirty="0">
+                <a:solidFill>
+                  <a:srgbClr val="9D174D"/>
+                </a:solidFill>
+                <a:latin typeface="Trebuchet MS" pitchFamily="34" charset="0"/>
+                <a:ea typeface="Trebuchet MS" pitchFamily="34" charset="-122"/>
+                <a:cs typeface="Trebuchet MS" pitchFamily="34" charset="-120"/>
+              </a:rPr>
+              <a:t>ation</a:t>
+            </a:r>
+            <a:endParaRPr lang="en-US" sz="1300" dirty="0"/>
+          </a:p>
+        </p:txBody>
+      </p:sp>
+      <p:sp>
+        <p:nvSpPr>
+          <p:cNvPr id="27" name="Text 25"/>
+          <p:cNvSpPr/>
+          <p:nvPr/>
+        </p:nvSpPr>
+        <p:spPr>
+          <a:xfrm>
+            <a:off x="6998818" y="2569464"/>
+            <a:ext cx="1581912" cy="201168"/>
+          </a:xfrm>
+          <a:prstGeom prst="rect">
+            <a:avLst/>
+          </a:prstGeom>
+          <a:noFill/>
+          <a:ln/>
+        </p:spPr>
+        <p:txBody>
+          <a:bodyPr wrap="square" lIns="0" tIns="0" rIns="0" bIns="0" rtlCol="0" anchor="t"/>
+          <a:lstStyle/>
+          <a:p>
+            <a:pPr algn="ctr" indent="0" marL="0">
+              <a:buNone/>
+            </a:pPr>
+            <a:r>
+              <a:rPr lang="en-US" sz="850" dirty="0">
+                <a:solidFill>
+                  <a:srgbClr val="475569"/>
+                </a:solidFill>
+                <a:latin typeface="Calibri" pitchFamily="34" charset="0"/>
+                <a:ea typeface="Calibri" pitchFamily="34" charset="-122"/>
+                <a:cs typeface="Calibri" pitchFamily="34" charset="-120"/>
+              </a:rPr>
+              <a:t>act or process of</a:t>
+            </a:r>
+            <a:endParaRPr lang="en-US" sz="850" dirty="0"/>
+          </a:p>
+        </p:txBody>
+      </p:sp>
+      <p:sp>
+        <p:nvSpPr>
+          <p:cNvPr id="28" name="Shape 26"/>
           <p:cNvSpPr/>
           <p:nvPr/>
         </p:nvSpPr>
@@ -20196,7 +21106,7 @@
       </p:sp>
       <p:sp>
         <p:nvSpPr>
-          <p:cNvPr id="23" name="Text 21"/>
+          <p:cNvPr id="29" name="Text 27"/>
           <p:cNvSpPr/>
           <p:nvPr/>
         </p:nvSpPr>
@@ -20235,7 +21145,7 @@
       </p:sp>
       <p:sp>
         <p:nvSpPr>
-          <p:cNvPr id="24" name="Shape 22"/>
+          <p:cNvPr id="30" name="Shape 28"/>
           <p:cNvSpPr/>
           <p:nvPr/>
         </p:nvSpPr>
@@ -20262,7 +21172,7 @@
       </p:sp>
       <p:sp>
         <p:nvSpPr>
-          <p:cNvPr id="25" name="Text 23"/>
+          <p:cNvPr id="31" name="Text 29"/>
           <p:cNvSpPr/>
           <p:nvPr/>
         </p:nvSpPr>
@@ -20301,7 +21211,7 @@
       </p:sp>
       <p:sp>
         <p:nvSpPr>
-          <p:cNvPr id="26" name="Shape 24"/>
+          <p:cNvPr id="32" name="Shape 30"/>
           <p:cNvSpPr/>
           <p:nvPr/>
         </p:nvSpPr>
@@ -20328,7 +21238,7 @@
       </p:sp>
       <p:sp>
         <p:nvSpPr>
-          <p:cNvPr id="27" name="Text 25"/>
+          <p:cNvPr id="33" name="Text 31"/>
           <p:cNvSpPr/>
           <p:nvPr/>
         </p:nvSpPr>
@@ -20367,7 +21277,7 @@
       </p:sp>
       <p:sp>
         <p:nvSpPr>
-          <p:cNvPr id="28" name="Shape 26"/>
+          <p:cNvPr id="34" name="Shape 32"/>
           <p:cNvSpPr/>
           <p:nvPr/>
         </p:nvSpPr>
@@ -20394,7 +21304,7 @@
       </p:sp>
       <p:sp>
         <p:nvSpPr>
-          <p:cNvPr id="29" name="Text 27"/>
+          <p:cNvPr id="35" name="Text 33"/>
           <p:cNvSpPr/>
           <p:nvPr/>
         </p:nvSpPr>
@@ -20717,7 +21627,7 @@
                 <a:ea typeface="Calibri" pitchFamily="34" charset="-122"/>
                 <a:cs typeface="Calibri" pitchFamily="34" charset="-120"/>
               </a:rPr>
-              <a:t>Word Labs  •  wordlabs.app  •  Root: 'transport' = carry across or over</a:t>
+              <a:t>Word Labs  •  wordlabs.app  •  Root: 'transport' = carry across or beyond</a:t>
             </a:r>
             <a:endParaRPr lang="en-US" sz="800" dirty="0"/>
           </a:p>
@@ -20856,7 +21766,7 @@
                 <a:ea typeface="Trebuchet MS" pitchFamily="34" charset="-122"/>
                 <a:cs typeface="Trebuchet MS" pitchFamily="34" charset="-120"/>
               </a:rPr>
-              <a:t>Transporting</a:t>
+              <a:t>retransportation</a:t>
             </a:r>
             <a:endParaRPr lang="en-US" sz="2800" dirty="0"/>
           </a:p>
@@ -20936,8 +21846,8 @@
         </p:nvSpPr>
         <p:spPr>
           <a:xfrm>
-            <a:off x="2938272" y="2258568"/>
-            <a:ext cx="1828800" cy="292608"/>
+            <a:off x="1989734" y="2258568"/>
+            <a:ext cx="1581912" cy="292608"/>
           </a:xfrm>
           <a:prstGeom prst="rect">
             <a:avLst>
@@ -20945,11 +21855,11 @@
             </a:avLst>
           </a:prstGeom>
           <a:solidFill>
-            <a:srgbClr val="CCFBF1"/>
+            <a:srgbClr val="DDD6FE"/>
           </a:solidFill>
           <a:ln w="19050">
             <a:solidFill>
-              <a:srgbClr val="0D9488"/>
+              <a:srgbClr val="7C3AED"/>
             </a:solidFill>
             <a:prstDash val="solid"/>
           </a:ln>
@@ -20970,8 +21880,8 @@
         </p:nvSpPr>
         <p:spPr>
           <a:xfrm>
-            <a:off x="2938272" y="2258568"/>
-            <a:ext cx="1828800" cy="292608"/>
+            <a:off x="1989734" y="2258568"/>
+            <a:ext cx="1581912" cy="292608"/>
           </a:xfrm>
           <a:prstGeom prst="rect">
             <a:avLst/>
@@ -20989,13 +21899,13 @@
             <a:r>
               <a:rPr lang="en-US" sz="1300" b="1" dirty="0">
                 <a:solidFill>
-                  <a:srgbClr val="0F766E"/>
+                  <a:srgbClr val="4C1D95"/>
                 </a:solidFill>
                 <a:latin typeface="Trebuchet MS" pitchFamily="34" charset="0"/>
                 <a:ea typeface="Trebuchet MS" pitchFamily="34" charset="-122"/>
                 <a:cs typeface="Trebuchet MS" pitchFamily="34" charset="-120"/>
               </a:rPr>
-              <a:t>transport</a:t>
+              <a:t>re</a:t>
             </a:r>
             <a:endParaRPr lang="en-US" sz="1300" dirty="0"/>
           </a:p>
@@ -21009,8 +21919,8 @@
         </p:nvSpPr>
         <p:spPr>
           <a:xfrm>
-            <a:off x="2938272" y="2569464"/>
-            <a:ext cx="1828800" cy="201168"/>
+            <a:off x="1989734" y="2569464"/>
+            <a:ext cx="1581912" cy="201168"/>
           </a:xfrm>
           <a:prstGeom prst="rect">
             <a:avLst/>
@@ -21034,7 +21944,7 @@
                 <a:ea typeface="Calibri" pitchFamily="34" charset="-122"/>
                 <a:cs typeface="Calibri" pitchFamily="34" charset="-120"/>
               </a:rPr>
-              <a:t>carry across</a:t>
+              <a:t>again</a:t>
             </a:r>
             <a:endParaRPr lang="en-US" sz="850" dirty="0"/>
           </a:p>
@@ -21048,8 +21958,8 @@
         </p:nvSpPr>
         <p:spPr>
           <a:xfrm>
-            <a:off x="5803392" y="2258568"/>
-            <a:ext cx="1828800" cy="292608"/>
+            <a:off x="3659429" y="2258568"/>
+            <a:ext cx="1581912" cy="292608"/>
           </a:xfrm>
           <a:prstGeom prst="rect">
             <a:avLst>
@@ -21082,8 +21992,8 @@
         </p:nvSpPr>
         <p:spPr>
           <a:xfrm>
-            <a:off x="5803392" y="2258568"/>
-            <a:ext cx="1828800" cy="292608"/>
+            <a:off x="3659429" y="2258568"/>
+            <a:ext cx="1581912" cy="292608"/>
           </a:xfrm>
           <a:prstGeom prst="rect">
             <a:avLst/>
@@ -21107,7 +22017,7 @@
                 <a:ea typeface="Trebuchet MS" pitchFamily="34" charset="-122"/>
                 <a:cs typeface="Trebuchet MS" pitchFamily="34" charset="-120"/>
               </a:rPr>
-              <a:t>ing</a:t>
+              <a:t>trans</a:t>
             </a:r>
             <a:endParaRPr lang="en-US" sz="1300" dirty="0"/>
           </a:p>
@@ -21121,8 +22031,8 @@
         </p:nvSpPr>
         <p:spPr>
           <a:xfrm>
-            <a:off x="5803392" y="2569464"/>
-            <a:ext cx="1828800" cy="201168"/>
+            <a:off x="3659429" y="2569464"/>
+            <a:ext cx="1581912" cy="201168"/>
           </a:xfrm>
           <a:prstGeom prst="rect">
             <a:avLst/>
@@ -21146,7 +22056,7 @@
                 <a:ea typeface="Calibri" pitchFamily="34" charset="-122"/>
                 <a:cs typeface="Calibri" pitchFamily="34" charset="-120"/>
               </a:rPr>
-              <a:t>ongoing action</a:t>
+              <a:t>across, beyond</a:t>
             </a:r>
             <a:endParaRPr lang="en-US" sz="850" dirty="0"/>
           </a:p>
@@ -21155,6 +22065,230 @@
       <p:sp>
         <p:nvSpPr>
           <p:cNvPr id="22" name="Shape 20"/>
+          <p:cNvSpPr/>
+          <p:nvPr/>
+        </p:nvSpPr>
+        <p:spPr>
+          <a:xfrm>
+            <a:off x="5329123" y="2258568"/>
+            <a:ext cx="1581912" cy="292608"/>
+          </a:xfrm>
+          <a:prstGeom prst="rect">
+            <a:avLst>
+              <a:gd name="adj" fmla="val 25000"/>
+            </a:avLst>
+          </a:prstGeom>
+          <a:solidFill>
+            <a:srgbClr val="FCE7F3"/>
+          </a:solidFill>
+          <a:ln w="19050">
+            <a:solidFill>
+              <a:srgbClr val="DB2777"/>
+            </a:solidFill>
+            <a:prstDash val="solid"/>
+          </a:ln>
+          <a:effectLst>
+            <a:outerShdw sx="100000" sy="100000" kx="0" ky="0" algn="bl" rotWithShape="0" blurRad="101600" dist="38100" dir="8100000">
+              <a:srgbClr val="000000">
+                <a:alpha val="12000"/>
+              </a:srgbClr>
+            </a:outerShdw>
+          </a:effectLst>
+        </p:spPr>
+      </p:sp>
+      <p:sp>
+        <p:nvSpPr>
+          <p:cNvPr id="23" name="Text 21"/>
+          <p:cNvSpPr/>
+          <p:nvPr/>
+        </p:nvSpPr>
+        <p:spPr>
+          <a:xfrm>
+            <a:off x="5329123" y="2258568"/>
+            <a:ext cx="1581912" cy="292608"/>
+          </a:xfrm>
+          <a:prstGeom prst="rect">
+            <a:avLst/>
+          </a:prstGeom>
+          <a:noFill/>
+          <a:ln/>
+        </p:spPr>
+        <p:txBody>
+          <a:bodyPr wrap="square" lIns="0" tIns="0" rIns="0" bIns="0" rtlCol="0" anchor="ctr"/>
+          <a:lstStyle/>
+          <a:p>
+            <a:pPr algn="ctr" indent="0" marL="0">
+              <a:buNone/>
+            </a:pPr>
+            <a:r>
+              <a:rPr lang="en-US" sz="1300" b="1" dirty="0">
+                <a:solidFill>
+                  <a:srgbClr val="9D174D"/>
+                </a:solidFill>
+                <a:latin typeface="Trebuchet MS" pitchFamily="34" charset="0"/>
+                <a:ea typeface="Trebuchet MS" pitchFamily="34" charset="-122"/>
+                <a:cs typeface="Trebuchet MS" pitchFamily="34" charset="-120"/>
+              </a:rPr>
+              <a:t>port</a:t>
+            </a:r>
+            <a:endParaRPr lang="en-US" sz="1300" dirty="0"/>
+          </a:p>
+        </p:txBody>
+      </p:sp>
+      <p:sp>
+        <p:nvSpPr>
+          <p:cNvPr id="24" name="Text 22"/>
+          <p:cNvSpPr/>
+          <p:nvPr/>
+        </p:nvSpPr>
+        <p:spPr>
+          <a:xfrm>
+            <a:off x="5329123" y="2569464"/>
+            <a:ext cx="1581912" cy="201168"/>
+          </a:xfrm>
+          <a:prstGeom prst="rect">
+            <a:avLst/>
+          </a:prstGeom>
+          <a:noFill/>
+          <a:ln/>
+        </p:spPr>
+        <p:txBody>
+          <a:bodyPr wrap="square" lIns="0" tIns="0" rIns="0" bIns="0" rtlCol="0" anchor="t"/>
+          <a:lstStyle/>
+          <a:p>
+            <a:pPr algn="ctr" indent="0" marL="0">
+              <a:buNone/>
+            </a:pPr>
+            <a:r>
+              <a:rPr lang="en-US" sz="850" dirty="0">
+                <a:solidFill>
+                  <a:srgbClr val="475569"/>
+                </a:solidFill>
+                <a:latin typeface="Calibri" pitchFamily="34" charset="0"/>
+                <a:ea typeface="Calibri" pitchFamily="34" charset="-122"/>
+                <a:cs typeface="Calibri" pitchFamily="34" charset="-120"/>
+              </a:rPr>
+              <a:t>carry</a:t>
+            </a:r>
+            <a:endParaRPr lang="en-US" sz="850" dirty="0"/>
+          </a:p>
+        </p:txBody>
+      </p:sp>
+      <p:sp>
+        <p:nvSpPr>
+          <p:cNvPr id="25" name="Shape 23"/>
+          <p:cNvSpPr/>
+          <p:nvPr/>
+        </p:nvSpPr>
+        <p:spPr>
+          <a:xfrm>
+            <a:off x="6998818" y="2258568"/>
+            <a:ext cx="1581912" cy="292608"/>
+          </a:xfrm>
+          <a:prstGeom prst="rect">
+            <a:avLst>
+              <a:gd name="adj" fmla="val 25000"/>
+            </a:avLst>
+          </a:prstGeom>
+          <a:solidFill>
+            <a:srgbClr val="FCE7F3"/>
+          </a:solidFill>
+          <a:ln w="19050">
+            <a:solidFill>
+              <a:srgbClr val="DB2777"/>
+            </a:solidFill>
+            <a:prstDash val="solid"/>
+          </a:ln>
+          <a:effectLst>
+            <a:outerShdw sx="100000" sy="100000" kx="0" ky="0" algn="bl" rotWithShape="0" blurRad="101600" dist="38100" dir="8100000">
+              <a:srgbClr val="000000">
+                <a:alpha val="12000"/>
+              </a:srgbClr>
+            </a:outerShdw>
+          </a:effectLst>
+        </p:spPr>
+      </p:sp>
+      <p:sp>
+        <p:nvSpPr>
+          <p:cNvPr id="26" name="Text 24"/>
+          <p:cNvSpPr/>
+          <p:nvPr/>
+        </p:nvSpPr>
+        <p:spPr>
+          <a:xfrm>
+            <a:off x="6998818" y="2258568"/>
+            <a:ext cx="1581912" cy="292608"/>
+          </a:xfrm>
+          <a:prstGeom prst="rect">
+            <a:avLst/>
+          </a:prstGeom>
+          <a:noFill/>
+          <a:ln/>
+        </p:spPr>
+        <p:txBody>
+          <a:bodyPr wrap="square" lIns="0" tIns="0" rIns="0" bIns="0" rtlCol="0" anchor="ctr"/>
+          <a:lstStyle/>
+          <a:p>
+            <a:pPr algn="ctr" indent="0" marL="0">
+              <a:buNone/>
+            </a:pPr>
+            <a:r>
+              <a:rPr lang="en-US" sz="1300" b="1" dirty="0">
+                <a:solidFill>
+                  <a:srgbClr val="9D174D"/>
+                </a:solidFill>
+                <a:latin typeface="Trebuchet MS" pitchFamily="34" charset="0"/>
+                <a:ea typeface="Trebuchet MS" pitchFamily="34" charset="-122"/>
+                <a:cs typeface="Trebuchet MS" pitchFamily="34" charset="-120"/>
+              </a:rPr>
+              <a:t>ation</a:t>
+            </a:r>
+            <a:endParaRPr lang="en-US" sz="1300" dirty="0"/>
+          </a:p>
+        </p:txBody>
+      </p:sp>
+      <p:sp>
+        <p:nvSpPr>
+          <p:cNvPr id="27" name="Text 25"/>
+          <p:cNvSpPr/>
+          <p:nvPr/>
+        </p:nvSpPr>
+        <p:spPr>
+          <a:xfrm>
+            <a:off x="6998818" y="2569464"/>
+            <a:ext cx="1581912" cy="201168"/>
+          </a:xfrm>
+          <a:prstGeom prst="rect">
+            <a:avLst/>
+          </a:prstGeom>
+          <a:noFill/>
+          <a:ln/>
+        </p:spPr>
+        <p:txBody>
+          <a:bodyPr wrap="square" lIns="0" tIns="0" rIns="0" bIns="0" rtlCol="0" anchor="t"/>
+          <a:lstStyle/>
+          <a:p>
+            <a:pPr algn="ctr" indent="0" marL="0">
+              <a:buNone/>
+            </a:pPr>
+            <a:r>
+              <a:rPr lang="en-US" sz="850" dirty="0">
+                <a:solidFill>
+                  <a:srgbClr val="475569"/>
+                </a:solidFill>
+                <a:latin typeface="Calibri" pitchFamily="34" charset="0"/>
+                <a:ea typeface="Calibri" pitchFamily="34" charset="-122"/>
+                <a:cs typeface="Calibri" pitchFamily="34" charset="-120"/>
+              </a:rPr>
+              <a:t>act or process of</a:t>
+            </a:r>
+            <a:endParaRPr lang="en-US" sz="850" dirty="0"/>
+          </a:p>
+        </p:txBody>
+      </p:sp>
+      <p:sp>
+        <p:nvSpPr>
+          <p:cNvPr id="28" name="Shape 26"/>
           <p:cNvSpPr/>
           <p:nvPr/>
         </p:nvSpPr>
@@ -21181,7 +22315,7 @@
       </p:sp>
       <p:sp>
         <p:nvSpPr>
-          <p:cNvPr id="23" name="Text 21"/>
+          <p:cNvPr id="29" name="Text 27"/>
           <p:cNvSpPr/>
           <p:nvPr/>
         </p:nvSpPr>
@@ -21220,7 +22354,7 @@
       </p:sp>
       <p:sp>
         <p:nvSpPr>
-          <p:cNvPr id="24" name="Shape 22"/>
+          <p:cNvPr id="30" name="Shape 28"/>
           <p:cNvSpPr/>
           <p:nvPr/>
         </p:nvSpPr>
@@ -21247,14 +22381,14 @@
       </p:sp>
       <p:sp>
         <p:nvSpPr>
-          <p:cNvPr id="25" name="Shape 23"/>
-          <p:cNvSpPr/>
-          <p:nvPr/>
-        </p:nvSpPr>
-        <p:spPr>
-          <a:xfrm>
-            <a:off x="2313432" y="3364992"/>
-            <a:ext cx="1645920" cy="475488"/>
+          <p:cNvPr id="31" name="Shape 29"/>
+          <p:cNvSpPr/>
+          <p:nvPr/>
+        </p:nvSpPr>
+        <p:spPr>
+          <a:xfrm>
+            <a:off x="1978152" y="3364992"/>
+            <a:ext cx="1225296" cy="475488"/>
           </a:xfrm>
           <a:prstGeom prst="rect">
             <a:avLst>
@@ -21274,14 +22408,14 @@
       </p:sp>
       <p:sp>
         <p:nvSpPr>
-          <p:cNvPr id="26" name="Text 24"/>
-          <p:cNvSpPr/>
-          <p:nvPr/>
-        </p:nvSpPr>
-        <p:spPr>
-          <a:xfrm>
-            <a:off x="2313432" y="3364992"/>
-            <a:ext cx="1645920" cy="475488"/>
+          <p:cNvPr id="32" name="Text 30"/>
+          <p:cNvSpPr/>
+          <p:nvPr/>
+        </p:nvSpPr>
+        <p:spPr>
+          <a:xfrm>
+            <a:off x="1978152" y="3364992"/>
+            <a:ext cx="1225296" cy="475488"/>
           </a:xfrm>
           <a:prstGeom prst="rect">
             <a:avLst/>
@@ -21305,7 +22439,7 @@
                 <a:ea typeface="Trebuchet MS" pitchFamily="34" charset="-122"/>
                 <a:cs typeface="Trebuchet MS" pitchFamily="34" charset="-120"/>
               </a:rPr>
-              <a:t>trans</a:t>
+              <a:t>re</a:t>
             </a:r>
             <a:endParaRPr lang="en-US" sz="1400" dirty="0"/>
           </a:p>
@@ -21313,14 +22447,14 @@
       </p:sp>
       <p:sp>
         <p:nvSpPr>
-          <p:cNvPr id="27" name="Text 25"/>
-          <p:cNvSpPr/>
-          <p:nvPr/>
-        </p:nvSpPr>
-        <p:spPr>
-          <a:xfrm>
-            <a:off x="3959352" y="3364992"/>
-            <a:ext cx="411480" cy="475488"/>
+          <p:cNvPr id="33" name="Text 31"/>
+          <p:cNvSpPr/>
+          <p:nvPr/>
+        </p:nvSpPr>
+        <p:spPr>
+          <a:xfrm>
+            <a:off x="3203448" y="3364992"/>
+            <a:ext cx="76200" cy="475488"/>
           </a:xfrm>
           <a:prstGeom prst="rect">
             <a:avLst/>
@@ -21352,14 +22486,14 @@
       </p:sp>
       <p:sp>
         <p:nvSpPr>
-          <p:cNvPr id="28" name="Shape 26"/>
-          <p:cNvSpPr/>
-          <p:nvPr/>
-        </p:nvSpPr>
-        <p:spPr>
-          <a:xfrm>
-            <a:off x="4370832" y="3364992"/>
-            <a:ext cx="1645920" cy="475488"/>
+          <p:cNvPr id="34" name="Shape 32"/>
+          <p:cNvSpPr/>
+          <p:nvPr/>
+        </p:nvSpPr>
+        <p:spPr>
+          <a:xfrm>
+            <a:off x="3279648" y="3364992"/>
+            <a:ext cx="1225296" cy="475488"/>
           </a:xfrm>
           <a:prstGeom prst="rect">
             <a:avLst>
@@ -21379,14 +22513,14 @@
       </p:sp>
       <p:sp>
         <p:nvSpPr>
-          <p:cNvPr id="29" name="Text 27"/>
-          <p:cNvSpPr/>
-          <p:nvPr/>
-        </p:nvSpPr>
-        <p:spPr>
-          <a:xfrm>
-            <a:off x="4370832" y="3364992"/>
-            <a:ext cx="1645920" cy="475488"/>
+          <p:cNvPr id="35" name="Text 33"/>
+          <p:cNvSpPr/>
+          <p:nvPr/>
+        </p:nvSpPr>
+        <p:spPr>
+          <a:xfrm>
+            <a:off x="3279648" y="3364992"/>
+            <a:ext cx="1225296" cy="475488"/>
           </a:xfrm>
           <a:prstGeom prst="rect">
             <a:avLst/>
@@ -21410,7 +22544,7 @@
                 <a:ea typeface="Trebuchet MS" pitchFamily="34" charset="-122"/>
                 <a:cs typeface="Trebuchet MS" pitchFamily="34" charset="-120"/>
               </a:rPr>
-              <a:t>por</a:t>
+              <a:t>trans</a:t>
             </a:r>
             <a:endParaRPr lang="en-US" sz="1400" dirty="0"/>
           </a:p>
@@ -21418,14 +22552,14 @@
       </p:sp>
       <p:sp>
         <p:nvSpPr>
-          <p:cNvPr id="30" name="Text 28"/>
-          <p:cNvSpPr/>
-          <p:nvPr/>
-        </p:nvSpPr>
-        <p:spPr>
-          <a:xfrm>
-            <a:off x="6016752" y="3364992"/>
-            <a:ext cx="411480" cy="475488"/>
+          <p:cNvPr id="36" name="Text 34"/>
+          <p:cNvSpPr/>
+          <p:nvPr/>
+        </p:nvSpPr>
+        <p:spPr>
+          <a:xfrm>
+            <a:off x="4504944" y="3364992"/>
+            <a:ext cx="76200" cy="475488"/>
           </a:xfrm>
           <a:prstGeom prst="rect">
             <a:avLst/>
@@ -21457,14 +22591,14 @@
       </p:sp>
       <p:sp>
         <p:nvSpPr>
-          <p:cNvPr id="31" name="Shape 29"/>
-          <p:cNvSpPr/>
-          <p:nvPr/>
-        </p:nvSpPr>
-        <p:spPr>
-          <a:xfrm>
-            <a:off x="6428232" y="3364992"/>
-            <a:ext cx="1645920" cy="475488"/>
+          <p:cNvPr id="37" name="Shape 35"/>
+          <p:cNvSpPr/>
+          <p:nvPr/>
+        </p:nvSpPr>
+        <p:spPr>
+          <a:xfrm>
+            <a:off x="4581144" y="3364992"/>
+            <a:ext cx="1225296" cy="475488"/>
           </a:xfrm>
           <a:prstGeom prst="rect">
             <a:avLst>
@@ -21484,14 +22618,14 @@
       </p:sp>
       <p:sp>
         <p:nvSpPr>
-          <p:cNvPr id="32" name="Text 30"/>
-          <p:cNvSpPr/>
-          <p:nvPr/>
-        </p:nvSpPr>
-        <p:spPr>
-          <a:xfrm>
-            <a:off x="6428232" y="3364992"/>
-            <a:ext cx="1645920" cy="475488"/>
+          <p:cNvPr id="38" name="Text 36"/>
+          <p:cNvSpPr/>
+          <p:nvPr/>
+        </p:nvSpPr>
+        <p:spPr>
+          <a:xfrm>
+            <a:off x="4581144" y="3364992"/>
+            <a:ext cx="1225296" cy="475488"/>
           </a:xfrm>
           <a:prstGeom prst="rect">
             <a:avLst/>
@@ -21515,7 +22649,7 @@
                 <a:ea typeface="Trebuchet MS" pitchFamily="34" charset="-122"/>
                 <a:cs typeface="Trebuchet MS" pitchFamily="34" charset="-120"/>
               </a:rPr>
-              <a:t>ting</a:t>
+              <a:t>por</a:t>
             </a:r>
             <a:endParaRPr lang="en-US" sz="1400" dirty="0"/>
           </a:p>
@@ -21523,7 +22657,217 @@
       </p:sp>
       <p:sp>
         <p:nvSpPr>
-          <p:cNvPr id="33" name="Shape 31"/>
+          <p:cNvPr id="39" name="Text 37"/>
+          <p:cNvSpPr/>
+          <p:nvPr/>
+        </p:nvSpPr>
+        <p:spPr>
+          <a:xfrm>
+            <a:off x="5806440" y="3364992"/>
+            <a:ext cx="76200" cy="475488"/>
+          </a:xfrm>
+          <a:prstGeom prst="rect">
+            <a:avLst/>
+          </a:prstGeom>
+          <a:noFill/>
+          <a:ln/>
+        </p:spPr>
+        <p:txBody>
+          <a:bodyPr wrap="square" lIns="0" tIns="0" rIns="0" bIns="0" rtlCol="0" anchor="ctr"/>
+          <a:lstStyle/>
+          <a:p>
+            <a:pPr algn="ctr" indent="0" marL="0">
+              <a:buNone/>
+            </a:pPr>
+            <a:r>
+              <a:rPr lang="en-US" sz="1600" b="1" dirty="0">
+                <a:solidFill>
+                  <a:srgbClr val="0D9488"/>
+                </a:solidFill>
+                <a:latin typeface="Trebuchet MS" pitchFamily="34" charset="0"/>
+                <a:ea typeface="Trebuchet MS" pitchFamily="34" charset="-122"/>
+                <a:cs typeface="Trebuchet MS" pitchFamily="34" charset="-120"/>
+              </a:rPr>
+              <a:t>·</a:t>
+            </a:r>
+            <a:endParaRPr lang="en-US" sz="1600" dirty="0"/>
+          </a:p>
+        </p:txBody>
+      </p:sp>
+      <p:sp>
+        <p:nvSpPr>
+          <p:cNvPr id="40" name="Shape 38"/>
+          <p:cNvSpPr/>
+          <p:nvPr/>
+        </p:nvSpPr>
+        <p:spPr>
+          <a:xfrm>
+            <a:off x="5882640" y="3364992"/>
+            <a:ext cx="1225296" cy="475488"/>
+          </a:xfrm>
+          <a:prstGeom prst="rect">
+            <a:avLst>
+              <a:gd name="adj" fmla="val 9615"/>
+            </a:avLst>
+          </a:prstGeom>
+          <a:solidFill>
+            <a:srgbClr val="FFFFFF"/>
+          </a:solidFill>
+          <a:ln w="12700">
+            <a:solidFill>
+              <a:srgbClr val="0D9488"/>
+            </a:solidFill>
+            <a:prstDash val="solid"/>
+          </a:ln>
+        </p:spPr>
+      </p:sp>
+      <p:sp>
+        <p:nvSpPr>
+          <p:cNvPr id="41" name="Text 39"/>
+          <p:cNvSpPr/>
+          <p:nvPr/>
+        </p:nvSpPr>
+        <p:spPr>
+          <a:xfrm>
+            <a:off x="5882640" y="3364992"/>
+            <a:ext cx="1225296" cy="475488"/>
+          </a:xfrm>
+          <a:prstGeom prst="rect">
+            <a:avLst/>
+          </a:prstGeom>
+          <a:noFill/>
+          <a:ln/>
+        </p:spPr>
+        <p:txBody>
+          <a:bodyPr wrap="square" lIns="0" tIns="0" rIns="0" bIns="0" rtlCol="0" anchor="ctr"/>
+          <a:lstStyle/>
+          <a:p>
+            <a:pPr algn="ctr" indent="0" marL="0">
+              <a:buNone/>
+            </a:pPr>
+            <a:r>
+              <a:rPr lang="en-US" sz="1400" b="1" dirty="0">
+                <a:solidFill>
+                  <a:srgbClr val="0D9488"/>
+                </a:solidFill>
+                <a:latin typeface="Trebuchet MS" pitchFamily="34" charset="0"/>
+                <a:ea typeface="Trebuchet MS" pitchFamily="34" charset="-122"/>
+                <a:cs typeface="Trebuchet MS" pitchFamily="34" charset="-120"/>
+              </a:rPr>
+              <a:t>ta</a:t>
+            </a:r>
+            <a:endParaRPr lang="en-US" sz="1400" dirty="0"/>
+          </a:p>
+        </p:txBody>
+      </p:sp>
+      <p:sp>
+        <p:nvSpPr>
+          <p:cNvPr id="42" name="Text 40"/>
+          <p:cNvSpPr/>
+          <p:nvPr/>
+        </p:nvSpPr>
+        <p:spPr>
+          <a:xfrm>
+            <a:off x="7107936" y="3364992"/>
+            <a:ext cx="76200" cy="475488"/>
+          </a:xfrm>
+          <a:prstGeom prst="rect">
+            <a:avLst/>
+          </a:prstGeom>
+          <a:noFill/>
+          <a:ln/>
+        </p:spPr>
+        <p:txBody>
+          <a:bodyPr wrap="square" lIns="0" tIns="0" rIns="0" bIns="0" rtlCol="0" anchor="ctr"/>
+          <a:lstStyle/>
+          <a:p>
+            <a:pPr algn="ctr" indent="0" marL="0">
+              <a:buNone/>
+            </a:pPr>
+            <a:r>
+              <a:rPr lang="en-US" sz="1600" b="1" dirty="0">
+                <a:solidFill>
+                  <a:srgbClr val="0D9488"/>
+                </a:solidFill>
+                <a:latin typeface="Trebuchet MS" pitchFamily="34" charset="0"/>
+                <a:ea typeface="Trebuchet MS" pitchFamily="34" charset="-122"/>
+                <a:cs typeface="Trebuchet MS" pitchFamily="34" charset="-120"/>
+              </a:rPr>
+              <a:t>·</a:t>
+            </a:r>
+            <a:endParaRPr lang="en-US" sz="1600" dirty="0"/>
+          </a:p>
+        </p:txBody>
+      </p:sp>
+      <p:sp>
+        <p:nvSpPr>
+          <p:cNvPr id="43" name="Shape 41"/>
+          <p:cNvSpPr/>
+          <p:nvPr/>
+        </p:nvSpPr>
+        <p:spPr>
+          <a:xfrm>
+            <a:off x="7184136" y="3364992"/>
+            <a:ext cx="1225296" cy="475488"/>
+          </a:xfrm>
+          <a:prstGeom prst="rect">
+            <a:avLst>
+              <a:gd name="adj" fmla="val 9615"/>
+            </a:avLst>
+          </a:prstGeom>
+          <a:solidFill>
+            <a:srgbClr val="FFFFFF"/>
+          </a:solidFill>
+          <a:ln w="12700">
+            <a:solidFill>
+              <a:srgbClr val="0D9488"/>
+            </a:solidFill>
+            <a:prstDash val="solid"/>
+          </a:ln>
+        </p:spPr>
+      </p:sp>
+      <p:sp>
+        <p:nvSpPr>
+          <p:cNvPr id="44" name="Text 42"/>
+          <p:cNvSpPr/>
+          <p:nvPr/>
+        </p:nvSpPr>
+        <p:spPr>
+          <a:xfrm>
+            <a:off x="7184136" y="3364992"/>
+            <a:ext cx="1225296" cy="475488"/>
+          </a:xfrm>
+          <a:prstGeom prst="rect">
+            <a:avLst/>
+          </a:prstGeom>
+          <a:noFill/>
+          <a:ln/>
+        </p:spPr>
+        <p:txBody>
+          <a:bodyPr wrap="square" lIns="0" tIns="0" rIns="0" bIns="0" rtlCol="0" anchor="ctr"/>
+          <a:lstStyle/>
+          <a:p>
+            <a:pPr algn="ctr" indent="0" marL="0">
+              <a:buNone/>
+            </a:pPr>
+            <a:r>
+              <a:rPr lang="en-US" sz="1400" b="1" dirty="0">
+                <a:solidFill>
+                  <a:srgbClr val="0D9488"/>
+                </a:solidFill>
+                <a:latin typeface="Trebuchet MS" pitchFamily="34" charset="0"/>
+                <a:ea typeface="Trebuchet MS" pitchFamily="34" charset="-122"/>
+                <a:cs typeface="Trebuchet MS" pitchFamily="34" charset="-120"/>
+              </a:rPr>
+              <a:t>tion</a:t>
+            </a:r>
+            <a:endParaRPr lang="en-US" sz="1400" dirty="0"/>
+          </a:p>
+        </p:txBody>
+      </p:sp>
+      <p:sp>
+        <p:nvSpPr>
+          <p:cNvPr id="45" name="Shape 43"/>
           <p:cNvSpPr/>
           <p:nvPr/>
         </p:nvSpPr>
@@ -21550,7 +22894,7 @@
       </p:sp>
       <p:sp>
         <p:nvSpPr>
-          <p:cNvPr id="34" name="Text 32"/>
+          <p:cNvPr id="46" name="Text 44"/>
           <p:cNvSpPr/>
           <p:nvPr/>
         </p:nvSpPr>
@@ -21589,7 +22933,7 @@
       </p:sp>
       <p:sp>
         <p:nvSpPr>
-          <p:cNvPr id="35" name="Shape 33"/>
+          <p:cNvPr id="47" name="Shape 45"/>
           <p:cNvSpPr/>
           <p:nvPr/>
         </p:nvSpPr>
@@ -21616,7 +22960,7 @@
       </p:sp>
       <p:sp>
         <p:nvSpPr>
-          <p:cNvPr id="36" name="Text 34"/>
+          <p:cNvPr id="48" name="Text 46"/>
           <p:cNvSpPr/>
           <p:nvPr/>
         </p:nvSpPr>
@@ -21939,7 +23283,7 @@
                 <a:ea typeface="Calibri" pitchFamily="34" charset="-122"/>
                 <a:cs typeface="Calibri" pitchFamily="34" charset="-120"/>
               </a:rPr>
-              <a:t>Word Labs  •  wordlabs.app  •  Root: 'transport' = carry across or over</a:t>
+              <a:t>Word Labs  •  wordlabs.app  •  Root: 'transport' = carry across or beyond</a:t>
             </a:r>
             <a:endParaRPr lang="en-US" sz="800" dirty="0"/>
           </a:p>
@@ -22078,7 +23422,7 @@
                 <a:ea typeface="Trebuchet MS" pitchFamily="34" charset="-122"/>
                 <a:cs typeface="Trebuchet MS" pitchFamily="34" charset="-120"/>
               </a:rPr>
-              <a:t>Transporting</a:t>
+              <a:t>retransportation</a:t>
             </a:r>
             <a:endParaRPr lang="en-US" sz="2800" dirty="0"/>
           </a:p>
@@ -22158,8 +23502,8 @@
         </p:nvSpPr>
         <p:spPr>
           <a:xfrm>
-            <a:off x="2938272" y="2258568"/>
-            <a:ext cx="1828800" cy="292608"/>
+            <a:off x="1989734" y="2258568"/>
+            <a:ext cx="1581912" cy="292608"/>
           </a:xfrm>
           <a:prstGeom prst="rect">
             <a:avLst>
@@ -22167,11 +23511,11 @@
             </a:avLst>
           </a:prstGeom>
           <a:solidFill>
-            <a:srgbClr val="CCFBF1"/>
+            <a:srgbClr val="DDD6FE"/>
           </a:solidFill>
           <a:ln w="19050">
             <a:solidFill>
-              <a:srgbClr val="0D9488"/>
+              <a:srgbClr val="7C3AED"/>
             </a:solidFill>
             <a:prstDash val="solid"/>
           </a:ln>
@@ -22192,8 +23536,8 @@
         </p:nvSpPr>
         <p:spPr>
           <a:xfrm>
-            <a:off x="2938272" y="2258568"/>
-            <a:ext cx="1828800" cy="292608"/>
+            <a:off x="1989734" y="2258568"/>
+            <a:ext cx="1581912" cy="292608"/>
           </a:xfrm>
           <a:prstGeom prst="rect">
             <a:avLst/>
@@ -22211,13 +23555,13 @@
             <a:r>
               <a:rPr lang="en-US" sz="1300" b="1" dirty="0">
                 <a:solidFill>
-                  <a:srgbClr val="0F766E"/>
+                  <a:srgbClr val="4C1D95"/>
                 </a:solidFill>
                 <a:latin typeface="Trebuchet MS" pitchFamily="34" charset="0"/>
                 <a:ea typeface="Trebuchet MS" pitchFamily="34" charset="-122"/>
                 <a:cs typeface="Trebuchet MS" pitchFamily="34" charset="-120"/>
               </a:rPr>
-              <a:t>transport</a:t>
+              <a:t>re</a:t>
             </a:r>
             <a:endParaRPr lang="en-US" sz="1300" dirty="0"/>
           </a:p>
@@ -22231,8 +23575,8 @@
         </p:nvSpPr>
         <p:spPr>
           <a:xfrm>
-            <a:off x="2938272" y="2569464"/>
-            <a:ext cx="1828800" cy="201168"/>
+            <a:off x="1989734" y="2569464"/>
+            <a:ext cx="1581912" cy="201168"/>
           </a:xfrm>
           <a:prstGeom prst="rect">
             <a:avLst/>
@@ -22256,7 +23600,7 @@
                 <a:ea typeface="Calibri" pitchFamily="34" charset="-122"/>
                 <a:cs typeface="Calibri" pitchFamily="34" charset="-120"/>
               </a:rPr>
-              <a:t>carry across</a:t>
+              <a:t>again</a:t>
             </a:r>
             <a:endParaRPr lang="en-US" sz="850" dirty="0"/>
           </a:p>
@@ -22270,8 +23614,8 @@
         </p:nvSpPr>
         <p:spPr>
           <a:xfrm>
-            <a:off x="5803392" y="2258568"/>
-            <a:ext cx="1828800" cy="292608"/>
+            <a:off x="3659429" y="2258568"/>
+            <a:ext cx="1581912" cy="292608"/>
           </a:xfrm>
           <a:prstGeom prst="rect">
             <a:avLst>
@@ -22304,8 +23648,8 @@
         </p:nvSpPr>
         <p:spPr>
           <a:xfrm>
-            <a:off x="5803392" y="2258568"/>
-            <a:ext cx="1828800" cy="292608"/>
+            <a:off x="3659429" y="2258568"/>
+            <a:ext cx="1581912" cy="292608"/>
           </a:xfrm>
           <a:prstGeom prst="rect">
             <a:avLst/>
@@ -22329,7 +23673,7 @@
                 <a:ea typeface="Trebuchet MS" pitchFamily="34" charset="-122"/>
                 <a:cs typeface="Trebuchet MS" pitchFamily="34" charset="-120"/>
               </a:rPr>
-              <a:t>ing</a:t>
+              <a:t>trans</a:t>
             </a:r>
             <a:endParaRPr lang="en-US" sz="1300" dirty="0"/>
           </a:p>
@@ -22343,8 +23687,8 @@
         </p:nvSpPr>
         <p:spPr>
           <a:xfrm>
-            <a:off x="5803392" y="2569464"/>
-            <a:ext cx="1828800" cy="201168"/>
+            <a:off x="3659429" y="2569464"/>
+            <a:ext cx="1581912" cy="201168"/>
           </a:xfrm>
           <a:prstGeom prst="rect">
             <a:avLst/>
@@ -22368,7 +23712,7 @@
                 <a:ea typeface="Calibri" pitchFamily="34" charset="-122"/>
                 <a:cs typeface="Calibri" pitchFamily="34" charset="-120"/>
               </a:rPr>
-              <a:t>ongoing action</a:t>
+              <a:t>across, beyond</a:t>
             </a:r>
             <a:endParaRPr lang="en-US" sz="850" dirty="0"/>
           </a:p>
@@ -22377,6 +23721,230 @@
       <p:sp>
         <p:nvSpPr>
           <p:cNvPr id="22" name="Shape 20"/>
+          <p:cNvSpPr/>
+          <p:nvPr/>
+        </p:nvSpPr>
+        <p:spPr>
+          <a:xfrm>
+            <a:off x="5329123" y="2258568"/>
+            <a:ext cx="1581912" cy="292608"/>
+          </a:xfrm>
+          <a:prstGeom prst="rect">
+            <a:avLst>
+              <a:gd name="adj" fmla="val 25000"/>
+            </a:avLst>
+          </a:prstGeom>
+          <a:solidFill>
+            <a:srgbClr val="FCE7F3"/>
+          </a:solidFill>
+          <a:ln w="19050">
+            <a:solidFill>
+              <a:srgbClr val="DB2777"/>
+            </a:solidFill>
+            <a:prstDash val="solid"/>
+          </a:ln>
+          <a:effectLst>
+            <a:outerShdw sx="100000" sy="100000" kx="0" ky="0" algn="bl" rotWithShape="0" blurRad="101600" dist="38100" dir="8100000">
+              <a:srgbClr val="000000">
+                <a:alpha val="12000"/>
+              </a:srgbClr>
+            </a:outerShdw>
+          </a:effectLst>
+        </p:spPr>
+      </p:sp>
+      <p:sp>
+        <p:nvSpPr>
+          <p:cNvPr id="23" name="Text 21"/>
+          <p:cNvSpPr/>
+          <p:nvPr/>
+        </p:nvSpPr>
+        <p:spPr>
+          <a:xfrm>
+            <a:off x="5329123" y="2258568"/>
+            <a:ext cx="1581912" cy="292608"/>
+          </a:xfrm>
+          <a:prstGeom prst="rect">
+            <a:avLst/>
+          </a:prstGeom>
+          <a:noFill/>
+          <a:ln/>
+        </p:spPr>
+        <p:txBody>
+          <a:bodyPr wrap="square" lIns="0" tIns="0" rIns="0" bIns="0" rtlCol="0" anchor="ctr"/>
+          <a:lstStyle/>
+          <a:p>
+            <a:pPr algn="ctr" indent="0" marL="0">
+              <a:buNone/>
+            </a:pPr>
+            <a:r>
+              <a:rPr lang="en-US" sz="1300" b="1" dirty="0">
+                <a:solidFill>
+                  <a:srgbClr val="9D174D"/>
+                </a:solidFill>
+                <a:latin typeface="Trebuchet MS" pitchFamily="34" charset="0"/>
+                <a:ea typeface="Trebuchet MS" pitchFamily="34" charset="-122"/>
+                <a:cs typeface="Trebuchet MS" pitchFamily="34" charset="-120"/>
+              </a:rPr>
+              <a:t>port</a:t>
+            </a:r>
+            <a:endParaRPr lang="en-US" sz="1300" dirty="0"/>
+          </a:p>
+        </p:txBody>
+      </p:sp>
+      <p:sp>
+        <p:nvSpPr>
+          <p:cNvPr id="24" name="Text 22"/>
+          <p:cNvSpPr/>
+          <p:nvPr/>
+        </p:nvSpPr>
+        <p:spPr>
+          <a:xfrm>
+            <a:off x="5329123" y="2569464"/>
+            <a:ext cx="1581912" cy="201168"/>
+          </a:xfrm>
+          <a:prstGeom prst="rect">
+            <a:avLst/>
+          </a:prstGeom>
+          <a:noFill/>
+          <a:ln/>
+        </p:spPr>
+        <p:txBody>
+          <a:bodyPr wrap="square" lIns="0" tIns="0" rIns="0" bIns="0" rtlCol="0" anchor="t"/>
+          <a:lstStyle/>
+          <a:p>
+            <a:pPr algn="ctr" indent="0" marL="0">
+              <a:buNone/>
+            </a:pPr>
+            <a:r>
+              <a:rPr lang="en-US" sz="850" dirty="0">
+                <a:solidFill>
+                  <a:srgbClr val="475569"/>
+                </a:solidFill>
+                <a:latin typeface="Calibri" pitchFamily="34" charset="0"/>
+                <a:ea typeface="Calibri" pitchFamily="34" charset="-122"/>
+                <a:cs typeface="Calibri" pitchFamily="34" charset="-120"/>
+              </a:rPr>
+              <a:t>carry</a:t>
+            </a:r>
+            <a:endParaRPr lang="en-US" sz="850" dirty="0"/>
+          </a:p>
+        </p:txBody>
+      </p:sp>
+      <p:sp>
+        <p:nvSpPr>
+          <p:cNvPr id="25" name="Shape 23"/>
+          <p:cNvSpPr/>
+          <p:nvPr/>
+        </p:nvSpPr>
+        <p:spPr>
+          <a:xfrm>
+            <a:off x="6998818" y="2258568"/>
+            <a:ext cx="1581912" cy="292608"/>
+          </a:xfrm>
+          <a:prstGeom prst="rect">
+            <a:avLst>
+              <a:gd name="adj" fmla="val 25000"/>
+            </a:avLst>
+          </a:prstGeom>
+          <a:solidFill>
+            <a:srgbClr val="FCE7F3"/>
+          </a:solidFill>
+          <a:ln w="19050">
+            <a:solidFill>
+              <a:srgbClr val="DB2777"/>
+            </a:solidFill>
+            <a:prstDash val="solid"/>
+          </a:ln>
+          <a:effectLst>
+            <a:outerShdw sx="100000" sy="100000" kx="0" ky="0" algn="bl" rotWithShape="0" blurRad="101600" dist="38100" dir="8100000">
+              <a:srgbClr val="000000">
+                <a:alpha val="12000"/>
+              </a:srgbClr>
+            </a:outerShdw>
+          </a:effectLst>
+        </p:spPr>
+      </p:sp>
+      <p:sp>
+        <p:nvSpPr>
+          <p:cNvPr id="26" name="Text 24"/>
+          <p:cNvSpPr/>
+          <p:nvPr/>
+        </p:nvSpPr>
+        <p:spPr>
+          <a:xfrm>
+            <a:off x="6998818" y="2258568"/>
+            <a:ext cx="1581912" cy="292608"/>
+          </a:xfrm>
+          <a:prstGeom prst="rect">
+            <a:avLst/>
+          </a:prstGeom>
+          <a:noFill/>
+          <a:ln/>
+        </p:spPr>
+        <p:txBody>
+          <a:bodyPr wrap="square" lIns="0" tIns="0" rIns="0" bIns="0" rtlCol="0" anchor="ctr"/>
+          <a:lstStyle/>
+          <a:p>
+            <a:pPr algn="ctr" indent="0" marL="0">
+              <a:buNone/>
+            </a:pPr>
+            <a:r>
+              <a:rPr lang="en-US" sz="1300" b="1" dirty="0">
+                <a:solidFill>
+                  <a:srgbClr val="9D174D"/>
+                </a:solidFill>
+                <a:latin typeface="Trebuchet MS" pitchFamily="34" charset="0"/>
+                <a:ea typeface="Trebuchet MS" pitchFamily="34" charset="-122"/>
+                <a:cs typeface="Trebuchet MS" pitchFamily="34" charset="-120"/>
+              </a:rPr>
+              <a:t>ation</a:t>
+            </a:r>
+            <a:endParaRPr lang="en-US" sz="1300" dirty="0"/>
+          </a:p>
+        </p:txBody>
+      </p:sp>
+      <p:sp>
+        <p:nvSpPr>
+          <p:cNvPr id="27" name="Text 25"/>
+          <p:cNvSpPr/>
+          <p:nvPr/>
+        </p:nvSpPr>
+        <p:spPr>
+          <a:xfrm>
+            <a:off x="6998818" y="2569464"/>
+            <a:ext cx="1581912" cy="201168"/>
+          </a:xfrm>
+          <a:prstGeom prst="rect">
+            <a:avLst/>
+          </a:prstGeom>
+          <a:noFill/>
+          <a:ln/>
+        </p:spPr>
+        <p:txBody>
+          <a:bodyPr wrap="square" lIns="0" tIns="0" rIns="0" bIns="0" rtlCol="0" anchor="t"/>
+          <a:lstStyle/>
+          <a:p>
+            <a:pPr algn="ctr" indent="0" marL="0">
+              <a:buNone/>
+            </a:pPr>
+            <a:r>
+              <a:rPr lang="en-US" sz="850" dirty="0">
+                <a:solidFill>
+                  <a:srgbClr val="475569"/>
+                </a:solidFill>
+                <a:latin typeface="Calibri" pitchFamily="34" charset="0"/>
+                <a:ea typeface="Calibri" pitchFamily="34" charset="-122"/>
+                <a:cs typeface="Calibri" pitchFamily="34" charset="-120"/>
+              </a:rPr>
+              <a:t>act or process of</a:t>
+            </a:r>
+            <a:endParaRPr lang="en-US" sz="850" dirty="0"/>
+          </a:p>
+        </p:txBody>
+      </p:sp>
+      <p:sp>
+        <p:nvSpPr>
+          <p:cNvPr id="28" name="Shape 26"/>
           <p:cNvSpPr/>
           <p:nvPr/>
         </p:nvSpPr>
@@ -22403,7 +23971,7 @@
       </p:sp>
       <p:sp>
         <p:nvSpPr>
-          <p:cNvPr id="23" name="Text 21"/>
+          <p:cNvPr id="29" name="Text 27"/>
           <p:cNvSpPr/>
           <p:nvPr/>
         </p:nvSpPr>
@@ -22442,7 +24010,7 @@
       </p:sp>
       <p:sp>
         <p:nvSpPr>
-          <p:cNvPr id="24" name="Shape 22"/>
+          <p:cNvPr id="30" name="Shape 28"/>
           <p:cNvSpPr/>
           <p:nvPr/>
         </p:nvSpPr>
@@ -22469,14 +24037,14 @@
       </p:sp>
       <p:sp>
         <p:nvSpPr>
-          <p:cNvPr id="25" name="Shape 23"/>
-          <p:cNvSpPr/>
-          <p:nvPr/>
-        </p:nvSpPr>
-        <p:spPr>
-          <a:xfrm>
-            <a:off x="2313432" y="3364992"/>
-            <a:ext cx="1645920" cy="475488"/>
+          <p:cNvPr id="31" name="Shape 29"/>
+          <p:cNvSpPr/>
+          <p:nvPr/>
+        </p:nvSpPr>
+        <p:spPr>
+          <a:xfrm>
+            <a:off x="1978152" y="3364992"/>
+            <a:ext cx="1225296" cy="475488"/>
           </a:xfrm>
           <a:prstGeom prst="rect">
             <a:avLst>
@@ -22496,14 +24064,14 @@
       </p:sp>
       <p:sp>
         <p:nvSpPr>
-          <p:cNvPr id="26" name="Text 24"/>
-          <p:cNvSpPr/>
-          <p:nvPr/>
-        </p:nvSpPr>
-        <p:spPr>
-          <a:xfrm>
-            <a:off x="2313432" y="3364992"/>
-            <a:ext cx="1645920" cy="475488"/>
+          <p:cNvPr id="32" name="Text 30"/>
+          <p:cNvSpPr/>
+          <p:nvPr/>
+        </p:nvSpPr>
+        <p:spPr>
+          <a:xfrm>
+            <a:off x="1978152" y="3364992"/>
+            <a:ext cx="1225296" cy="475488"/>
           </a:xfrm>
           <a:prstGeom prst="rect">
             <a:avLst/>
@@ -22527,7 +24095,7 @@
                 <a:ea typeface="Trebuchet MS" pitchFamily="34" charset="-122"/>
                 <a:cs typeface="Trebuchet MS" pitchFamily="34" charset="-120"/>
               </a:rPr>
-              <a:t>trans</a:t>
+              <a:t>re</a:t>
             </a:r>
             <a:endParaRPr lang="en-US" sz="1400" dirty="0"/>
           </a:p>
@@ -22535,14 +24103,14 @@
       </p:sp>
       <p:sp>
         <p:nvSpPr>
-          <p:cNvPr id="27" name="Text 25"/>
-          <p:cNvSpPr/>
-          <p:nvPr/>
-        </p:nvSpPr>
-        <p:spPr>
-          <a:xfrm>
-            <a:off x="3959352" y="3364992"/>
-            <a:ext cx="411480" cy="475488"/>
+          <p:cNvPr id="33" name="Text 31"/>
+          <p:cNvSpPr/>
+          <p:nvPr/>
+        </p:nvSpPr>
+        <p:spPr>
+          <a:xfrm>
+            <a:off x="3203448" y="3364992"/>
+            <a:ext cx="76200" cy="475488"/>
           </a:xfrm>
           <a:prstGeom prst="rect">
             <a:avLst/>
@@ -22574,14 +24142,14 @@
       </p:sp>
       <p:sp>
         <p:nvSpPr>
-          <p:cNvPr id="28" name="Shape 26"/>
-          <p:cNvSpPr/>
-          <p:nvPr/>
-        </p:nvSpPr>
-        <p:spPr>
-          <a:xfrm>
-            <a:off x="4370832" y="3364992"/>
-            <a:ext cx="1645920" cy="475488"/>
+          <p:cNvPr id="34" name="Shape 32"/>
+          <p:cNvSpPr/>
+          <p:nvPr/>
+        </p:nvSpPr>
+        <p:spPr>
+          <a:xfrm>
+            <a:off x="3279648" y="3364992"/>
+            <a:ext cx="1225296" cy="475488"/>
           </a:xfrm>
           <a:prstGeom prst="rect">
             <a:avLst>
@@ -22601,14 +24169,14 @@
       </p:sp>
       <p:sp>
         <p:nvSpPr>
-          <p:cNvPr id="29" name="Text 27"/>
-          <p:cNvSpPr/>
-          <p:nvPr/>
-        </p:nvSpPr>
-        <p:spPr>
-          <a:xfrm>
-            <a:off x="4370832" y="3364992"/>
-            <a:ext cx="1645920" cy="475488"/>
+          <p:cNvPr id="35" name="Text 33"/>
+          <p:cNvSpPr/>
+          <p:nvPr/>
+        </p:nvSpPr>
+        <p:spPr>
+          <a:xfrm>
+            <a:off x="3279648" y="3364992"/>
+            <a:ext cx="1225296" cy="475488"/>
           </a:xfrm>
           <a:prstGeom prst="rect">
             <a:avLst/>
@@ -22632,7 +24200,7 @@
                 <a:ea typeface="Trebuchet MS" pitchFamily="34" charset="-122"/>
                 <a:cs typeface="Trebuchet MS" pitchFamily="34" charset="-120"/>
               </a:rPr>
-              <a:t>por</a:t>
+              <a:t>trans</a:t>
             </a:r>
             <a:endParaRPr lang="en-US" sz="1400" dirty="0"/>
           </a:p>
@@ -22640,14 +24208,14 @@
       </p:sp>
       <p:sp>
         <p:nvSpPr>
-          <p:cNvPr id="30" name="Text 28"/>
-          <p:cNvSpPr/>
-          <p:nvPr/>
-        </p:nvSpPr>
-        <p:spPr>
-          <a:xfrm>
-            <a:off x="6016752" y="3364992"/>
-            <a:ext cx="411480" cy="475488"/>
+          <p:cNvPr id="36" name="Text 34"/>
+          <p:cNvSpPr/>
+          <p:nvPr/>
+        </p:nvSpPr>
+        <p:spPr>
+          <a:xfrm>
+            <a:off x="4504944" y="3364992"/>
+            <a:ext cx="76200" cy="475488"/>
           </a:xfrm>
           <a:prstGeom prst="rect">
             <a:avLst/>
@@ -22679,14 +24247,14 @@
       </p:sp>
       <p:sp>
         <p:nvSpPr>
-          <p:cNvPr id="31" name="Shape 29"/>
-          <p:cNvSpPr/>
-          <p:nvPr/>
-        </p:nvSpPr>
-        <p:spPr>
-          <a:xfrm>
-            <a:off x="6428232" y="3364992"/>
-            <a:ext cx="1645920" cy="475488"/>
+          <p:cNvPr id="37" name="Shape 35"/>
+          <p:cNvSpPr/>
+          <p:nvPr/>
+        </p:nvSpPr>
+        <p:spPr>
+          <a:xfrm>
+            <a:off x="4581144" y="3364992"/>
+            <a:ext cx="1225296" cy="475488"/>
           </a:xfrm>
           <a:prstGeom prst="rect">
             <a:avLst>
@@ -22706,14 +24274,14 @@
       </p:sp>
       <p:sp>
         <p:nvSpPr>
-          <p:cNvPr id="32" name="Text 30"/>
-          <p:cNvSpPr/>
-          <p:nvPr/>
-        </p:nvSpPr>
-        <p:spPr>
-          <a:xfrm>
-            <a:off x="6428232" y="3364992"/>
-            <a:ext cx="1645920" cy="475488"/>
+          <p:cNvPr id="38" name="Text 36"/>
+          <p:cNvSpPr/>
+          <p:nvPr/>
+        </p:nvSpPr>
+        <p:spPr>
+          <a:xfrm>
+            <a:off x="4581144" y="3364992"/>
+            <a:ext cx="1225296" cy="475488"/>
           </a:xfrm>
           <a:prstGeom prst="rect">
             <a:avLst/>
@@ -22737,7 +24305,7 @@
                 <a:ea typeface="Trebuchet MS" pitchFamily="34" charset="-122"/>
                 <a:cs typeface="Trebuchet MS" pitchFamily="34" charset="-120"/>
               </a:rPr>
-              <a:t>ting</a:t>
+              <a:t>por</a:t>
             </a:r>
             <a:endParaRPr lang="en-US" sz="1400" dirty="0"/>
           </a:p>
@@ -22745,7 +24313,217 @@
       </p:sp>
       <p:sp>
         <p:nvSpPr>
-          <p:cNvPr id="33" name="Shape 31"/>
+          <p:cNvPr id="39" name="Text 37"/>
+          <p:cNvSpPr/>
+          <p:nvPr/>
+        </p:nvSpPr>
+        <p:spPr>
+          <a:xfrm>
+            <a:off x="5806440" y="3364992"/>
+            <a:ext cx="76200" cy="475488"/>
+          </a:xfrm>
+          <a:prstGeom prst="rect">
+            <a:avLst/>
+          </a:prstGeom>
+          <a:noFill/>
+          <a:ln/>
+        </p:spPr>
+        <p:txBody>
+          <a:bodyPr wrap="square" lIns="0" tIns="0" rIns="0" bIns="0" rtlCol="0" anchor="ctr"/>
+          <a:lstStyle/>
+          <a:p>
+            <a:pPr algn="ctr" indent="0" marL="0">
+              <a:buNone/>
+            </a:pPr>
+            <a:r>
+              <a:rPr lang="en-US" sz="1600" b="1" dirty="0">
+                <a:solidFill>
+                  <a:srgbClr val="0D9488"/>
+                </a:solidFill>
+                <a:latin typeface="Trebuchet MS" pitchFamily="34" charset="0"/>
+                <a:ea typeface="Trebuchet MS" pitchFamily="34" charset="-122"/>
+                <a:cs typeface="Trebuchet MS" pitchFamily="34" charset="-120"/>
+              </a:rPr>
+              <a:t>·</a:t>
+            </a:r>
+            <a:endParaRPr lang="en-US" sz="1600" dirty="0"/>
+          </a:p>
+        </p:txBody>
+      </p:sp>
+      <p:sp>
+        <p:nvSpPr>
+          <p:cNvPr id="40" name="Shape 38"/>
+          <p:cNvSpPr/>
+          <p:nvPr/>
+        </p:nvSpPr>
+        <p:spPr>
+          <a:xfrm>
+            <a:off x="5882640" y="3364992"/>
+            <a:ext cx="1225296" cy="475488"/>
+          </a:xfrm>
+          <a:prstGeom prst="rect">
+            <a:avLst>
+              <a:gd name="adj" fmla="val 9615"/>
+            </a:avLst>
+          </a:prstGeom>
+          <a:solidFill>
+            <a:srgbClr val="FFFFFF"/>
+          </a:solidFill>
+          <a:ln w="12700">
+            <a:solidFill>
+              <a:srgbClr val="0D9488"/>
+            </a:solidFill>
+            <a:prstDash val="solid"/>
+          </a:ln>
+        </p:spPr>
+      </p:sp>
+      <p:sp>
+        <p:nvSpPr>
+          <p:cNvPr id="41" name="Text 39"/>
+          <p:cNvSpPr/>
+          <p:nvPr/>
+        </p:nvSpPr>
+        <p:spPr>
+          <a:xfrm>
+            <a:off x="5882640" y="3364992"/>
+            <a:ext cx="1225296" cy="475488"/>
+          </a:xfrm>
+          <a:prstGeom prst="rect">
+            <a:avLst/>
+          </a:prstGeom>
+          <a:noFill/>
+          <a:ln/>
+        </p:spPr>
+        <p:txBody>
+          <a:bodyPr wrap="square" lIns="0" tIns="0" rIns="0" bIns="0" rtlCol="0" anchor="ctr"/>
+          <a:lstStyle/>
+          <a:p>
+            <a:pPr algn="ctr" indent="0" marL="0">
+              <a:buNone/>
+            </a:pPr>
+            <a:r>
+              <a:rPr lang="en-US" sz="1400" b="1" dirty="0">
+                <a:solidFill>
+                  <a:srgbClr val="0D9488"/>
+                </a:solidFill>
+                <a:latin typeface="Trebuchet MS" pitchFamily="34" charset="0"/>
+                <a:ea typeface="Trebuchet MS" pitchFamily="34" charset="-122"/>
+                <a:cs typeface="Trebuchet MS" pitchFamily="34" charset="-120"/>
+              </a:rPr>
+              <a:t>ta</a:t>
+            </a:r>
+            <a:endParaRPr lang="en-US" sz="1400" dirty="0"/>
+          </a:p>
+        </p:txBody>
+      </p:sp>
+      <p:sp>
+        <p:nvSpPr>
+          <p:cNvPr id="42" name="Text 40"/>
+          <p:cNvSpPr/>
+          <p:nvPr/>
+        </p:nvSpPr>
+        <p:spPr>
+          <a:xfrm>
+            <a:off x="7107936" y="3364992"/>
+            <a:ext cx="76200" cy="475488"/>
+          </a:xfrm>
+          <a:prstGeom prst="rect">
+            <a:avLst/>
+          </a:prstGeom>
+          <a:noFill/>
+          <a:ln/>
+        </p:spPr>
+        <p:txBody>
+          <a:bodyPr wrap="square" lIns="0" tIns="0" rIns="0" bIns="0" rtlCol="0" anchor="ctr"/>
+          <a:lstStyle/>
+          <a:p>
+            <a:pPr algn="ctr" indent="0" marL="0">
+              <a:buNone/>
+            </a:pPr>
+            <a:r>
+              <a:rPr lang="en-US" sz="1600" b="1" dirty="0">
+                <a:solidFill>
+                  <a:srgbClr val="0D9488"/>
+                </a:solidFill>
+                <a:latin typeface="Trebuchet MS" pitchFamily="34" charset="0"/>
+                <a:ea typeface="Trebuchet MS" pitchFamily="34" charset="-122"/>
+                <a:cs typeface="Trebuchet MS" pitchFamily="34" charset="-120"/>
+              </a:rPr>
+              <a:t>·</a:t>
+            </a:r>
+            <a:endParaRPr lang="en-US" sz="1600" dirty="0"/>
+          </a:p>
+        </p:txBody>
+      </p:sp>
+      <p:sp>
+        <p:nvSpPr>
+          <p:cNvPr id="43" name="Shape 41"/>
+          <p:cNvSpPr/>
+          <p:nvPr/>
+        </p:nvSpPr>
+        <p:spPr>
+          <a:xfrm>
+            <a:off x="7184136" y="3364992"/>
+            <a:ext cx="1225296" cy="475488"/>
+          </a:xfrm>
+          <a:prstGeom prst="rect">
+            <a:avLst>
+              <a:gd name="adj" fmla="val 9615"/>
+            </a:avLst>
+          </a:prstGeom>
+          <a:solidFill>
+            <a:srgbClr val="FFFFFF"/>
+          </a:solidFill>
+          <a:ln w="12700">
+            <a:solidFill>
+              <a:srgbClr val="0D9488"/>
+            </a:solidFill>
+            <a:prstDash val="solid"/>
+          </a:ln>
+        </p:spPr>
+      </p:sp>
+      <p:sp>
+        <p:nvSpPr>
+          <p:cNvPr id="44" name="Text 42"/>
+          <p:cNvSpPr/>
+          <p:nvPr/>
+        </p:nvSpPr>
+        <p:spPr>
+          <a:xfrm>
+            <a:off x="7184136" y="3364992"/>
+            <a:ext cx="1225296" cy="475488"/>
+          </a:xfrm>
+          <a:prstGeom prst="rect">
+            <a:avLst/>
+          </a:prstGeom>
+          <a:noFill/>
+          <a:ln/>
+        </p:spPr>
+        <p:txBody>
+          <a:bodyPr wrap="square" lIns="0" tIns="0" rIns="0" bIns="0" rtlCol="0" anchor="ctr"/>
+          <a:lstStyle/>
+          <a:p>
+            <a:pPr algn="ctr" indent="0" marL="0">
+              <a:buNone/>
+            </a:pPr>
+            <a:r>
+              <a:rPr lang="en-US" sz="1400" b="1" dirty="0">
+                <a:solidFill>
+                  <a:srgbClr val="0D9488"/>
+                </a:solidFill>
+                <a:latin typeface="Trebuchet MS" pitchFamily="34" charset="0"/>
+                <a:ea typeface="Trebuchet MS" pitchFamily="34" charset="-122"/>
+                <a:cs typeface="Trebuchet MS" pitchFamily="34" charset="-120"/>
+              </a:rPr>
+              <a:t>tion</a:t>
+            </a:r>
+            <a:endParaRPr lang="en-US" sz="1400" dirty="0"/>
+          </a:p>
+        </p:txBody>
+      </p:sp>
+      <p:sp>
+        <p:nvSpPr>
+          <p:cNvPr id="45" name="Shape 43"/>
           <p:cNvSpPr/>
           <p:nvPr/>
         </p:nvSpPr>
@@ -22772,7 +24550,7 @@
       </p:sp>
       <p:sp>
         <p:nvSpPr>
-          <p:cNvPr id="34" name="Text 32"/>
+          <p:cNvPr id="46" name="Text 44"/>
           <p:cNvSpPr/>
           <p:nvPr/>
         </p:nvSpPr>
@@ -22811,18 +24589,18 @@
       </p:sp>
       <p:sp>
         <p:nvSpPr>
-          <p:cNvPr id="35" name="Shape 33"/>
+          <p:cNvPr id="47" name="Shape 45"/>
           <p:cNvSpPr/>
           <p:nvPr/>
         </p:nvSpPr>
         <p:spPr>
           <a:xfrm>
             <a:off x="1874520" y="4096512"/>
-            <a:ext cx="6903720" cy="658368"/>
+            <a:ext cx="6903720" cy="804672"/>
           </a:xfrm>
           <a:prstGeom prst="rect">
             <a:avLst>
-              <a:gd name="adj" fmla="val 8333"/>
+              <a:gd name="adj" fmla="val 6818"/>
             </a:avLst>
           </a:prstGeom>
           <a:solidFill>
@@ -22838,18 +24616,18 @@
       </p:sp>
       <p:sp>
         <p:nvSpPr>
-          <p:cNvPr id="36" name="Shape 34"/>
-          <p:cNvSpPr/>
-          <p:nvPr/>
-        </p:nvSpPr>
-        <p:spPr>
-          <a:xfrm>
-            <a:off x="1951828" y="4169664"/>
-            <a:ext cx="603504" cy="475488"/>
+          <p:cNvPr id="48" name="Shape 46"/>
+          <p:cNvSpPr/>
+          <p:nvPr/>
+        </p:nvSpPr>
+        <p:spPr>
+          <a:xfrm>
+            <a:off x="1953158" y="4169664"/>
+            <a:ext cx="415399" cy="384048"/>
           </a:xfrm>
           <a:prstGeom prst="rect">
             <a:avLst>
-              <a:gd name="adj" fmla="val 7692"/>
+              <a:gd name="adj" fmla="val 9524"/>
             </a:avLst>
           </a:prstGeom>
           <a:solidFill>
@@ -22865,14 +24643,14 @@
       </p:sp>
       <p:sp>
         <p:nvSpPr>
-          <p:cNvPr id="37" name="Text 35"/>
-          <p:cNvSpPr/>
-          <p:nvPr/>
-        </p:nvSpPr>
-        <p:spPr>
-          <a:xfrm>
-            <a:off x="1951828" y="4169664"/>
-            <a:ext cx="603504" cy="475488"/>
+          <p:cNvPr id="49" name="Text 47"/>
+          <p:cNvSpPr/>
+          <p:nvPr/>
+        </p:nvSpPr>
+        <p:spPr>
+          <a:xfrm>
+            <a:off x="1953158" y="4169664"/>
+            <a:ext cx="415399" cy="384048"/>
           </a:xfrm>
           <a:prstGeom prst="rect">
             <a:avLst/>
@@ -22896,7 +24674,7 @@
                 <a:ea typeface="Trebuchet MS" pitchFamily="34" charset="-122"/>
                 <a:cs typeface="Trebuchet MS" pitchFamily="34" charset="-120"/>
               </a:rPr>
-              <a:t>t</a:t>
+              <a:t>r</a:t>
             </a:r>
             <a:endParaRPr lang="en-US" sz="900" dirty="0"/>
           </a:p>
@@ -22904,18 +24682,18 @@
       </p:sp>
       <p:sp>
         <p:nvSpPr>
-          <p:cNvPr id="38" name="Shape 36"/>
-          <p:cNvSpPr/>
-          <p:nvPr/>
-        </p:nvSpPr>
-        <p:spPr>
-          <a:xfrm>
-            <a:off x="2605209" y="4169664"/>
-            <a:ext cx="603504" cy="475488"/>
+          <p:cNvPr id="50" name="Shape 48"/>
+          <p:cNvSpPr/>
+          <p:nvPr/>
+        </p:nvSpPr>
+        <p:spPr>
+          <a:xfrm>
+            <a:off x="2419764" y="4169664"/>
+            <a:ext cx="415399" cy="384048"/>
           </a:xfrm>
           <a:prstGeom prst="rect">
             <a:avLst>
-              <a:gd name="adj" fmla="val 7692"/>
+              <a:gd name="adj" fmla="val 9524"/>
             </a:avLst>
           </a:prstGeom>
           <a:solidFill>
@@ -22931,14 +24709,14 @@
       </p:sp>
       <p:sp>
         <p:nvSpPr>
-          <p:cNvPr id="39" name="Text 37"/>
-          <p:cNvSpPr/>
-          <p:nvPr/>
-        </p:nvSpPr>
-        <p:spPr>
-          <a:xfrm>
-            <a:off x="2605209" y="4169664"/>
-            <a:ext cx="603504" cy="475488"/>
+          <p:cNvPr id="51" name="Text 49"/>
+          <p:cNvSpPr/>
+          <p:nvPr/>
+        </p:nvSpPr>
+        <p:spPr>
+          <a:xfrm>
+            <a:off x="2419764" y="4169664"/>
+            <a:ext cx="415399" cy="384048"/>
           </a:xfrm>
           <a:prstGeom prst="rect">
             <a:avLst/>
@@ -22962,7 +24740,7 @@
                 <a:ea typeface="Trebuchet MS" pitchFamily="34" charset="-122"/>
                 <a:cs typeface="Trebuchet MS" pitchFamily="34" charset="-120"/>
               </a:rPr>
-              <a:t>r</a:t>
+              <a:t>e</a:t>
             </a:r>
             <a:endParaRPr lang="en-US" sz="900" dirty="0"/>
           </a:p>
@@ -22970,18 +24748,18 @@
       </p:sp>
       <p:sp>
         <p:nvSpPr>
-          <p:cNvPr id="40" name="Shape 38"/>
-          <p:cNvSpPr/>
-          <p:nvPr/>
-        </p:nvSpPr>
-        <p:spPr>
-          <a:xfrm>
-            <a:off x="3258589" y="4169664"/>
-            <a:ext cx="603504" cy="475488"/>
+          <p:cNvPr id="52" name="Shape 50"/>
+          <p:cNvSpPr/>
+          <p:nvPr/>
+        </p:nvSpPr>
+        <p:spPr>
+          <a:xfrm>
+            <a:off x="2886369" y="4169664"/>
+            <a:ext cx="415399" cy="384048"/>
           </a:xfrm>
           <a:prstGeom prst="rect">
             <a:avLst>
-              <a:gd name="adj" fmla="val 7692"/>
+              <a:gd name="adj" fmla="val 9524"/>
             </a:avLst>
           </a:prstGeom>
           <a:solidFill>
@@ -22997,14 +24775,14 @@
       </p:sp>
       <p:sp>
         <p:nvSpPr>
-          <p:cNvPr id="41" name="Text 39"/>
-          <p:cNvSpPr/>
-          <p:nvPr/>
-        </p:nvSpPr>
-        <p:spPr>
-          <a:xfrm>
-            <a:off x="3258589" y="4169664"/>
-            <a:ext cx="603504" cy="475488"/>
+          <p:cNvPr id="53" name="Text 51"/>
+          <p:cNvSpPr/>
+          <p:nvPr/>
+        </p:nvSpPr>
+        <p:spPr>
+          <a:xfrm>
+            <a:off x="2886369" y="4169664"/>
+            <a:ext cx="415399" cy="384048"/>
           </a:xfrm>
           <a:prstGeom prst="rect">
             <a:avLst/>
@@ -23028,7 +24806,7 @@
                 <a:ea typeface="Trebuchet MS" pitchFamily="34" charset="-122"/>
                 <a:cs typeface="Trebuchet MS" pitchFamily="34" charset="-120"/>
               </a:rPr>
-              <a:t>a</a:t>
+              <a:t>t</a:t>
             </a:r>
             <a:endParaRPr lang="en-US" sz="900" dirty="0"/>
           </a:p>
@@ -23036,18 +24814,18 @@
       </p:sp>
       <p:sp>
         <p:nvSpPr>
-          <p:cNvPr id="42" name="Shape 40"/>
-          <p:cNvSpPr/>
-          <p:nvPr/>
-        </p:nvSpPr>
-        <p:spPr>
-          <a:xfrm>
-            <a:off x="3911969" y="4169664"/>
-            <a:ext cx="603504" cy="475488"/>
+          <p:cNvPr id="54" name="Shape 52"/>
+          <p:cNvSpPr/>
+          <p:nvPr/>
+        </p:nvSpPr>
+        <p:spPr>
+          <a:xfrm>
+            <a:off x="3352974" y="4169664"/>
+            <a:ext cx="415399" cy="384048"/>
           </a:xfrm>
           <a:prstGeom prst="rect">
             <a:avLst>
-              <a:gd name="adj" fmla="val 7692"/>
+              <a:gd name="adj" fmla="val 9524"/>
             </a:avLst>
           </a:prstGeom>
           <a:solidFill>
@@ -23063,14 +24841,14 @@
       </p:sp>
       <p:sp>
         <p:nvSpPr>
-          <p:cNvPr id="43" name="Text 41"/>
-          <p:cNvSpPr/>
-          <p:nvPr/>
-        </p:nvSpPr>
-        <p:spPr>
-          <a:xfrm>
-            <a:off x="3911969" y="4169664"/>
-            <a:ext cx="603504" cy="475488"/>
+          <p:cNvPr id="55" name="Text 53"/>
+          <p:cNvSpPr/>
+          <p:nvPr/>
+        </p:nvSpPr>
+        <p:spPr>
+          <a:xfrm>
+            <a:off x="3352974" y="4169664"/>
+            <a:ext cx="415399" cy="384048"/>
           </a:xfrm>
           <a:prstGeom prst="rect">
             <a:avLst/>
@@ -23094,7 +24872,7 @@
                 <a:ea typeface="Trebuchet MS" pitchFamily="34" charset="-122"/>
                 <a:cs typeface="Trebuchet MS" pitchFamily="34" charset="-120"/>
               </a:rPr>
-              <a:t>n</a:t>
+              <a:t>r</a:t>
             </a:r>
             <a:endParaRPr lang="en-US" sz="900" dirty="0"/>
           </a:p>
@@ -23102,18 +24880,18 @@
       </p:sp>
       <p:sp>
         <p:nvSpPr>
-          <p:cNvPr id="44" name="Shape 42"/>
-          <p:cNvSpPr/>
-          <p:nvPr/>
-        </p:nvSpPr>
-        <p:spPr>
-          <a:xfrm>
-            <a:off x="4565350" y="4169664"/>
-            <a:ext cx="603504" cy="475488"/>
+          <p:cNvPr id="56" name="Shape 54"/>
+          <p:cNvSpPr/>
+          <p:nvPr/>
+        </p:nvSpPr>
+        <p:spPr>
+          <a:xfrm>
+            <a:off x="3819579" y="4169664"/>
+            <a:ext cx="415399" cy="384048"/>
           </a:xfrm>
           <a:prstGeom prst="rect">
             <a:avLst>
-              <a:gd name="adj" fmla="val 7692"/>
+              <a:gd name="adj" fmla="val 9524"/>
             </a:avLst>
           </a:prstGeom>
           <a:solidFill>
@@ -23129,14 +24907,14 @@
       </p:sp>
       <p:sp>
         <p:nvSpPr>
-          <p:cNvPr id="45" name="Text 43"/>
-          <p:cNvSpPr/>
-          <p:nvPr/>
-        </p:nvSpPr>
-        <p:spPr>
-          <a:xfrm>
-            <a:off x="4565350" y="4169664"/>
-            <a:ext cx="603504" cy="475488"/>
+          <p:cNvPr id="57" name="Text 55"/>
+          <p:cNvSpPr/>
+          <p:nvPr/>
+        </p:nvSpPr>
+        <p:spPr>
+          <a:xfrm>
+            <a:off x="3819579" y="4169664"/>
+            <a:ext cx="415399" cy="384048"/>
           </a:xfrm>
           <a:prstGeom prst="rect">
             <a:avLst/>
@@ -23160,7 +24938,7 @@
                 <a:ea typeface="Trebuchet MS" pitchFamily="34" charset="-122"/>
                 <a:cs typeface="Trebuchet MS" pitchFamily="34" charset="-120"/>
               </a:rPr>
-              <a:t>s</a:t>
+              <a:t>a</a:t>
             </a:r>
             <a:endParaRPr lang="en-US" sz="900" dirty="0"/>
           </a:p>
@@ -23168,18 +24946,18 @@
       </p:sp>
       <p:sp>
         <p:nvSpPr>
-          <p:cNvPr id="46" name="Shape 44"/>
-          <p:cNvSpPr/>
-          <p:nvPr/>
-        </p:nvSpPr>
-        <p:spPr>
-          <a:xfrm>
-            <a:off x="5218730" y="4169664"/>
-            <a:ext cx="603504" cy="475488"/>
+          <p:cNvPr id="58" name="Shape 56"/>
+          <p:cNvSpPr/>
+          <p:nvPr/>
+        </p:nvSpPr>
+        <p:spPr>
+          <a:xfrm>
+            <a:off x="4286185" y="4169664"/>
+            <a:ext cx="415399" cy="384048"/>
           </a:xfrm>
           <a:prstGeom prst="rect">
             <a:avLst>
-              <a:gd name="adj" fmla="val 7692"/>
+              <a:gd name="adj" fmla="val 9524"/>
             </a:avLst>
           </a:prstGeom>
           <a:solidFill>
@@ -23195,14 +24973,14 @@
       </p:sp>
       <p:sp>
         <p:nvSpPr>
-          <p:cNvPr id="47" name="Text 45"/>
-          <p:cNvSpPr/>
-          <p:nvPr/>
-        </p:nvSpPr>
-        <p:spPr>
-          <a:xfrm>
-            <a:off x="5218730" y="4169664"/>
-            <a:ext cx="603504" cy="475488"/>
+          <p:cNvPr id="59" name="Text 57"/>
+          <p:cNvSpPr/>
+          <p:nvPr/>
+        </p:nvSpPr>
+        <p:spPr>
+          <a:xfrm>
+            <a:off x="4286185" y="4169664"/>
+            <a:ext cx="415399" cy="384048"/>
           </a:xfrm>
           <a:prstGeom prst="rect">
             <a:avLst/>
@@ -23226,7 +25004,7 @@
                 <a:ea typeface="Trebuchet MS" pitchFamily="34" charset="-122"/>
                 <a:cs typeface="Trebuchet MS" pitchFamily="34" charset="-120"/>
               </a:rPr>
-              <a:t>p</a:t>
+              <a:t>n</a:t>
             </a:r>
             <a:endParaRPr lang="en-US" sz="900" dirty="0"/>
           </a:p>
@@ -23234,18 +25012,18 @@
       </p:sp>
       <p:sp>
         <p:nvSpPr>
-          <p:cNvPr id="48" name="Shape 46"/>
-          <p:cNvSpPr/>
-          <p:nvPr/>
-        </p:nvSpPr>
-        <p:spPr>
-          <a:xfrm>
-            <a:off x="5872111" y="4169664"/>
-            <a:ext cx="603504" cy="475488"/>
+          <p:cNvPr id="60" name="Shape 58"/>
+          <p:cNvSpPr/>
+          <p:nvPr/>
+        </p:nvSpPr>
+        <p:spPr>
+          <a:xfrm>
+            <a:off x="4752790" y="4169664"/>
+            <a:ext cx="415399" cy="384048"/>
           </a:xfrm>
           <a:prstGeom prst="rect">
             <a:avLst>
-              <a:gd name="adj" fmla="val 7692"/>
+              <a:gd name="adj" fmla="val 9524"/>
             </a:avLst>
           </a:prstGeom>
           <a:solidFill>
@@ -23261,14 +25039,14 @@
       </p:sp>
       <p:sp>
         <p:nvSpPr>
-          <p:cNvPr id="49" name="Text 47"/>
-          <p:cNvSpPr/>
-          <p:nvPr/>
-        </p:nvSpPr>
-        <p:spPr>
-          <a:xfrm>
-            <a:off x="5872111" y="4169664"/>
-            <a:ext cx="603504" cy="475488"/>
+          <p:cNvPr id="61" name="Text 59"/>
+          <p:cNvSpPr/>
+          <p:nvPr/>
+        </p:nvSpPr>
+        <p:spPr>
+          <a:xfrm>
+            <a:off x="4752790" y="4169664"/>
+            <a:ext cx="415399" cy="384048"/>
           </a:xfrm>
           <a:prstGeom prst="rect">
             <a:avLst/>
@@ -23292,7 +25070,7 @@
                 <a:ea typeface="Trebuchet MS" pitchFamily="34" charset="-122"/>
                 <a:cs typeface="Trebuchet MS" pitchFamily="34" charset="-120"/>
               </a:rPr>
-              <a:t>or</a:t>
+              <a:t>s</a:t>
             </a:r>
             <a:endParaRPr lang="en-US" sz="900" dirty="0"/>
           </a:p>
@@ -23300,18 +25078,18 @@
       </p:sp>
       <p:sp>
         <p:nvSpPr>
-          <p:cNvPr id="50" name="Shape 48"/>
-          <p:cNvSpPr/>
-          <p:nvPr/>
-        </p:nvSpPr>
-        <p:spPr>
-          <a:xfrm>
-            <a:off x="6525491" y="4169664"/>
-            <a:ext cx="603504" cy="475488"/>
+          <p:cNvPr id="62" name="Shape 60"/>
+          <p:cNvSpPr/>
+          <p:nvPr/>
+        </p:nvSpPr>
+        <p:spPr>
+          <a:xfrm>
+            <a:off x="5219395" y="4169664"/>
+            <a:ext cx="415399" cy="384048"/>
           </a:xfrm>
           <a:prstGeom prst="rect">
             <a:avLst>
-              <a:gd name="adj" fmla="val 7692"/>
+              <a:gd name="adj" fmla="val 9524"/>
             </a:avLst>
           </a:prstGeom>
           <a:solidFill>
@@ -23327,14 +25105,14 @@
       </p:sp>
       <p:sp>
         <p:nvSpPr>
-          <p:cNvPr id="51" name="Text 49"/>
-          <p:cNvSpPr/>
-          <p:nvPr/>
-        </p:nvSpPr>
-        <p:spPr>
-          <a:xfrm>
-            <a:off x="6525491" y="4169664"/>
-            <a:ext cx="603504" cy="475488"/>
+          <p:cNvPr id="63" name="Text 61"/>
+          <p:cNvSpPr/>
+          <p:nvPr/>
+        </p:nvSpPr>
+        <p:spPr>
+          <a:xfrm>
+            <a:off x="5219395" y="4169664"/>
+            <a:ext cx="415399" cy="384048"/>
           </a:xfrm>
           <a:prstGeom prst="rect">
             <a:avLst/>
@@ -23358,7 +25136,7 @@
                 <a:ea typeface="Trebuchet MS" pitchFamily="34" charset="-122"/>
                 <a:cs typeface="Trebuchet MS" pitchFamily="34" charset="-120"/>
               </a:rPr>
-              <a:t>t</a:t>
+              <a:t>p</a:t>
             </a:r>
             <a:endParaRPr lang="en-US" sz="900" dirty="0"/>
           </a:p>
@@ -23366,18 +25144,18 @@
       </p:sp>
       <p:sp>
         <p:nvSpPr>
-          <p:cNvPr id="52" name="Shape 50"/>
-          <p:cNvSpPr/>
-          <p:nvPr/>
-        </p:nvSpPr>
-        <p:spPr>
-          <a:xfrm>
-            <a:off x="7178871" y="4169664"/>
-            <a:ext cx="603504" cy="475488"/>
+          <p:cNvPr id="64" name="Shape 62"/>
+          <p:cNvSpPr/>
+          <p:nvPr/>
+        </p:nvSpPr>
+        <p:spPr>
+          <a:xfrm>
+            <a:off x="5686000" y="4169664"/>
+            <a:ext cx="415399" cy="384048"/>
           </a:xfrm>
           <a:prstGeom prst="rect">
             <a:avLst>
-              <a:gd name="adj" fmla="val 7692"/>
+              <a:gd name="adj" fmla="val 9524"/>
             </a:avLst>
           </a:prstGeom>
           <a:solidFill>
@@ -23393,14 +25171,14 @@
       </p:sp>
       <p:sp>
         <p:nvSpPr>
-          <p:cNvPr id="53" name="Text 51"/>
-          <p:cNvSpPr/>
-          <p:nvPr/>
-        </p:nvSpPr>
-        <p:spPr>
-          <a:xfrm>
-            <a:off x="7178871" y="4169664"/>
-            <a:ext cx="603504" cy="475488"/>
+          <p:cNvPr id="65" name="Text 63"/>
+          <p:cNvSpPr/>
+          <p:nvPr/>
+        </p:nvSpPr>
+        <p:spPr>
+          <a:xfrm>
+            <a:off x="5686000" y="4169664"/>
+            <a:ext cx="415399" cy="384048"/>
           </a:xfrm>
           <a:prstGeom prst="rect">
             <a:avLst/>
@@ -23424,7 +25202,7 @@
                 <a:ea typeface="Trebuchet MS" pitchFamily="34" charset="-122"/>
                 <a:cs typeface="Trebuchet MS" pitchFamily="34" charset="-120"/>
               </a:rPr>
-              <a:t>i</a:t>
+              <a:t>or</a:t>
             </a:r>
             <a:endParaRPr lang="en-US" sz="900" dirty="0"/>
           </a:p>
@@ -23432,18 +25210,18 @@
       </p:sp>
       <p:sp>
         <p:nvSpPr>
-          <p:cNvPr id="54" name="Shape 52"/>
-          <p:cNvSpPr/>
-          <p:nvPr/>
-        </p:nvSpPr>
-        <p:spPr>
-          <a:xfrm>
-            <a:off x="7832252" y="4169664"/>
-            <a:ext cx="603504" cy="475488"/>
+          <p:cNvPr id="66" name="Shape 64"/>
+          <p:cNvSpPr/>
+          <p:nvPr/>
+        </p:nvSpPr>
+        <p:spPr>
+          <a:xfrm>
+            <a:off x="6152606" y="4169664"/>
+            <a:ext cx="415399" cy="384048"/>
           </a:xfrm>
           <a:prstGeom prst="rect">
             <a:avLst>
-              <a:gd name="adj" fmla="val 7692"/>
+              <a:gd name="adj" fmla="val 9524"/>
             </a:avLst>
           </a:prstGeom>
           <a:solidFill>
@@ -23459,14 +25237,14 @@
       </p:sp>
       <p:sp>
         <p:nvSpPr>
-          <p:cNvPr id="55" name="Text 53"/>
-          <p:cNvSpPr/>
-          <p:nvPr/>
-        </p:nvSpPr>
-        <p:spPr>
-          <a:xfrm>
-            <a:off x="7832252" y="4169664"/>
-            <a:ext cx="603504" cy="475488"/>
+          <p:cNvPr id="67" name="Text 65"/>
+          <p:cNvSpPr/>
+          <p:nvPr/>
+        </p:nvSpPr>
+        <p:spPr>
+          <a:xfrm>
+            <a:off x="6152606" y="4169664"/>
+            <a:ext cx="415399" cy="384048"/>
           </a:xfrm>
           <a:prstGeom prst="rect">
             <a:avLst/>
@@ -23490,7 +25268,310 @@
                 <a:ea typeface="Trebuchet MS" pitchFamily="34" charset="-122"/>
                 <a:cs typeface="Trebuchet MS" pitchFamily="34" charset="-120"/>
               </a:rPr>
-              <a:t>ng</a:t>
+              <a:t>t</a:t>
+            </a:r>
+            <a:endParaRPr lang="en-US" sz="900" dirty="0"/>
+          </a:p>
+        </p:txBody>
+      </p:sp>
+      <p:sp>
+        <p:nvSpPr>
+          <p:cNvPr id="68" name="Shape 66"/>
+          <p:cNvSpPr/>
+          <p:nvPr/>
+        </p:nvSpPr>
+        <p:spPr>
+          <a:xfrm>
+            <a:off x="6619211" y="4169664"/>
+            <a:ext cx="415399" cy="384048"/>
+          </a:xfrm>
+          <a:prstGeom prst="rect">
+            <a:avLst>
+              <a:gd name="adj" fmla="val 9524"/>
+            </a:avLst>
+          </a:prstGeom>
+          <a:solidFill>
+            <a:srgbClr val="FFFFFF"/>
+          </a:solidFill>
+          <a:ln w="12700">
+            <a:solidFill>
+              <a:srgbClr val="DB2777"/>
+            </a:solidFill>
+            <a:prstDash val="solid"/>
+          </a:ln>
+        </p:spPr>
+      </p:sp>
+      <p:sp>
+        <p:nvSpPr>
+          <p:cNvPr id="69" name="Text 67"/>
+          <p:cNvSpPr/>
+          <p:nvPr/>
+        </p:nvSpPr>
+        <p:spPr>
+          <a:xfrm>
+            <a:off x="6619211" y="4169664"/>
+            <a:ext cx="415399" cy="384048"/>
+          </a:xfrm>
+          <a:prstGeom prst="rect">
+            <a:avLst/>
+          </a:prstGeom>
+          <a:noFill/>
+          <a:ln/>
+        </p:spPr>
+        <p:txBody>
+          <a:bodyPr wrap="square" lIns="0" tIns="0" rIns="0" bIns="0" rtlCol="0" anchor="ctr"/>
+          <a:lstStyle/>
+          <a:p>
+            <a:pPr algn="ctr" indent="0" marL="0">
+              <a:buNone/>
+            </a:pPr>
+            <a:r>
+              <a:rPr lang="en-US" sz="900" b="1" dirty="0">
+                <a:solidFill>
+                  <a:srgbClr val="9D174D"/>
+                </a:solidFill>
+                <a:latin typeface="Trebuchet MS" pitchFamily="34" charset="0"/>
+                <a:ea typeface="Trebuchet MS" pitchFamily="34" charset="-122"/>
+                <a:cs typeface="Trebuchet MS" pitchFamily="34" charset="-120"/>
+              </a:rPr>
+              <a:t>a</a:t>
+            </a:r>
+            <a:endParaRPr lang="en-US" sz="900" dirty="0"/>
+          </a:p>
+        </p:txBody>
+      </p:sp>
+      <p:sp>
+        <p:nvSpPr>
+          <p:cNvPr id="70" name="Shape 68"/>
+          <p:cNvSpPr/>
+          <p:nvPr/>
+        </p:nvSpPr>
+        <p:spPr>
+          <a:xfrm>
+            <a:off x="7085816" y="4169664"/>
+            <a:ext cx="415399" cy="384048"/>
+          </a:xfrm>
+          <a:prstGeom prst="rect">
+            <a:avLst>
+              <a:gd name="adj" fmla="val 9524"/>
+            </a:avLst>
+          </a:prstGeom>
+          <a:solidFill>
+            <a:srgbClr val="FFFFFF"/>
+          </a:solidFill>
+          <a:ln w="12700">
+            <a:solidFill>
+              <a:srgbClr val="DB2777"/>
+            </a:solidFill>
+            <a:prstDash val="solid"/>
+          </a:ln>
+        </p:spPr>
+      </p:sp>
+      <p:sp>
+        <p:nvSpPr>
+          <p:cNvPr id="71" name="Text 69"/>
+          <p:cNvSpPr/>
+          <p:nvPr/>
+        </p:nvSpPr>
+        <p:spPr>
+          <a:xfrm>
+            <a:off x="7085816" y="4169664"/>
+            <a:ext cx="415399" cy="384048"/>
+          </a:xfrm>
+          <a:prstGeom prst="rect">
+            <a:avLst/>
+          </a:prstGeom>
+          <a:noFill/>
+          <a:ln/>
+        </p:spPr>
+        <p:txBody>
+          <a:bodyPr wrap="square" lIns="0" tIns="0" rIns="0" bIns="0" rtlCol="0" anchor="ctr"/>
+          <a:lstStyle/>
+          <a:p>
+            <a:pPr algn="ctr" indent="0" marL="0">
+              <a:buNone/>
+            </a:pPr>
+            <a:r>
+              <a:rPr lang="en-US" sz="900" b="1" dirty="0">
+                <a:solidFill>
+                  <a:srgbClr val="9D174D"/>
+                </a:solidFill>
+                <a:latin typeface="Trebuchet MS" pitchFamily="34" charset="0"/>
+                <a:ea typeface="Trebuchet MS" pitchFamily="34" charset="-122"/>
+                <a:cs typeface="Trebuchet MS" pitchFamily="34" charset="-120"/>
+              </a:rPr>
+              <a:t>t</a:t>
+            </a:r>
+            <a:endParaRPr lang="en-US" sz="900" dirty="0"/>
+          </a:p>
+        </p:txBody>
+      </p:sp>
+      <p:sp>
+        <p:nvSpPr>
+          <p:cNvPr id="72" name="Text 70"/>
+          <p:cNvSpPr/>
+          <p:nvPr/>
+        </p:nvSpPr>
+        <p:spPr>
+          <a:xfrm>
+            <a:off x="7085816" y="4572000"/>
+            <a:ext cx="415399" cy="219456"/>
+          </a:xfrm>
+          <a:prstGeom prst="rect">
+            <a:avLst/>
+          </a:prstGeom>
+          <a:noFill/>
+          <a:ln/>
+        </p:spPr>
+        <p:txBody>
+          <a:bodyPr wrap="square" lIns="0" tIns="0" rIns="0" bIns="0" rtlCol="0" anchor="t"/>
+          <a:lstStyle/>
+          <a:p>
+            <a:pPr algn="ctr" indent="0" marL="0">
+              <a:buNone/>
+            </a:pPr>
+            <a:r>
+              <a:rPr lang="en-US" sz="750" i="1" dirty="0">
+                <a:solidFill>
+                  <a:srgbClr val="94A3B8"/>
+                </a:solidFill>
+                <a:latin typeface="Calibri" pitchFamily="34" charset="0"/>
+                <a:ea typeface="Calibri" pitchFamily="34" charset="-122"/>
+                <a:cs typeface="Calibri" pitchFamily="34" charset="-120"/>
+              </a:rPr>
+              <a:t>/sh/</a:t>
+            </a:r>
+            <a:endParaRPr lang="en-US" sz="750" dirty="0"/>
+          </a:p>
+        </p:txBody>
+      </p:sp>
+      <p:sp>
+        <p:nvSpPr>
+          <p:cNvPr id="73" name="Shape 71"/>
+          <p:cNvSpPr/>
+          <p:nvPr/>
+        </p:nvSpPr>
+        <p:spPr>
+          <a:xfrm>
+            <a:off x="7552421" y="4169664"/>
+            <a:ext cx="415399" cy="384048"/>
+          </a:xfrm>
+          <a:prstGeom prst="rect">
+            <a:avLst>
+              <a:gd name="adj" fmla="val 9524"/>
+            </a:avLst>
+          </a:prstGeom>
+          <a:solidFill>
+            <a:srgbClr val="FFFFFF"/>
+          </a:solidFill>
+          <a:ln w="12700">
+            <a:solidFill>
+              <a:srgbClr val="DB2777"/>
+            </a:solidFill>
+            <a:prstDash val="solid"/>
+          </a:ln>
+        </p:spPr>
+      </p:sp>
+      <p:sp>
+        <p:nvSpPr>
+          <p:cNvPr id="74" name="Text 72"/>
+          <p:cNvSpPr/>
+          <p:nvPr/>
+        </p:nvSpPr>
+        <p:spPr>
+          <a:xfrm>
+            <a:off x="7552421" y="4169664"/>
+            <a:ext cx="415399" cy="384048"/>
+          </a:xfrm>
+          <a:prstGeom prst="rect">
+            <a:avLst/>
+          </a:prstGeom>
+          <a:noFill/>
+          <a:ln/>
+        </p:spPr>
+        <p:txBody>
+          <a:bodyPr wrap="square" lIns="0" tIns="0" rIns="0" bIns="0" rtlCol="0" anchor="ctr"/>
+          <a:lstStyle/>
+          <a:p>
+            <a:pPr algn="ctr" indent="0" marL="0">
+              <a:buNone/>
+            </a:pPr>
+            <a:r>
+              <a:rPr lang="en-US" sz="900" b="1" dirty="0">
+                <a:solidFill>
+                  <a:srgbClr val="9D174D"/>
+                </a:solidFill>
+                <a:latin typeface="Trebuchet MS" pitchFamily="34" charset="0"/>
+                <a:ea typeface="Trebuchet MS" pitchFamily="34" charset="-122"/>
+                <a:cs typeface="Trebuchet MS" pitchFamily="34" charset="-120"/>
+              </a:rPr>
+              <a:t>io</a:t>
+            </a:r>
+            <a:endParaRPr lang="en-US" sz="900" dirty="0"/>
+          </a:p>
+        </p:txBody>
+      </p:sp>
+      <p:sp>
+        <p:nvSpPr>
+          <p:cNvPr id="75" name="Shape 73"/>
+          <p:cNvSpPr/>
+          <p:nvPr/>
+        </p:nvSpPr>
+        <p:spPr>
+          <a:xfrm>
+            <a:off x="8019027" y="4169664"/>
+            <a:ext cx="415399" cy="384048"/>
+          </a:xfrm>
+          <a:prstGeom prst="rect">
+            <a:avLst>
+              <a:gd name="adj" fmla="val 9524"/>
+            </a:avLst>
+          </a:prstGeom>
+          <a:solidFill>
+            <a:srgbClr val="FFFFFF"/>
+          </a:solidFill>
+          <a:ln w="12700">
+            <a:solidFill>
+              <a:srgbClr val="DB2777"/>
+            </a:solidFill>
+            <a:prstDash val="solid"/>
+          </a:ln>
+        </p:spPr>
+      </p:sp>
+      <p:sp>
+        <p:nvSpPr>
+          <p:cNvPr id="76" name="Text 74"/>
+          <p:cNvSpPr/>
+          <p:nvPr/>
+        </p:nvSpPr>
+        <p:spPr>
+          <a:xfrm>
+            <a:off x="8019027" y="4169664"/>
+            <a:ext cx="415399" cy="384048"/>
+          </a:xfrm>
+          <a:prstGeom prst="rect">
+            <a:avLst/>
+          </a:prstGeom>
+          <a:noFill/>
+          <a:ln/>
+        </p:spPr>
+        <p:txBody>
+          <a:bodyPr wrap="square" lIns="0" tIns="0" rIns="0" bIns="0" rtlCol="0" anchor="ctr"/>
+          <a:lstStyle/>
+          <a:p>
+            <a:pPr algn="ctr" indent="0" marL="0">
+              <a:buNone/>
+            </a:pPr>
+            <a:r>
+              <a:rPr lang="en-US" sz="900" b="1" dirty="0">
+                <a:solidFill>
+                  <a:srgbClr val="9D174D"/>
+                </a:solidFill>
+                <a:latin typeface="Trebuchet MS" pitchFamily="34" charset="0"/>
+                <a:ea typeface="Trebuchet MS" pitchFamily="34" charset="-122"/>
+                <a:cs typeface="Trebuchet MS" pitchFamily="34" charset="-120"/>
+              </a:rPr>
+              <a:t>n</a:t>
             </a:r>
             <a:endParaRPr lang="en-US" sz="900" dirty="0"/>
           </a:p>
@@ -23782,7 +25863,7 @@
                 <a:ea typeface="Calibri" pitchFamily="34" charset="-122"/>
                 <a:cs typeface="Calibri" pitchFamily="34" charset="-120"/>
               </a:rPr>
-              <a:t>Word Labs  •  wordlabs.app  •  Root: 'transport' = carry across or over</a:t>
+              <a:t>Word Labs  •  wordlabs.app  •  Root: 'transport' = carry across or beyond</a:t>
             </a:r>
             <a:endParaRPr lang="en-US" sz="800" dirty="0"/>
           </a:p>
@@ -23921,7 +26002,7 @@
                 <a:ea typeface="Trebuchet MS" pitchFamily="34" charset="-122"/>
                 <a:cs typeface="Trebuchet MS" pitchFamily="34" charset="-120"/>
               </a:rPr>
-              <a:t>transporter</a:t>
+              <a:t>transported</a:t>
             </a:r>
             <a:endParaRPr lang="en-US" sz="2800" dirty="0"/>
           </a:p>
@@ -24609,7 +26690,7 @@
                 <a:ea typeface="Calibri" pitchFamily="34" charset="-122"/>
                 <a:cs typeface="Calibri" pitchFamily="34" charset="-120"/>
               </a:rPr>
-              <a:t>Word Labs  •  wordlabs.app  •  Root: 'transport' = carry across or over</a:t>
+              <a:t>Word Labs  •  wordlabs.app  •  Root: 'transport' = carry across or beyond</a:t>
             </a:r>
             <a:endParaRPr lang="en-US" sz="800" dirty="0"/>
           </a:p>
@@ -24748,7 +26829,7 @@
                 <a:ea typeface="Trebuchet MS" pitchFamily="34" charset="-122"/>
                 <a:cs typeface="Trebuchet MS" pitchFamily="34" charset="-120"/>
               </a:rPr>
-              <a:t>transporter</a:t>
+              <a:t>transported</a:t>
             </a:r>
             <a:endParaRPr lang="en-US" sz="2800" dirty="0"/>
           </a:p>
@@ -24828,7 +26909,7 @@
         </p:nvSpPr>
         <p:spPr>
           <a:xfrm>
-            <a:off x="2938272" y="2258568"/>
+            <a:off x="2221992" y="2258568"/>
             <a:ext cx="1828800" cy="292608"/>
           </a:xfrm>
           <a:prstGeom prst="rect">
@@ -24837,11 +26918,11 @@
             </a:avLst>
           </a:prstGeom>
           <a:solidFill>
-            <a:srgbClr val="CCFBF1"/>
+            <a:srgbClr val="DDD6FE"/>
           </a:solidFill>
           <a:ln w="19050">
             <a:solidFill>
-              <a:srgbClr val="0D9488"/>
+              <a:srgbClr val="7C3AED"/>
             </a:solidFill>
             <a:prstDash val="solid"/>
           </a:ln>
@@ -24862,7 +26943,7 @@
         </p:nvSpPr>
         <p:spPr>
           <a:xfrm>
-            <a:off x="2938272" y="2258568"/>
+            <a:off x="2221992" y="2258568"/>
             <a:ext cx="1828800" cy="292608"/>
           </a:xfrm>
           <a:prstGeom prst="rect">
@@ -24881,13 +26962,13 @@
             <a:r>
               <a:rPr lang="en-US" sz="1300" b="1" dirty="0">
                 <a:solidFill>
-                  <a:srgbClr val="0F766E"/>
+                  <a:srgbClr val="4C1D95"/>
                 </a:solidFill>
                 <a:latin typeface="Trebuchet MS" pitchFamily="34" charset="0"/>
                 <a:ea typeface="Trebuchet MS" pitchFamily="34" charset="-122"/>
                 <a:cs typeface="Trebuchet MS" pitchFamily="34" charset="-120"/>
               </a:rPr>
-              <a:t>transport</a:t>
+              <a:t>trans</a:t>
             </a:r>
             <a:endParaRPr lang="en-US" sz="1300" dirty="0"/>
           </a:p>
@@ -24901,7 +26982,7 @@
         </p:nvSpPr>
         <p:spPr>
           <a:xfrm>
-            <a:off x="2938272" y="2569464"/>
+            <a:off x="2221992" y="2569464"/>
             <a:ext cx="1828800" cy="201168"/>
           </a:xfrm>
           <a:prstGeom prst="rect">
@@ -24926,7 +27007,7 @@
                 <a:ea typeface="Calibri" pitchFamily="34" charset="-122"/>
                 <a:cs typeface="Calibri" pitchFamily="34" charset="-120"/>
               </a:rPr>
-              <a:t>carry across</a:t>
+              <a:t>across, beyond</a:t>
             </a:r>
             <a:endParaRPr lang="en-US" sz="850" dirty="0"/>
           </a:p>
@@ -24940,7 +27021,7 @@
         </p:nvSpPr>
         <p:spPr>
           <a:xfrm>
-            <a:off x="5803392" y="2258568"/>
+            <a:off x="4370832" y="2258568"/>
             <a:ext cx="1828800" cy="292608"/>
           </a:xfrm>
           <a:prstGeom prst="rect">
@@ -24974,7 +27055,7 @@
         </p:nvSpPr>
         <p:spPr>
           <a:xfrm>
-            <a:off x="5803392" y="2258568"/>
+            <a:off x="4370832" y="2258568"/>
             <a:ext cx="1828800" cy="292608"/>
           </a:xfrm>
           <a:prstGeom prst="rect">
@@ -24999,7 +27080,7 @@
                 <a:ea typeface="Trebuchet MS" pitchFamily="34" charset="-122"/>
                 <a:cs typeface="Trebuchet MS" pitchFamily="34" charset="-120"/>
               </a:rPr>
-              <a:t>er</a:t>
+              <a:t>port</a:t>
             </a:r>
             <a:endParaRPr lang="en-US" sz="1300" dirty="0"/>
           </a:p>
@@ -25013,7 +27094,7 @@
         </p:nvSpPr>
         <p:spPr>
           <a:xfrm>
-            <a:off x="5803392" y="2569464"/>
+            <a:off x="4370832" y="2569464"/>
             <a:ext cx="1828800" cy="201168"/>
           </a:xfrm>
           <a:prstGeom prst="rect">
@@ -25038,7 +27119,7 @@
                 <a:ea typeface="Calibri" pitchFamily="34" charset="-122"/>
                 <a:cs typeface="Calibri" pitchFamily="34" charset="-120"/>
               </a:rPr>
-              <a:t>one who does</a:t>
+              <a:t>carry</a:t>
             </a:r>
             <a:endParaRPr lang="en-US" sz="850" dirty="0"/>
           </a:p>
@@ -25047,6 +27128,118 @@
       <p:sp>
         <p:nvSpPr>
           <p:cNvPr id="22" name="Shape 20"/>
+          <p:cNvSpPr/>
+          <p:nvPr/>
+        </p:nvSpPr>
+        <p:spPr>
+          <a:xfrm>
+            <a:off x="6519672" y="2258568"/>
+            <a:ext cx="1828800" cy="292608"/>
+          </a:xfrm>
+          <a:prstGeom prst="rect">
+            <a:avLst>
+              <a:gd name="adj" fmla="val 25000"/>
+            </a:avLst>
+          </a:prstGeom>
+          <a:solidFill>
+            <a:srgbClr val="FCE7F3"/>
+          </a:solidFill>
+          <a:ln w="19050">
+            <a:solidFill>
+              <a:srgbClr val="DB2777"/>
+            </a:solidFill>
+            <a:prstDash val="solid"/>
+          </a:ln>
+          <a:effectLst>
+            <a:outerShdw sx="100000" sy="100000" kx="0" ky="0" algn="bl" rotWithShape="0" blurRad="101600" dist="38100" dir="8100000">
+              <a:srgbClr val="000000">
+                <a:alpha val="12000"/>
+              </a:srgbClr>
+            </a:outerShdw>
+          </a:effectLst>
+        </p:spPr>
+      </p:sp>
+      <p:sp>
+        <p:nvSpPr>
+          <p:cNvPr id="23" name="Text 21"/>
+          <p:cNvSpPr/>
+          <p:nvPr/>
+        </p:nvSpPr>
+        <p:spPr>
+          <a:xfrm>
+            <a:off x="6519672" y="2258568"/>
+            <a:ext cx="1828800" cy="292608"/>
+          </a:xfrm>
+          <a:prstGeom prst="rect">
+            <a:avLst/>
+          </a:prstGeom>
+          <a:noFill/>
+          <a:ln/>
+        </p:spPr>
+        <p:txBody>
+          <a:bodyPr wrap="square" lIns="0" tIns="0" rIns="0" bIns="0" rtlCol="0" anchor="ctr"/>
+          <a:lstStyle/>
+          <a:p>
+            <a:pPr algn="ctr" indent="0" marL="0">
+              <a:buNone/>
+            </a:pPr>
+            <a:r>
+              <a:rPr lang="en-US" sz="1300" b="1" dirty="0">
+                <a:solidFill>
+                  <a:srgbClr val="9D174D"/>
+                </a:solidFill>
+                <a:latin typeface="Trebuchet MS" pitchFamily="34" charset="0"/>
+                <a:ea typeface="Trebuchet MS" pitchFamily="34" charset="-122"/>
+                <a:cs typeface="Trebuchet MS" pitchFamily="34" charset="-120"/>
+              </a:rPr>
+              <a:t>ed</a:t>
+            </a:r>
+            <a:endParaRPr lang="en-US" sz="1300" dirty="0"/>
+          </a:p>
+        </p:txBody>
+      </p:sp>
+      <p:sp>
+        <p:nvSpPr>
+          <p:cNvPr id="24" name="Text 22"/>
+          <p:cNvSpPr/>
+          <p:nvPr/>
+        </p:nvSpPr>
+        <p:spPr>
+          <a:xfrm>
+            <a:off x="6519672" y="2569464"/>
+            <a:ext cx="1828800" cy="201168"/>
+          </a:xfrm>
+          <a:prstGeom prst="rect">
+            <a:avLst/>
+          </a:prstGeom>
+          <a:noFill/>
+          <a:ln/>
+        </p:spPr>
+        <p:txBody>
+          <a:bodyPr wrap="square" lIns="0" tIns="0" rIns="0" bIns="0" rtlCol="0" anchor="t"/>
+          <a:lstStyle/>
+          <a:p>
+            <a:pPr algn="ctr" indent="0" marL="0">
+              <a:buNone/>
+            </a:pPr>
+            <a:r>
+              <a:rPr lang="en-US" sz="850" dirty="0">
+                <a:solidFill>
+                  <a:srgbClr val="475569"/>
+                </a:solidFill>
+                <a:latin typeface="Calibri" pitchFamily="34" charset="0"/>
+                <a:ea typeface="Calibri" pitchFamily="34" charset="-122"/>
+                <a:cs typeface="Calibri" pitchFamily="34" charset="-120"/>
+              </a:rPr>
+              <a:t>past tense</a:t>
+            </a:r>
+            <a:endParaRPr lang="en-US" sz="850" dirty="0"/>
+          </a:p>
+        </p:txBody>
+      </p:sp>
+      <p:sp>
+        <p:nvSpPr>
+          <p:cNvPr id="25" name="Shape 23"/>
           <p:cNvSpPr/>
           <p:nvPr/>
         </p:nvSpPr>
@@ -25073,7 +27266,7 @@
       </p:sp>
       <p:sp>
         <p:nvSpPr>
-          <p:cNvPr id="23" name="Text 21"/>
+          <p:cNvPr id="26" name="Text 24"/>
           <p:cNvSpPr/>
           <p:nvPr/>
         </p:nvSpPr>
@@ -25112,7 +27305,7 @@
       </p:sp>
       <p:sp>
         <p:nvSpPr>
-          <p:cNvPr id="24" name="Shape 22"/>
+          <p:cNvPr id="27" name="Shape 25"/>
           <p:cNvSpPr/>
           <p:nvPr/>
         </p:nvSpPr>
@@ -25139,7 +27332,7 @@
       </p:sp>
       <p:sp>
         <p:nvSpPr>
-          <p:cNvPr id="25" name="Text 23"/>
+          <p:cNvPr id="28" name="Text 26"/>
           <p:cNvSpPr/>
           <p:nvPr/>
         </p:nvSpPr>
@@ -25178,7 +27371,7 @@
       </p:sp>
       <p:sp>
         <p:nvSpPr>
-          <p:cNvPr id="26" name="Shape 24"/>
+          <p:cNvPr id="29" name="Shape 27"/>
           <p:cNvSpPr/>
           <p:nvPr/>
         </p:nvSpPr>
@@ -25205,7 +27398,7 @@
       </p:sp>
       <p:sp>
         <p:nvSpPr>
-          <p:cNvPr id="27" name="Text 25"/>
+          <p:cNvPr id="30" name="Text 28"/>
           <p:cNvSpPr/>
           <p:nvPr/>
         </p:nvSpPr>
@@ -25244,7 +27437,7 @@
       </p:sp>
       <p:sp>
         <p:nvSpPr>
-          <p:cNvPr id="28" name="Shape 26"/>
+          <p:cNvPr id="31" name="Shape 29"/>
           <p:cNvSpPr/>
           <p:nvPr/>
         </p:nvSpPr>
@@ -25271,7 +27464,7 @@
       </p:sp>
       <p:sp>
         <p:nvSpPr>
-          <p:cNvPr id="29" name="Text 27"/>
+          <p:cNvPr id="32" name="Text 30"/>
           <p:cNvSpPr/>
           <p:nvPr/>
         </p:nvSpPr>
@@ -25594,7 +27787,7 @@
                 <a:ea typeface="Calibri" pitchFamily="34" charset="-122"/>
                 <a:cs typeface="Calibri" pitchFamily="34" charset="-120"/>
               </a:rPr>
-              <a:t>Word Labs  •  wordlabs.app  •  Root: 'transport' = carry across or over</a:t>
+              <a:t>Word Labs  •  wordlabs.app  •  Root: 'transport' = carry across or beyond</a:t>
             </a:r>
             <a:endParaRPr lang="en-US" sz="800" dirty="0"/>
           </a:p>
@@ -25667,7 +27860,7 @@
                 <a:ea typeface="Trebuchet MS" pitchFamily="34" charset="-122"/>
                 <a:cs typeface="Trebuchet MS" pitchFamily="34" charset="-120"/>
               </a:rPr>
-              <a:t>We are learning that the root 'transport' means 'carry across or over'.</a:t>
+              <a:t>We are learning that the root 'transport' means 'carry across or beyond'.</a:t>
             </a:r>
             <a:endParaRPr lang="en-US" sz="2000" dirty="0"/>
           </a:p>
@@ -26313,7 +28506,7 @@
                 <a:ea typeface="Calibri" pitchFamily="34" charset="-122"/>
                 <a:cs typeface="Calibri" pitchFamily="34" charset="-120"/>
               </a:rPr>
-              <a:t>Word Labs  •  wordlabs.app  •  Root: 'transport' = carry across or over</a:t>
+              <a:t>Word Labs  •  wordlabs.app  •  Root: 'transport' = carry across or beyond</a:t>
             </a:r>
             <a:endParaRPr lang="en-US" sz="800" dirty="0"/>
           </a:p>
@@ -26452,7 +28645,7 @@
                 <a:ea typeface="Trebuchet MS" pitchFamily="34" charset="-122"/>
                 <a:cs typeface="Trebuchet MS" pitchFamily="34" charset="-120"/>
               </a:rPr>
-              <a:t>transporter</a:t>
+              <a:t>transported</a:t>
             </a:r>
             <a:endParaRPr lang="en-US" sz="2800" dirty="0"/>
           </a:p>
@@ -26532,7 +28725,7 @@
         </p:nvSpPr>
         <p:spPr>
           <a:xfrm>
-            <a:off x="2938272" y="2258568"/>
+            <a:off x="2221992" y="2258568"/>
             <a:ext cx="1828800" cy="292608"/>
           </a:xfrm>
           <a:prstGeom prst="rect">
@@ -26541,11 +28734,11 @@
             </a:avLst>
           </a:prstGeom>
           <a:solidFill>
-            <a:srgbClr val="CCFBF1"/>
+            <a:srgbClr val="DDD6FE"/>
           </a:solidFill>
           <a:ln w="19050">
             <a:solidFill>
-              <a:srgbClr val="0D9488"/>
+              <a:srgbClr val="7C3AED"/>
             </a:solidFill>
             <a:prstDash val="solid"/>
           </a:ln>
@@ -26566,7 +28759,7 @@
         </p:nvSpPr>
         <p:spPr>
           <a:xfrm>
-            <a:off x="2938272" y="2258568"/>
+            <a:off x="2221992" y="2258568"/>
             <a:ext cx="1828800" cy="292608"/>
           </a:xfrm>
           <a:prstGeom prst="rect">
@@ -26585,13 +28778,13 @@
             <a:r>
               <a:rPr lang="en-US" sz="1300" b="1" dirty="0">
                 <a:solidFill>
-                  <a:srgbClr val="0F766E"/>
+                  <a:srgbClr val="4C1D95"/>
                 </a:solidFill>
                 <a:latin typeface="Trebuchet MS" pitchFamily="34" charset="0"/>
                 <a:ea typeface="Trebuchet MS" pitchFamily="34" charset="-122"/>
                 <a:cs typeface="Trebuchet MS" pitchFamily="34" charset="-120"/>
               </a:rPr>
-              <a:t>transport</a:t>
+              <a:t>trans</a:t>
             </a:r>
             <a:endParaRPr lang="en-US" sz="1300" dirty="0"/>
           </a:p>
@@ -26605,7 +28798,7 @@
         </p:nvSpPr>
         <p:spPr>
           <a:xfrm>
-            <a:off x="2938272" y="2569464"/>
+            <a:off x="2221992" y="2569464"/>
             <a:ext cx="1828800" cy="201168"/>
           </a:xfrm>
           <a:prstGeom prst="rect">
@@ -26630,7 +28823,7 @@
                 <a:ea typeface="Calibri" pitchFamily="34" charset="-122"/>
                 <a:cs typeface="Calibri" pitchFamily="34" charset="-120"/>
               </a:rPr>
-              <a:t>carry across</a:t>
+              <a:t>across, beyond</a:t>
             </a:r>
             <a:endParaRPr lang="en-US" sz="850" dirty="0"/>
           </a:p>
@@ -26644,7 +28837,7 @@
         </p:nvSpPr>
         <p:spPr>
           <a:xfrm>
-            <a:off x="5803392" y="2258568"/>
+            <a:off x="4370832" y="2258568"/>
             <a:ext cx="1828800" cy="292608"/>
           </a:xfrm>
           <a:prstGeom prst="rect">
@@ -26678,7 +28871,7 @@
         </p:nvSpPr>
         <p:spPr>
           <a:xfrm>
-            <a:off x="5803392" y="2258568"/>
+            <a:off x="4370832" y="2258568"/>
             <a:ext cx="1828800" cy="292608"/>
           </a:xfrm>
           <a:prstGeom prst="rect">
@@ -26703,7 +28896,7 @@
                 <a:ea typeface="Trebuchet MS" pitchFamily="34" charset="-122"/>
                 <a:cs typeface="Trebuchet MS" pitchFamily="34" charset="-120"/>
               </a:rPr>
-              <a:t>er</a:t>
+              <a:t>port</a:t>
             </a:r>
             <a:endParaRPr lang="en-US" sz="1300" dirty="0"/>
           </a:p>
@@ -26717,7 +28910,7 @@
         </p:nvSpPr>
         <p:spPr>
           <a:xfrm>
-            <a:off x="5803392" y="2569464"/>
+            <a:off x="4370832" y="2569464"/>
             <a:ext cx="1828800" cy="201168"/>
           </a:xfrm>
           <a:prstGeom prst="rect">
@@ -26742,7 +28935,7 @@
                 <a:ea typeface="Calibri" pitchFamily="34" charset="-122"/>
                 <a:cs typeface="Calibri" pitchFamily="34" charset="-120"/>
               </a:rPr>
-              <a:t>one who does</a:t>
+              <a:t>carry</a:t>
             </a:r>
             <a:endParaRPr lang="en-US" sz="850" dirty="0"/>
           </a:p>
@@ -26751,6 +28944,118 @@
       <p:sp>
         <p:nvSpPr>
           <p:cNvPr id="22" name="Shape 20"/>
+          <p:cNvSpPr/>
+          <p:nvPr/>
+        </p:nvSpPr>
+        <p:spPr>
+          <a:xfrm>
+            <a:off x="6519672" y="2258568"/>
+            <a:ext cx="1828800" cy="292608"/>
+          </a:xfrm>
+          <a:prstGeom prst="rect">
+            <a:avLst>
+              <a:gd name="adj" fmla="val 25000"/>
+            </a:avLst>
+          </a:prstGeom>
+          <a:solidFill>
+            <a:srgbClr val="FCE7F3"/>
+          </a:solidFill>
+          <a:ln w="19050">
+            <a:solidFill>
+              <a:srgbClr val="DB2777"/>
+            </a:solidFill>
+            <a:prstDash val="solid"/>
+          </a:ln>
+          <a:effectLst>
+            <a:outerShdw sx="100000" sy="100000" kx="0" ky="0" algn="bl" rotWithShape="0" blurRad="101600" dist="38100" dir="8100000">
+              <a:srgbClr val="000000">
+                <a:alpha val="12000"/>
+              </a:srgbClr>
+            </a:outerShdw>
+          </a:effectLst>
+        </p:spPr>
+      </p:sp>
+      <p:sp>
+        <p:nvSpPr>
+          <p:cNvPr id="23" name="Text 21"/>
+          <p:cNvSpPr/>
+          <p:nvPr/>
+        </p:nvSpPr>
+        <p:spPr>
+          <a:xfrm>
+            <a:off x="6519672" y="2258568"/>
+            <a:ext cx="1828800" cy="292608"/>
+          </a:xfrm>
+          <a:prstGeom prst="rect">
+            <a:avLst/>
+          </a:prstGeom>
+          <a:noFill/>
+          <a:ln/>
+        </p:spPr>
+        <p:txBody>
+          <a:bodyPr wrap="square" lIns="0" tIns="0" rIns="0" bIns="0" rtlCol="0" anchor="ctr"/>
+          <a:lstStyle/>
+          <a:p>
+            <a:pPr algn="ctr" indent="0" marL="0">
+              <a:buNone/>
+            </a:pPr>
+            <a:r>
+              <a:rPr lang="en-US" sz="1300" b="1" dirty="0">
+                <a:solidFill>
+                  <a:srgbClr val="9D174D"/>
+                </a:solidFill>
+                <a:latin typeface="Trebuchet MS" pitchFamily="34" charset="0"/>
+                <a:ea typeface="Trebuchet MS" pitchFamily="34" charset="-122"/>
+                <a:cs typeface="Trebuchet MS" pitchFamily="34" charset="-120"/>
+              </a:rPr>
+              <a:t>ed</a:t>
+            </a:r>
+            <a:endParaRPr lang="en-US" sz="1300" dirty="0"/>
+          </a:p>
+        </p:txBody>
+      </p:sp>
+      <p:sp>
+        <p:nvSpPr>
+          <p:cNvPr id="24" name="Text 22"/>
+          <p:cNvSpPr/>
+          <p:nvPr/>
+        </p:nvSpPr>
+        <p:spPr>
+          <a:xfrm>
+            <a:off x="6519672" y="2569464"/>
+            <a:ext cx="1828800" cy="201168"/>
+          </a:xfrm>
+          <a:prstGeom prst="rect">
+            <a:avLst/>
+          </a:prstGeom>
+          <a:noFill/>
+          <a:ln/>
+        </p:spPr>
+        <p:txBody>
+          <a:bodyPr wrap="square" lIns="0" tIns="0" rIns="0" bIns="0" rtlCol="0" anchor="t"/>
+          <a:lstStyle/>
+          <a:p>
+            <a:pPr algn="ctr" indent="0" marL="0">
+              <a:buNone/>
+            </a:pPr>
+            <a:r>
+              <a:rPr lang="en-US" sz="850" dirty="0">
+                <a:solidFill>
+                  <a:srgbClr val="475569"/>
+                </a:solidFill>
+                <a:latin typeface="Calibri" pitchFamily="34" charset="0"/>
+                <a:ea typeface="Calibri" pitchFamily="34" charset="-122"/>
+                <a:cs typeface="Calibri" pitchFamily="34" charset="-120"/>
+              </a:rPr>
+              <a:t>past tense</a:t>
+            </a:r>
+            <a:endParaRPr lang="en-US" sz="850" dirty="0"/>
+          </a:p>
+        </p:txBody>
+      </p:sp>
+      <p:sp>
+        <p:nvSpPr>
+          <p:cNvPr id="25" name="Shape 23"/>
           <p:cNvSpPr/>
           <p:nvPr/>
         </p:nvSpPr>
@@ -26777,7 +29082,7 @@
       </p:sp>
       <p:sp>
         <p:nvSpPr>
-          <p:cNvPr id="23" name="Text 21"/>
+          <p:cNvPr id="26" name="Text 24"/>
           <p:cNvSpPr/>
           <p:nvPr/>
         </p:nvSpPr>
@@ -26816,7 +29121,7 @@
       </p:sp>
       <p:sp>
         <p:nvSpPr>
-          <p:cNvPr id="24" name="Shape 22"/>
+          <p:cNvPr id="27" name="Shape 25"/>
           <p:cNvSpPr/>
           <p:nvPr/>
         </p:nvSpPr>
@@ -26843,7 +29148,7 @@
       </p:sp>
       <p:sp>
         <p:nvSpPr>
-          <p:cNvPr id="25" name="Shape 23"/>
+          <p:cNvPr id="28" name="Shape 26"/>
           <p:cNvSpPr/>
           <p:nvPr/>
         </p:nvSpPr>
@@ -26870,7 +29175,7 @@
       </p:sp>
       <p:sp>
         <p:nvSpPr>
-          <p:cNvPr id="26" name="Text 24"/>
+          <p:cNvPr id="29" name="Text 27"/>
           <p:cNvSpPr/>
           <p:nvPr/>
         </p:nvSpPr>
@@ -26909,7 +29214,7 @@
       </p:sp>
       <p:sp>
         <p:nvSpPr>
-          <p:cNvPr id="27" name="Text 25"/>
+          <p:cNvPr id="30" name="Text 28"/>
           <p:cNvSpPr/>
           <p:nvPr/>
         </p:nvSpPr>
@@ -26948,7 +29253,7 @@
       </p:sp>
       <p:sp>
         <p:nvSpPr>
-          <p:cNvPr id="28" name="Shape 26"/>
+          <p:cNvPr id="31" name="Shape 29"/>
           <p:cNvSpPr/>
           <p:nvPr/>
         </p:nvSpPr>
@@ -26975,7 +29280,7 @@
       </p:sp>
       <p:sp>
         <p:nvSpPr>
-          <p:cNvPr id="29" name="Text 27"/>
+          <p:cNvPr id="32" name="Text 30"/>
           <p:cNvSpPr/>
           <p:nvPr/>
         </p:nvSpPr>
@@ -27014,7 +29319,7 @@
       </p:sp>
       <p:sp>
         <p:nvSpPr>
-          <p:cNvPr id="30" name="Text 28"/>
+          <p:cNvPr id="33" name="Text 31"/>
           <p:cNvSpPr/>
           <p:nvPr/>
         </p:nvSpPr>
@@ -27053,7 +29358,7 @@
       </p:sp>
       <p:sp>
         <p:nvSpPr>
-          <p:cNvPr id="31" name="Shape 29"/>
+          <p:cNvPr id="34" name="Shape 32"/>
           <p:cNvSpPr/>
           <p:nvPr/>
         </p:nvSpPr>
@@ -27080,7 +29385,7 @@
       </p:sp>
       <p:sp>
         <p:nvSpPr>
-          <p:cNvPr id="32" name="Text 30"/>
+          <p:cNvPr id="35" name="Text 33"/>
           <p:cNvSpPr/>
           <p:nvPr/>
         </p:nvSpPr>
@@ -27111,7 +29416,7 @@
                 <a:ea typeface="Trebuchet MS" pitchFamily="34" charset="-122"/>
                 <a:cs typeface="Trebuchet MS" pitchFamily="34" charset="-120"/>
               </a:rPr>
-              <a:t>ter</a:t>
+              <a:t>ted</a:t>
             </a:r>
             <a:endParaRPr lang="en-US" sz="1400" dirty="0"/>
           </a:p>
@@ -27119,7 +29424,7 @@
       </p:sp>
       <p:sp>
         <p:nvSpPr>
-          <p:cNvPr id="33" name="Shape 31"/>
+          <p:cNvPr id="36" name="Shape 34"/>
           <p:cNvSpPr/>
           <p:nvPr/>
         </p:nvSpPr>
@@ -27146,7 +29451,7 @@
       </p:sp>
       <p:sp>
         <p:nvSpPr>
-          <p:cNvPr id="34" name="Text 32"/>
+          <p:cNvPr id="37" name="Text 35"/>
           <p:cNvSpPr/>
           <p:nvPr/>
         </p:nvSpPr>
@@ -27185,7 +29490,7 @@
       </p:sp>
       <p:sp>
         <p:nvSpPr>
-          <p:cNvPr id="35" name="Shape 33"/>
+          <p:cNvPr id="38" name="Shape 36"/>
           <p:cNvSpPr/>
           <p:nvPr/>
         </p:nvSpPr>
@@ -27212,7 +29517,7 @@
       </p:sp>
       <p:sp>
         <p:nvSpPr>
-          <p:cNvPr id="36" name="Text 34"/>
+          <p:cNvPr id="39" name="Text 37"/>
           <p:cNvSpPr/>
           <p:nvPr/>
         </p:nvSpPr>
@@ -27535,7 +29840,7 @@
                 <a:ea typeface="Calibri" pitchFamily="34" charset="-122"/>
                 <a:cs typeface="Calibri" pitchFamily="34" charset="-120"/>
               </a:rPr>
-              <a:t>Word Labs  •  wordlabs.app  •  Root: 'transport' = carry across or over</a:t>
+              <a:t>Word Labs  •  wordlabs.app  •  Root: 'transport' = carry across or beyond</a:t>
             </a:r>
             <a:endParaRPr lang="en-US" sz="800" dirty="0"/>
           </a:p>
@@ -27674,7 +29979,7 @@
                 <a:ea typeface="Trebuchet MS" pitchFamily="34" charset="-122"/>
                 <a:cs typeface="Trebuchet MS" pitchFamily="34" charset="-120"/>
               </a:rPr>
-              <a:t>transporter</a:t>
+              <a:t>transported</a:t>
             </a:r>
             <a:endParaRPr lang="en-US" sz="2800" dirty="0"/>
           </a:p>
@@ -27754,7 +30059,7 @@
         </p:nvSpPr>
         <p:spPr>
           <a:xfrm>
-            <a:off x="2938272" y="2258568"/>
+            <a:off x="2221992" y="2258568"/>
             <a:ext cx="1828800" cy="292608"/>
           </a:xfrm>
           <a:prstGeom prst="rect">
@@ -27763,11 +30068,11 @@
             </a:avLst>
           </a:prstGeom>
           <a:solidFill>
-            <a:srgbClr val="CCFBF1"/>
+            <a:srgbClr val="DDD6FE"/>
           </a:solidFill>
           <a:ln w="19050">
             <a:solidFill>
-              <a:srgbClr val="0D9488"/>
+              <a:srgbClr val="7C3AED"/>
             </a:solidFill>
             <a:prstDash val="solid"/>
           </a:ln>
@@ -27788,7 +30093,7 @@
         </p:nvSpPr>
         <p:spPr>
           <a:xfrm>
-            <a:off x="2938272" y="2258568"/>
+            <a:off x="2221992" y="2258568"/>
             <a:ext cx="1828800" cy="292608"/>
           </a:xfrm>
           <a:prstGeom prst="rect">
@@ -27807,13 +30112,13 @@
             <a:r>
               <a:rPr lang="en-US" sz="1300" b="1" dirty="0">
                 <a:solidFill>
-                  <a:srgbClr val="0F766E"/>
+                  <a:srgbClr val="4C1D95"/>
                 </a:solidFill>
                 <a:latin typeface="Trebuchet MS" pitchFamily="34" charset="0"/>
                 <a:ea typeface="Trebuchet MS" pitchFamily="34" charset="-122"/>
                 <a:cs typeface="Trebuchet MS" pitchFamily="34" charset="-120"/>
               </a:rPr>
-              <a:t>transport</a:t>
+              <a:t>trans</a:t>
             </a:r>
             <a:endParaRPr lang="en-US" sz="1300" dirty="0"/>
           </a:p>
@@ -27827,7 +30132,7 @@
         </p:nvSpPr>
         <p:spPr>
           <a:xfrm>
-            <a:off x="2938272" y="2569464"/>
+            <a:off x="2221992" y="2569464"/>
             <a:ext cx="1828800" cy="201168"/>
           </a:xfrm>
           <a:prstGeom prst="rect">
@@ -27852,7 +30157,7 @@
                 <a:ea typeface="Calibri" pitchFamily="34" charset="-122"/>
                 <a:cs typeface="Calibri" pitchFamily="34" charset="-120"/>
               </a:rPr>
-              <a:t>carry across</a:t>
+              <a:t>across, beyond</a:t>
             </a:r>
             <a:endParaRPr lang="en-US" sz="850" dirty="0"/>
           </a:p>
@@ -27866,7 +30171,7 @@
         </p:nvSpPr>
         <p:spPr>
           <a:xfrm>
-            <a:off x="5803392" y="2258568"/>
+            <a:off x="4370832" y="2258568"/>
             <a:ext cx="1828800" cy="292608"/>
           </a:xfrm>
           <a:prstGeom prst="rect">
@@ -27900,7 +30205,7 @@
         </p:nvSpPr>
         <p:spPr>
           <a:xfrm>
-            <a:off x="5803392" y="2258568"/>
+            <a:off x="4370832" y="2258568"/>
             <a:ext cx="1828800" cy="292608"/>
           </a:xfrm>
           <a:prstGeom prst="rect">
@@ -27925,7 +30230,7 @@
                 <a:ea typeface="Trebuchet MS" pitchFamily="34" charset="-122"/>
                 <a:cs typeface="Trebuchet MS" pitchFamily="34" charset="-120"/>
               </a:rPr>
-              <a:t>er</a:t>
+              <a:t>port</a:t>
             </a:r>
             <a:endParaRPr lang="en-US" sz="1300" dirty="0"/>
           </a:p>
@@ -27939,7 +30244,7 @@
         </p:nvSpPr>
         <p:spPr>
           <a:xfrm>
-            <a:off x="5803392" y="2569464"/>
+            <a:off x="4370832" y="2569464"/>
             <a:ext cx="1828800" cy="201168"/>
           </a:xfrm>
           <a:prstGeom prst="rect">
@@ -27964,7 +30269,7 @@
                 <a:ea typeface="Calibri" pitchFamily="34" charset="-122"/>
                 <a:cs typeface="Calibri" pitchFamily="34" charset="-120"/>
               </a:rPr>
-              <a:t>one who does</a:t>
+              <a:t>carry</a:t>
             </a:r>
             <a:endParaRPr lang="en-US" sz="850" dirty="0"/>
           </a:p>
@@ -27973,6 +30278,118 @@
       <p:sp>
         <p:nvSpPr>
           <p:cNvPr id="22" name="Shape 20"/>
+          <p:cNvSpPr/>
+          <p:nvPr/>
+        </p:nvSpPr>
+        <p:spPr>
+          <a:xfrm>
+            <a:off x="6519672" y="2258568"/>
+            <a:ext cx="1828800" cy="292608"/>
+          </a:xfrm>
+          <a:prstGeom prst="rect">
+            <a:avLst>
+              <a:gd name="adj" fmla="val 25000"/>
+            </a:avLst>
+          </a:prstGeom>
+          <a:solidFill>
+            <a:srgbClr val="FCE7F3"/>
+          </a:solidFill>
+          <a:ln w="19050">
+            <a:solidFill>
+              <a:srgbClr val="DB2777"/>
+            </a:solidFill>
+            <a:prstDash val="solid"/>
+          </a:ln>
+          <a:effectLst>
+            <a:outerShdw sx="100000" sy="100000" kx="0" ky="0" algn="bl" rotWithShape="0" blurRad="101600" dist="38100" dir="8100000">
+              <a:srgbClr val="000000">
+                <a:alpha val="12000"/>
+              </a:srgbClr>
+            </a:outerShdw>
+          </a:effectLst>
+        </p:spPr>
+      </p:sp>
+      <p:sp>
+        <p:nvSpPr>
+          <p:cNvPr id="23" name="Text 21"/>
+          <p:cNvSpPr/>
+          <p:nvPr/>
+        </p:nvSpPr>
+        <p:spPr>
+          <a:xfrm>
+            <a:off x="6519672" y="2258568"/>
+            <a:ext cx="1828800" cy="292608"/>
+          </a:xfrm>
+          <a:prstGeom prst="rect">
+            <a:avLst/>
+          </a:prstGeom>
+          <a:noFill/>
+          <a:ln/>
+        </p:spPr>
+        <p:txBody>
+          <a:bodyPr wrap="square" lIns="0" tIns="0" rIns="0" bIns="0" rtlCol="0" anchor="ctr"/>
+          <a:lstStyle/>
+          <a:p>
+            <a:pPr algn="ctr" indent="0" marL="0">
+              <a:buNone/>
+            </a:pPr>
+            <a:r>
+              <a:rPr lang="en-US" sz="1300" b="1" dirty="0">
+                <a:solidFill>
+                  <a:srgbClr val="9D174D"/>
+                </a:solidFill>
+                <a:latin typeface="Trebuchet MS" pitchFamily="34" charset="0"/>
+                <a:ea typeface="Trebuchet MS" pitchFamily="34" charset="-122"/>
+                <a:cs typeface="Trebuchet MS" pitchFamily="34" charset="-120"/>
+              </a:rPr>
+              <a:t>ed</a:t>
+            </a:r>
+            <a:endParaRPr lang="en-US" sz="1300" dirty="0"/>
+          </a:p>
+        </p:txBody>
+      </p:sp>
+      <p:sp>
+        <p:nvSpPr>
+          <p:cNvPr id="24" name="Text 22"/>
+          <p:cNvSpPr/>
+          <p:nvPr/>
+        </p:nvSpPr>
+        <p:spPr>
+          <a:xfrm>
+            <a:off x="6519672" y="2569464"/>
+            <a:ext cx="1828800" cy="201168"/>
+          </a:xfrm>
+          <a:prstGeom prst="rect">
+            <a:avLst/>
+          </a:prstGeom>
+          <a:noFill/>
+          <a:ln/>
+        </p:spPr>
+        <p:txBody>
+          <a:bodyPr wrap="square" lIns="0" tIns="0" rIns="0" bIns="0" rtlCol="0" anchor="t"/>
+          <a:lstStyle/>
+          <a:p>
+            <a:pPr algn="ctr" indent="0" marL="0">
+              <a:buNone/>
+            </a:pPr>
+            <a:r>
+              <a:rPr lang="en-US" sz="850" dirty="0">
+                <a:solidFill>
+                  <a:srgbClr val="475569"/>
+                </a:solidFill>
+                <a:latin typeface="Calibri" pitchFamily="34" charset="0"/>
+                <a:ea typeface="Calibri" pitchFamily="34" charset="-122"/>
+                <a:cs typeface="Calibri" pitchFamily="34" charset="-120"/>
+              </a:rPr>
+              <a:t>past tense</a:t>
+            </a:r>
+            <a:endParaRPr lang="en-US" sz="850" dirty="0"/>
+          </a:p>
+        </p:txBody>
+      </p:sp>
+      <p:sp>
+        <p:nvSpPr>
+          <p:cNvPr id="25" name="Shape 23"/>
           <p:cNvSpPr/>
           <p:nvPr/>
         </p:nvSpPr>
@@ -27999,7 +30416,7 @@
       </p:sp>
       <p:sp>
         <p:nvSpPr>
-          <p:cNvPr id="23" name="Text 21"/>
+          <p:cNvPr id="26" name="Text 24"/>
           <p:cNvSpPr/>
           <p:nvPr/>
         </p:nvSpPr>
@@ -28038,7 +30455,7 @@
       </p:sp>
       <p:sp>
         <p:nvSpPr>
-          <p:cNvPr id="24" name="Shape 22"/>
+          <p:cNvPr id="27" name="Shape 25"/>
           <p:cNvSpPr/>
           <p:nvPr/>
         </p:nvSpPr>
@@ -28065,7 +30482,7 @@
       </p:sp>
       <p:sp>
         <p:nvSpPr>
-          <p:cNvPr id="25" name="Shape 23"/>
+          <p:cNvPr id="28" name="Shape 26"/>
           <p:cNvSpPr/>
           <p:nvPr/>
         </p:nvSpPr>
@@ -28092,7 +30509,7 @@
       </p:sp>
       <p:sp>
         <p:nvSpPr>
-          <p:cNvPr id="26" name="Text 24"/>
+          <p:cNvPr id="29" name="Text 27"/>
           <p:cNvSpPr/>
           <p:nvPr/>
         </p:nvSpPr>
@@ -28131,7 +30548,7 @@
       </p:sp>
       <p:sp>
         <p:nvSpPr>
-          <p:cNvPr id="27" name="Text 25"/>
+          <p:cNvPr id="30" name="Text 28"/>
           <p:cNvSpPr/>
           <p:nvPr/>
         </p:nvSpPr>
@@ -28170,7 +30587,7 @@
       </p:sp>
       <p:sp>
         <p:nvSpPr>
-          <p:cNvPr id="28" name="Shape 26"/>
+          <p:cNvPr id="31" name="Shape 29"/>
           <p:cNvSpPr/>
           <p:nvPr/>
         </p:nvSpPr>
@@ -28197,7 +30614,7 @@
       </p:sp>
       <p:sp>
         <p:nvSpPr>
-          <p:cNvPr id="29" name="Text 27"/>
+          <p:cNvPr id="32" name="Text 30"/>
           <p:cNvSpPr/>
           <p:nvPr/>
         </p:nvSpPr>
@@ -28236,7 +30653,7 @@
       </p:sp>
       <p:sp>
         <p:nvSpPr>
-          <p:cNvPr id="30" name="Text 28"/>
+          <p:cNvPr id="33" name="Text 31"/>
           <p:cNvSpPr/>
           <p:nvPr/>
         </p:nvSpPr>
@@ -28275,7 +30692,7 @@
       </p:sp>
       <p:sp>
         <p:nvSpPr>
-          <p:cNvPr id="31" name="Shape 29"/>
+          <p:cNvPr id="34" name="Shape 32"/>
           <p:cNvSpPr/>
           <p:nvPr/>
         </p:nvSpPr>
@@ -28302,7 +30719,7 @@
       </p:sp>
       <p:sp>
         <p:nvSpPr>
-          <p:cNvPr id="32" name="Text 30"/>
+          <p:cNvPr id="35" name="Text 33"/>
           <p:cNvSpPr/>
           <p:nvPr/>
         </p:nvSpPr>
@@ -28333,7 +30750,7 @@
                 <a:ea typeface="Trebuchet MS" pitchFamily="34" charset="-122"/>
                 <a:cs typeface="Trebuchet MS" pitchFamily="34" charset="-120"/>
               </a:rPr>
-              <a:t>ter</a:t>
+              <a:t>ted</a:t>
             </a:r>
             <a:endParaRPr lang="en-US" sz="1400" dirty="0"/>
           </a:p>
@@ -28341,7 +30758,7 @@
       </p:sp>
       <p:sp>
         <p:nvSpPr>
-          <p:cNvPr id="33" name="Shape 31"/>
+          <p:cNvPr id="36" name="Shape 34"/>
           <p:cNvSpPr/>
           <p:nvPr/>
         </p:nvSpPr>
@@ -28368,7 +30785,7 @@
       </p:sp>
       <p:sp>
         <p:nvSpPr>
-          <p:cNvPr id="34" name="Text 32"/>
+          <p:cNvPr id="37" name="Text 35"/>
           <p:cNvSpPr/>
           <p:nvPr/>
         </p:nvSpPr>
@@ -28407,7 +30824,7 @@
       </p:sp>
       <p:sp>
         <p:nvSpPr>
-          <p:cNvPr id="35" name="Shape 33"/>
+          <p:cNvPr id="38" name="Shape 36"/>
           <p:cNvSpPr/>
           <p:nvPr/>
         </p:nvSpPr>
@@ -28434,7 +30851,7 @@
       </p:sp>
       <p:sp>
         <p:nvSpPr>
-          <p:cNvPr id="36" name="Shape 34"/>
+          <p:cNvPr id="39" name="Shape 37"/>
           <p:cNvSpPr/>
           <p:nvPr/>
         </p:nvSpPr>
@@ -28461,7 +30878,7 @@
       </p:sp>
       <p:sp>
         <p:nvSpPr>
-          <p:cNvPr id="37" name="Text 35"/>
+          <p:cNvPr id="40" name="Text 38"/>
           <p:cNvSpPr/>
           <p:nvPr/>
         </p:nvSpPr>
@@ -28500,7 +30917,7 @@
       </p:sp>
       <p:sp>
         <p:nvSpPr>
-          <p:cNvPr id="38" name="Shape 36"/>
+          <p:cNvPr id="41" name="Shape 39"/>
           <p:cNvSpPr/>
           <p:nvPr/>
         </p:nvSpPr>
@@ -28527,7 +30944,7 @@
       </p:sp>
       <p:sp>
         <p:nvSpPr>
-          <p:cNvPr id="39" name="Text 37"/>
+          <p:cNvPr id="42" name="Text 40"/>
           <p:cNvSpPr/>
           <p:nvPr/>
         </p:nvSpPr>
@@ -28566,7 +30983,7 @@
       </p:sp>
       <p:sp>
         <p:nvSpPr>
-          <p:cNvPr id="40" name="Shape 38"/>
+          <p:cNvPr id="43" name="Shape 41"/>
           <p:cNvSpPr/>
           <p:nvPr/>
         </p:nvSpPr>
@@ -28593,7 +31010,7 @@
       </p:sp>
       <p:sp>
         <p:nvSpPr>
-          <p:cNvPr id="41" name="Text 39"/>
+          <p:cNvPr id="44" name="Text 42"/>
           <p:cNvSpPr/>
           <p:nvPr/>
         </p:nvSpPr>
@@ -28632,7 +31049,7 @@
       </p:sp>
       <p:sp>
         <p:nvSpPr>
-          <p:cNvPr id="42" name="Shape 40"/>
+          <p:cNvPr id="45" name="Shape 43"/>
           <p:cNvSpPr/>
           <p:nvPr/>
         </p:nvSpPr>
@@ -28659,7 +31076,7 @@
       </p:sp>
       <p:sp>
         <p:nvSpPr>
-          <p:cNvPr id="43" name="Text 41"/>
+          <p:cNvPr id="46" name="Text 44"/>
           <p:cNvSpPr/>
           <p:nvPr/>
         </p:nvSpPr>
@@ -28698,7 +31115,7 @@
       </p:sp>
       <p:sp>
         <p:nvSpPr>
-          <p:cNvPr id="44" name="Shape 42"/>
+          <p:cNvPr id="47" name="Shape 45"/>
           <p:cNvSpPr/>
           <p:nvPr/>
         </p:nvSpPr>
@@ -28725,7 +31142,7 @@
       </p:sp>
       <p:sp>
         <p:nvSpPr>
-          <p:cNvPr id="45" name="Text 43"/>
+          <p:cNvPr id="48" name="Text 46"/>
           <p:cNvSpPr/>
           <p:nvPr/>
         </p:nvSpPr>
@@ -28764,7 +31181,7 @@
       </p:sp>
       <p:sp>
         <p:nvSpPr>
-          <p:cNvPr id="46" name="Shape 44"/>
+          <p:cNvPr id="49" name="Shape 47"/>
           <p:cNvSpPr/>
           <p:nvPr/>
         </p:nvSpPr>
@@ -28791,7 +31208,7 @@
       </p:sp>
       <p:sp>
         <p:nvSpPr>
-          <p:cNvPr id="47" name="Text 45"/>
+          <p:cNvPr id="50" name="Text 48"/>
           <p:cNvSpPr/>
           <p:nvPr/>
         </p:nvSpPr>
@@ -28830,7 +31247,7 @@
       </p:sp>
       <p:sp>
         <p:nvSpPr>
-          <p:cNvPr id="48" name="Shape 46"/>
+          <p:cNvPr id="51" name="Shape 49"/>
           <p:cNvSpPr/>
           <p:nvPr/>
         </p:nvSpPr>
@@ -28857,7 +31274,7 @@
       </p:sp>
       <p:sp>
         <p:nvSpPr>
-          <p:cNvPr id="49" name="Text 47"/>
+          <p:cNvPr id="52" name="Text 50"/>
           <p:cNvSpPr/>
           <p:nvPr/>
         </p:nvSpPr>
@@ -28896,7 +31313,7 @@
       </p:sp>
       <p:sp>
         <p:nvSpPr>
-          <p:cNvPr id="50" name="Shape 48"/>
+          <p:cNvPr id="53" name="Shape 51"/>
           <p:cNvSpPr/>
           <p:nvPr/>
         </p:nvSpPr>
@@ -28923,7 +31340,7 @@
       </p:sp>
       <p:sp>
         <p:nvSpPr>
-          <p:cNvPr id="51" name="Text 49"/>
+          <p:cNvPr id="54" name="Text 52"/>
           <p:cNvSpPr/>
           <p:nvPr/>
         </p:nvSpPr>
@@ -28962,7 +31379,7 @@
       </p:sp>
       <p:sp>
         <p:nvSpPr>
-          <p:cNvPr id="52" name="Shape 50"/>
+          <p:cNvPr id="55" name="Shape 53"/>
           <p:cNvSpPr/>
           <p:nvPr/>
         </p:nvSpPr>
@@ -28989,7 +31406,7 @@
       </p:sp>
       <p:sp>
         <p:nvSpPr>
-          <p:cNvPr id="53" name="Text 51"/>
+          <p:cNvPr id="56" name="Text 54"/>
           <p:cNvSpPr/>
           <p:nvPr/>
         </p:nvSpPr>
@@ -29020,7 +31437,7 @@
                 <a:ea typeface="Trebuchet MS" pitchFamily="34" charset="-122"/>
                 <a:cs typeface="Trebuchet MS" pitchFamily="34" charset="-120"/>
               </a:rPr>
-              <a:t>er</a:t>
+              <a:t>ed</a:t>
             </a:r>
             <a:endParaRPr lang="en-US" sz="900" dirty="0"/>
           </a:p>
@@ -29312,7 +31729,7 @@
                 <a:ea typeface="Calibri" pitchFamily="34" charset="-122"/>
                 <a:cs typeface="Calibri" pitchFamily="34" charset="-120"/>
               </a:rPr>
-              <a:t>Word Labs  •  wordlabs.app  •  Root: 'transport' = carry across or over</a:t>
+              <a:t>Word Labs  •  wordlabs.app  •  Root: 'transport' = carry across or beyond</a:t>
             </a:r>
             <a:endParaRPr lang="en-US" sz="800" dirty="0"/>
           </a:p>
@@ -29451,7 +31868,7 @@
                 <a:ea typeface="Trebuchet MS" pitchFamily="34" charset="-122"/>
                 <a:cs typeface="Trebuchet MS" pitchFamily="34" charset="-120"/>
               </a:rPr>
-              <a:t>transportation</a:t>
+              <a:t>retransported</a:t>
             </a:r>
             <a:endParaRPr lang="en-US" sz="2800" dirty="0"/>
           </a:p>
@@ -30139,7 +32556,7 @@
                 <a:ea typeface="Calibri" pitchFamily="34" charset="-122"/>
                 <a:cs typeface="Calibri" pitchFamily="34" charset="-120"/>
               </a:rPr>
-              <a:t>Word Labs  •  wordlabs.app  •  Root: 'transport' = carry across or over</a:t>
+              <a:t>Word Labs  •  wordlabs.app  •  Root: 'transport' = carry across or beyond</a:t>
             </a:r>
             <a:endParaRPr lang="en-US" sz="800" dirty="0"/>
           </a:p>
@@ -30278,7 +32695,7 @@
                 <a:ea typeface="Trebuchet MS" pitchFamily="34" charset="-122"/>
                 <a:cs typeface="Trebuchet MS" pitchFamily="34" charset="-120"/>
               </a:rPr>
-              <a:t>transportation</a:t>
+              <a:t>retransported</a:t>
             </a:r>
             <a:endParaRPr lang="en-US" sz="2800" dirty="0"/>
           </a:p>
@@ -30358,8 +32775,8 @@
         </p:nvSpPr>
         <p:spPr>
           <a:xfrm>
-            <a:off x="2938272" y="2258568"/>
-            <a:ext cx="1828800" cy="292608"/>
+            <a:off x="1989734" y="2258568"/>
+            <a:ext cx="1581912" cy="292608"/>
           </a:xfrm>
           <a:prstGeom prst="rect">
             <a:avLst>
@@ -30367,11 +32784,11 @@
             </a:avLst>
           </a:prstGeom>
           <a:solidFill>
-            <a:srgbClr val="CCFBF1"/>
+            <a:srgbClr val="DDD6FE"/>
           </a:solidFill>
           <a:ln w="19050">
             <a:solidFill>
-              <a:srgbClr val="0D9488"/>
+              <a:srgbClr val="7C3AED"/>
             </a:solidFill>
             <a:prstDash val="solid"/>
           </a:ln>
@@ -30392,8 +32809,8 @@
         </p:nvSpPr>
         <p:spPr>
           <a:xfrm>
-            <a:off x="2938272" y="2258568"/>
-            <a:ext cx="1828800" cy="292608"/>
+            <a:off x="1989734" y="2258568"/>
+            <a:ext cx="1581912" cy="292608"/>
           </a:xfrm>
           <a:prstGeom prst="rect">
             <a:avLst/>
@@ -30411,13 +32828,13 @@
             <a:r>
               <a:rPr lang="en-US" sz="1300" b="1" dirty="0">
                 <a:solidFill>
-                  <a:srgbClr val="0F766E"/>
+                  <a:srgbClr val="4C1D95"/>
                 </a:solidFill>
                 <a:latin typeface="Trebuchet MS" pitchFamily="34" charset="0"/>
                 <a:ea typeface="Trebuchet MS" pitchFamily="34" charset="-122"/>
                 <a:cs typeface="Trebuchet MS" pitchFamily="34" charset="-120"/>
               </a:rPr>
-              <a:t>transport</a:t>
+              <a:t>re</a:t>
             </a:r>
             <a:endParaRPr lang="en-US" sz="1300" dirty="0"/>
           </a:p>
@@ -30431,8 +32848,8 @@
         </p:nvSpPr>
         <p:spPr>
           <a:xfrm>
-            <a:off x="2938272" y="2569464"/>
-            <a:ext cx="1828800" cy="201168"/>
+            <a:off x="1989734" y="2569464"/>
+            <a:ext cx="1581912" cy="201168"/>
           </a:xfrm>
           <a:prstGeom prst="rect">
             <a:avLst/>
@@ -30456,7 +32873,7 @@
                 <a:ea typeface="Calibri" pitchFamily="34" charset="-122"/>
                 <a:cs typeface="Calibri" pitchFamily="34" charset="-120"/>
               </a:rPr>
-              <a:t>carry across</a:t>
+              <a:t>again</a:t>
             </a:r>
             <a:endParaRPr lang="en-US" sz="850" dirty="0"/>
           </a:p>
@@ -30470,8 +32887,8 @@
         </p:nvSpPr>
         <p:spPr>
           <a:xfrm>
-            <a:off x="5803392" y="2258568"/>
-            <a:ext cx="1828800" cy="292608"/>
+            <a:off x="3659429" y="2258568"/>
+            <a:ext cx="1581912" cy="292608"/>
           </a:xfrm>
           <a:prstGeom prst="rect">
             <a:avLst>
@@ -30504,8 +32921,8 @@
         </p:nvSpPr>
         <p:spPr>
           <a:xfrm>
-            <a:off x="5803392" y="2258568"/>
-            <a:ext cx="1828800" cy="292608"/>
+            <a:off x="3659429" y="2258568"/>
+            <a:ext cx="1581912" cy="292608"/>
           </a:xfrm>
           <a:prstGeom prst="rect">
             <a:avLst/>
@@ -30529,7 +32946,7 @@
                 <a:ea typeface="Trebuchet MS" pitchFamily="34" charset="-122"/>
                 <a:cs typeface="Trebuchet MS" pitchFamily="34" charset="-120"/>
               </a:rPr>
-              <a:t>ation</a:t>
+              <a:t>trans</a:t>
             </a:r>
             <a:endParaRPr lang="en-US" sz="1300" dirty="0"/>
           </a:p>
@@ -30543,8 +32960,8 @@
         </p:nvSpPr>
         <p:spPr>
           <a:xfrm>
-            <a:off x="5803392" y="2569464"/>
-            <a:ext cx="1828800" cy="201168"/>
+            <a:off x="3659429" y="2569464"/>
+            <a:ext cx="1581912" cy="201168"/>
           </a:xfrm>
           <a:prstGeom prst="rect">
             <a:avLst/>
@@ -30568,7 +32985,7 @@
                 <a:ea typeface="Calibri" pitchFamily="34" charset="-122"/>
                 <a:cs typeface="Calibri" pitchFamily="34" charset="-120"/>
               </a:rPr>
-              <a:t>the act or process of</a:t>
+              <a:t>across, beyond</a:t>
             </a:r>
             <a:endParaRPr lang="en-US" sz="850" dirty="0"/>
           </a:p>
@@ -30577,6 +32994,230 @@
       <p:sp>
         <p:nvSpPr>
           <p:cNvPr id="22" name="Shape 20"/>
+          <p:cNvSpPr/>
+          <p:nvPr/>
+        </p:nvSpPr>
+        <p:spPr>
+          <a:xfrm>
+            <a:off x="5329123" y="2258568"/>
+            <a:ext cx="1581912" cy="292608"/>
+          </a:xfrm>
+          <a:prstGeom prst="rect">
+            <a:avLst>
+              <a:gd name="adj" fmla="val 25000"/>
+            </a:avLst>
+          </a:prstGeom>
+          <a:solidFill>
+            <a:srgbClr val="FCE7F3"/>
+          </a:solidFill>
+          <a:ln w="19050">
+            <a:solidFill>
+              <a:srgbClr val="DB2777"/>
+            </a:solidFill>
+            <a:prstDash val="solid"/>
+          </a:ln>
+          <a:effectLst>
+            <a:outerShdw sx="100000" sy="100000" kx="0" ky="0" algn="bl" rotWithShape="0" blurRad="101600" dist="38100" dir="8100000">
+              <a:srgbClr val="000000">
+                <a:alpha val="12000"/>
+              </a:srgbClr>
+            </a:outerShdw>
+          </a:effectLst>
+        </p:spPr>
+      </p:sp>
+      <p:sp>
+        <p:nvSpPr>
+          <p:cNvPr id="23" name="Text 21"/>
+          <p:cNvSpPr/>
+          <p:nvPr/>
+        </p:nvSpPr>
+        <p:spPr>
+          <a:xfrm>
+            <a:off x="5329123" y="2258568"/>
+            <a:ext cx="1581912" cy="292608"/>
+          </a:xfrm>
+          <a:prstGeom prst="rect">
+            <a:avLst/>
+          </a:prstGeom>
+          <a:noFill/>
+          <a:ln/>
+        </p:spPr>
+        <p:txBody>
+          <a:bodyPr wrap="square" lIns="0" tIns="0" rIns="0" bIns="0" rtlCol="0" anchor="ctr"/>
+          <a:lstStyle/>
+          <a:p>
+            <a:pPr algn="ctr" indent="0" marL="0">
+              <a:buNone/>
+            </a:pPr>
+            <a:r>
+              <a:rPr lang="en-US" sz="1300" b="1" dirty="0">
+                <a:solidFill>
+                  <a:srgbClr val="9D174D"/>
+                </a:solidFill>
+                <a:latin typeface="Trebuchet MS" pitchFamily="34" charset="0"/>
+                <a:ea typeface="Trebuchet MS" pitchFamily="34" charset="-122"/>
+                <a:cs typeface="Trebuchet MS" pitchFamily="34" charset="-120"/>
+              </a:rPr>
+              <a:t>port</a:t>
+            </a:r>
+            <a:endParaRPr lang="en-US" sz="1300" dirty="0"/>
+          </a:p>
+        </p:txBody>
+      </p:sp>
+      <p:sp>
+        <p:nvSpPr>
+          <p:cNvPr id="24" name="Text 22"/>
+          <p:cNvSpPr/>
+          <p:nvPr/>
+        </p:nvSpPr>
+        <p:spPr>
+          <a:xfrm>
+            <a:off x="5329123" y="2569464"/>
+            <a:ext cx="1581912" cy="201168"/>
+          </a:xfrm>
+          <a:prstGeom prst="rect">
+            <a:avLst/>
+          </a:prstGeom>
+          <a:noFill/>
+          <a:ln/>
+        </p:spPr>
+        <p:txBody>
+          <a:bodyPr wrap="square" lIns="0" tIns="0" rIns="0" bIns="0" rtlCol="0" anchor="t"/>
+          <a:lstStyle/>
+          <a:p>
+            <a:pPr algn="ctr" indent="0" marL="0">
+              <a:buNone/>
+            </a:pPr>
+            <a:r>
+              <a:rPr lang="en-US" sz="850" dirty="0">
+                <a:solidFill>
+                  <a:srgbClr val="475569"/>
+                </a:solidFill>
+                <a:latin typeface="Calibri" pitchFamily="34" charset="0"/>
+                <a:ea typeface="Calibri" pitchFamily="34" charset="-122"/>
+                <a:cs typeface="Calibri" pitchFamily="34" charset="-120"/>
+              </a:rPr>
+              <a:t>carry</a:t>
+            </a:r>
+            <a:endParaRPr lang="en-US" sz="850" dirty="0"/>
+          </a:p>
+        </p:txBody>
+      </p:sp>
+      <p:sp>
+        <p:nvSpPr>
+          <p:cNvPr id="25" name="Shape 23"/>
+          <p:cNvSpPr/>
+          <p:nvPr/>
+        </p:nvSpPr>
+        <p:spPr>
+          <a:xfrm>
+            <a:off x="6998818" y="2258568"/>
+            <a:ext cx="1581912" cy="292608"/>
+          </a:xfrm>
+          <a:prstGeom prst="rect">
+            <a:avLst>
+              <a:gd name="adj" fmla="val 25000"/>
+            </a:avLst>
+          </a:prstGeom>
+          <a:solidFill>
+            <a:srgbClr val="FCE7F3"/>
+          </a:solidFill>
+          <a:ln w="19050">
+            <a:solidFill>
+              <a:srgbClr val="DB2777"/>
+            </a:solidFill>
+            <a:prstDash val="solid"/>
+          </a:ln>
+          <a:effectLst>
+            <a:outerShdw sx="100000" sy="100000" kx="0" ky="0" algn="bl" rotWithShape="0" blurRad="101600" dist="38100" dir="8100000">
+              <a:srgbClr val="000000">
+                <a:alpha val="12000"/>
+              </a:srgbClr>
+            </a:outerShdw>
+          </a:effectLst>
+        </p:spPr>
+      </p:sp>
+      <p:sp>
+        <p:nvSpPr>
+          <p:cNvPr id="26" name="Text 24"/>
+          <p:cNvSpPr/>
+          <p:nvPr/>
+        </p:nvSpPr>
+        <p:spPr>
+          <a:xfrm>
+            <a:off x="6998818" y="2258568"/>
+            <a:ext cx="1581912" cy="292608"/>
+          </a:xfrm>
+          <a:prstGeom prst="rect">
+            <a:avLst/>
+          </a:prstGeom>
+          <a:noFill/>
+          <a:ln/>
+        </p:spPr>
+        <p:txBody>
+          <a:bodyPr wrap="square" lIns="0" tIns="0" rIns="0" bIns="0" rtlCol="0" anchor="ctr"/>
+          <a:lstStyle/>
+          <a:p>
+            <a:pPr algn="ctr" indent="0" marL="0">
+              <a:buNone/>
+            </a:pPr>
+            <a:r>
+              <a:rPr lang="en-US" sz="1300" b="1" dirty="0">
+                <a:solidFill>
+                  <a:srgbClr val="9D174D"/>
+                </a:solidFill>
+                <a:latin typeface="Trebuchet MS" pitchFamily="34" charset="0"/>
+                <a:ea typeface="Trebuchet MS" pitchFamily="34" charset="-122"/>
+                <a:cs typeface="Trebuchet MS" pitchFamily="34" charset="-120"/>
+              </a:rPr>
+              <a:t>ed</a:t>
+            </a:r>
+            <a:endParaRPr lang="en-US" sz="1300" dirty="0"/>
+          </a:p>
+        </p:txBody>
+      </p:sp>
+      <p:sp>
+        <p:nvSpPr>
+          <p:cNvPr id="27" name="Text 25"/>
+          <p:cNvSpPr/>
+          <p:nvPr/>
+        </p:nvSpPr>
+        <p:spPr>
+          <a:xfrm>
+            <a:off x="6998818" y="2569464"/>
+            <a:ext cx="1581912" cy="201168"/>
+          </a:xfrm>
+          <a:prstGeom prst="rect">
+            <a:avLst/>
+          </a:prstGeom>
+          <a:noFill/>
+          <a:ln/>
+        </p:spPr>
+        <p:txBody>
+          <a:bodyPr wrap="square" lIns="0" tIns="0" rIns="0" bIns="0" rtlCol="0" anchor="t"/>
+          <a:lstStyle/>
+          <a:p>
+            <a:pPr algn="ctr" indent="0" marL="0">
+              <a:buNone/>
+            </a:pPr>
+            <a:r>
+              <a:rPr lang="en-US" sz="850" dirty="0">
+                <a:solidFill>
+                  <a:srgbClr val="475569"/>
+                </a:solidFill>
+                <a:latin typeface="Calibri" pitchFamily="34" charset="0"/>
+                <a:ea typeface="Calibri" pitchFamily="34" charset="-122"/>
+                <a:cs typeface="Calibri" pitchFamily="34" charset="-120"/>
+              </a:rPr>
+              <a:t>past tense</a:t>
+            </a:r>
+            <a:endParaRPr lang="en-US" sz="850" dirty="0"/>
+          </a:p>
+        </p:txBody>
+      </p:sp>
+      <p:sp>
+        <p:nvSpPr>
+          <p:cNvPr id="28" name="Shape 26"/>
           <p:cNvSpPr/>
           <p:nvPr/>
         </p:nvSpPr>
@@ -30603,7 +33244,7 @@
       </p:sp>
       <p:sp>
         <p:nvSpPr>
-          <p:cNvPr id="23" name="Text 21"/>
+          <p:cNvPr id="29" name="Text 27"/>
           <p:cNvSpPr/>
           <p:nvPr/>
         </p:nvSpPr>
@@ -30642,7 +33283,7 @@
       </p:sp>
       <p:sp>
         <p:nvSpPr>
-          <p:cNvPr id="24" name="Shape 22"/>
+          <p:cNvPr id="30" name="Shape 28"/>
           <p:cNvSpPr/>
           <p:nvPr/>
         </p:nvSpPr>
@@ -30669,7 +33310,7 @@
       </p:sp>
       <p:sp>
         <p:nvSpPr>
-          <p:cNvPr id="25" name="Text 23"/>
+          <p:cNvPr id="31" name="Text 29"/>
           <p:cNvSpPr/>
           <p:nvPr/>
         </p:nvSpPr>
@@ -30708,7 +33349,7 @@
       </p:sp>
       <p:sp>
         <p:nvSpPr>
-          <p:cNvPr id="26" name="Shape 24"/>
+          <p:cNvPr id="32" name="Shape 30"/>
           <p:cNvSpPr/>
           <p:nvPr/>
         </p:nvSpPr>
@@ -30735,7 +33376,7 @@
       </p:sp>
       <p:sp>
         <p:nvSpPr>
-          <p:cNvPr id="27" name="Text 25"/>
+          <p:cNvPr id="33" name="Text 31"/>
           <p:cNvSpPr/>
           <p:nvPr/>
         </p:nvSpPr>
@@ -30774,7 +33415,7 @@
       </p:sp>
       <p:sp>
         <p:nvSpPr>
-          <p:cNvPr id="28" name="Shape 26"/>
+          <p:cNvPr id="34" name="Shape 32"/>
           <p:cNvSpPr/>
           <p:nvPr/>
         </p:nvSpPr>
@@ -30801,7 +33442,7 @@
       </p:sp>
       <p:sp>
         <p:nvSpPr>
-          <p:cNvPr id="29" name="Text 27"/>
+          <p:cNvPr id="35" name="Text 33"/>
           <p:cNvSpPr/>
           <p:nvPr/>
         </p:nvSpPr>
@@ -31124,7 +33765,7 @@
                 <a:ea typeface="Calibri" pitchFamily="34" charset="-122"/>
                 <a:cs typeface="Calibri" pitchFamily="34" charset="-120"/>
               </a:rPr>
-              <a:t>Word Labs  •  wordlabs.app  •  Root: 'transport' = carry across or over</a:t>
+              <a:t>Word Labs  •  wordlabs.app  •  Root: 'transport' = carry across or beyond</a:t>
             </a:r>
             <a:endParaRPr lang="en-US" sz="800" dirty="0"/>
           </a:p>
@@ -31263,7 +33904,7 @@
                 <a:ea typeface="Trebuchet MS" pitchFamily="34" charset="-122"/>
                 <a:cs typeface="Trebuchet MS" pitchFamily="34" charset="-120"/>
               </a:rPr>
-              <a:t>transportation</a:t>
+              <a:t>retransported</a:t>
             </a:r>
             <a:endParaRPr lang="en-US" sz="2800" dirty="0"/>
           </a:p>
@@ -31343,8 +33984,8 @@
         </p:nvSpPr>
         <p:spPr>
           <a:xfrm>
-            <a:off x="2938272" y="2258568"/>
-            <a:ext cx="1828800" cy="292608"/>
+            <a:off x="1989734" y="2258568"/>
+            <a:ext cx="1581912" cy="292608"/>
           </a:xfrm>
           <a:prstGeom prst="rect">
             <a:avLst>
@@ -31352,11 +33993,11 @@
             </a:avLst>
           </a:prstGeom>
           <a:solidFill>
-            <a:srgbClr val="CCFBF1"/>
+            <a:srgbClr val="DDD6FE"/>
           </a:solidFill>
           <a:ln w="19050">
             <a:solidFill>
-              <a:srgbClr val="0D9488"/>
+              <a:srgbClr val="7C3AED"/>
             </a:solidFill>
             <a:prstDash val="solid"/>
           </a:ln>
@@ -31377,8 +34018,8 @@
         </p:nvSpPr>
         <p:spPr>
           <a:xfrm>
-            <a:off x="2938272" y="2258568"/>
-            <a:ext cx="1828800" cy="292608"/>
+            <a:off x="1989734" y="2258568"/>
+            <a:ext cx="1581912" cy="292608"/>
           </a:xfrm>
           <a:prstGeom prst="rect">
             <a:avLst/>
@@ -31396,13 +34037,13 @@
             <a:r>
               <a:rPr lang="en-US" sz="1300" b="1" dirty="0">
                 <a:solidFill>
-                  <a:srgbClr val="0F766E"/>
+                  <a:srgbClr val="4C1D95"/>
                 </a:solidFill>
                 <a:latin typeface="Trebuchet MS" pitchFamily="34" charset="0"/>
                 <a:ea typeface="Trebuchet MS" pitchFamily="34" charset="-122"/>
                 <a:cs typeface="Trebuchet MS" pitchFamily="34" charset="-120"/>
               </a:rPr>
-              <a:t>transport</a:t>
+              <a:t>re</a:t>
             </a:r>
             <a:endParaRPr lang="en-US" sz="1300" dirty="0"/>
           </a:p>
@@ -31416,8 +34057,8 @@
         </p:nvSpPr>
         <p:spPr>
           <a:xfrm>
-            <a:off x="2938272" y="2569464"/>
-            <a:ext cx="1828800" cy="201168"/>
+            <a:off x="1989734" y="2569464"/>
+            <a:ext cx="1581912" cy="201168"/>
           </a:xfrm>
           <a:prstGeom prst="rect">
             <a:avLst/>
@@ -31441,7 +34082,7 @@
                 <a:ea typeface="Calibri" pitchFamily="34" charset="-122"/>
                 <a:cs typeface="Calibri" pitchFamily="34" charset="-120"/>
               </a:rPr>
-              <a:t>carry across</a:t>
+              <a:t>again</a:t>
             </a:r>
             <a:endParaRPr lang="en-US" sz="850" dirty="0"/>
           </a:p>
@@ -31455,8 +34096,8 @@
         </p:nvSpPr>
         <p:spPr>
           <a:xfrm>
-            <a:off x="5803392" y="2258568"/>
-            <a:ext cx="1828800" cy="292608"/>
+            <a:off x="3659429" y="2258568"/>
+            <a:ext cx="1581912" cy="292608"/>
           </a:xfrm>
           <a:prstGeom prst="rect">
             <a:avLst>
@@ -31489,8 +34130,8 @@
         </p:nvSpPr>
         <p:spPr>
           <a:xfrm>
-            <a:off x="5803392" y="2258568"/>
-            <a:ext cx="1828800" cy="292608"/>
+            <a:off x="3659429" y="2258568"/>
+            <a:ext cx="1581912" cy="292608"/>
           </a:xfrm>
           <a:prstGeom prst="rect">
             <a:avLst/>
@@ -31514,7 +34155,7 @@
                 <a:ea typeface="Trebuchet MS" pitchFamily="34" charset="-122"/>
                 <a:cs typeface="Trebuchet MS" pitchFamily="34" charset="-120"/>
               </a:rPr>
-              <a:t>ation</a:t>
+              <a:t>trans</a:t>
             </a:r>
             <a:endParaRPr lang="en-US" sz="1300" dirty="0"/>
           </a:p>
@@ -31528,8 +34169,8 @@
         </p:nvSpPr>
         <p:spPr>
           <a:xfrm>
-            <a:off x="5803392" y="2569464"/>
-            <a:ext cx="1828800" cy="201168"/>
+            <a:off x="3659429" y="2569464"/>
+            <a:ext cx="1581912" cy="201168"/>
           </a:xfrm>
           <a:prstGeom prst="rect">
             <a:avLst/>
@@ -31553,7 +34194,7 @@
                 <a:ea typeface="Calibri" pitchFamily="34" charset="-122"/>
                 <a:cs typeface="Calibri" pitchFamily="34" charset="-120"/>
               </a:rPr>
-              <a:t>the act or process of</a:t>
+              <a:t>across, beyond</a:t>
             </a:r>
             <a:endParaRPr lang="en-US" sz="850" dirty="0"/>
           </a:p>
@@ -31562,6 +34203,230 @@
       <p:sp>
         <p:nvSpPr>
           <p:cNvPr id="22" name="Shape 20"/>
+          <p:cNvSpPr/>
+          <p:nvPr/>
+        </p:nvSpPr>
+        <p:spPr>
+          <a:xfrm>
+            <a:off x="5329123" y="2258568"/>
+            <a:ext cx="1581912" cy="292608"/>
+          </a:xfrm>
+          <a:prstGeom prst="rect">
+            <a:avLst>
+              <a:gd name="adj" fmla="val 25000"/>
+            </a:avLst>
+          </a:prstGeom>
+          <a:solidFill>
+            <a:srgbClr val="FCE7F3"/>
+          </a:solidFill>
+          <a:ln w="19050">
+            <a:solidFill>
+              <a:srgbClr val="DB2777"/>
+            </a:solidFill>
+            <a:prstDash val="solid"/>
+          </a:ln>
+          <a:effectLst>
+            <a:outerShdw sx="100000" sy="100000" kx="0" ky="0" algn="bl" rotWithShape="0" blurRad="101600" dist="38100" dir="8100000">
+              <a:srgbClr val="000000">
+                <a:alpha val="12000"/>
+              </a:srgbClr>
+            </a:outerShdw>
+          </a:effectLst>
+        </p:spPr>
+      </p:sp>
+      <p:sp>
+        <p:nvSpPr>
+          <p:cNvPr id="23" name="Text 21"/>
+          <p:cNvSpPr/>
+          <p:nvPr/>
+        </p:nvSpPr>
+        <p:spPr>
+          <a:xfrm>
+            <a:off x="5329123" y="2258568"/>
+            <a:ext cx="1581912" cy="292608"/>
+          </a:xfrm>
+          <a:prstGeom prst="rect">
+            <a:avLst/>
+          </a:prstGeom>
+          <a:noFill/>
+          <a:ln/>
+        </p:spPr>
+        <p:txBody>
+          <a:bodyPr wrap="square" lIns="0" tIns="0" rIns="0" bIns="0" rtlCol="0" anchor="ctr"/>
+          <a:lstStyle/>
+          <a:p>
+            <a:pPr algn="ctr" indent="0" marL="0">
+              <a:buNone/>
+            </a:pPr>
+            <a:r>
+              <a:rPr lang="en-US" sz="1300" b="1" dirty="0">
+                <a:solidFill>
+                  <a:srgbClr val="9D174D"/>
+                </a:solidFill>
+                <a:latin typeface="Trebuchet MS" pitchFamily="34" charset="0"/>
+                <a:ea typeface="Trebuchet MS" pitchFamily="34" charset="-122"/>
+                <a:cs typeface="Trebuchet MS" pitchFamily="34" charset="-120"/>
+              </a:rPr>
+              <a:t>port</a:t>
+            </a:r>
+            <a:endParaRPr lang="en-US" sz="1300" dirty="0"/>
+          </a:p>
+        </p:txBody>
+      </p:sp>
+      <p:sp>
+        <p:nvSpPr>
+          <p:cNvPr id="24" name="Text 22"/>
+          <p:cNvSpPr/>
+          <p:nvPr/>
+        </p:nvSpPr>
+        <p:spPr>
+          <a:xfrm>
+            <a:off x="5329123" y="2569464"/>
+            <a:ext cx="1581912" cy="201168"/>
+          </a:xfrm>
+          <a:prstGeom prst="rect">
+            <a:avLst/>
+          </a:prstGeom>
+          <a:noFill/>
+          <a:ln/>
+        </p:spPr>
+        <p:txBody>
+          <a:bodyPr wrap="square" lIns="0" tIns="0" rIns="0" bIns="0" rtlCol="0" anchor="t"/>
+          <a:lstStyle/>
+          <a:p>
+            <a:pPr algn="ctr" indent="0" marL="0">
+              <a:buNone/>
+            </a:pPr>
+            <a:r>
+              <a:rPr lang="en-US" sz="850" dirty="0">
+                <a:solidFill>
+                  <a:srgbClr val="475569"/>
+                </a:solidFill>
+                <a:latin typeface="Calibri" pitchFamily="34" charset="0"/>
+                <a:ea typeface="Calibri" pitchFamily="34" charset="-122"/>
+                <a:cs typeface="Calibri" pitchFamily="34" charset="-120"/>
+              </a:rPr>
+              <a:t>carry</a:t>
+            </a:r>
+            <a:endParaRPr lang="en-US" sz="850" dirty="0"/>
+          </a:p>
+        </p:txBody>
+      </p:sp>
+      <p:sp>
+        <p:nvSpPr>
+          <p:cNvPr id="25" name="Shape 23"/>
+          <p:cNvSpPr/>
+          <p:nvPr/>
+        </p:nvSpPr>
+        <p:spPr>
+          <a:xfrm>
+            <a:off x="6998818" y="2258568"/>
+            <a:ext cx="1581912" cy="292608"/>
+          </a:xfrm>
+          <a:prstGeom prst="rect">
+            <a:avLst>
+              <a:gd name="adj" fmla="val 25000"/>
+            </a:avLst>
+          </a:prstGeom>
+          <a:solidFill>
+            <a:srgbClr val="FCE7F3"/>
+          </a:solidFill>
+          <a:ln w="19050">
+            <a:solidFill>
+              <a:srgbClr val="DB2777"/>
+            </a:solidFill>
+            <a:prstDash val="solid"/>
+          </a:ln>
+          <a:effectLst>
+            <a:outerShdw sx="100000" sy="100000" kx="0" ky="0" algn="bl" rotWithShape="0" blurRad="101600" dist="38100" dir="8100000">
+              <a:srgbClr val="000000">
+                <a:alpha val="12000"/>
+              </a:srgbClr>
+            </a:outerShdw>
+          </a:effectLst>
+        </p:spPr>
+      </p:sp>
+      <p:sp>
+        <p:nvSpPr>
+          <p:cNvPr id="26" name="Text 24"/>
+          <p:cNvSpPr/>
+          <p:nvPr/>
+        </p:nvSpPr>
+        <p:spPr>
+          <a:xfrm>
+            <a:off x="6998818" y="2258568"/>
+            <a:ext cx="1581912" cy="292608"/>
+          </a:xfrm>
+          <a:prstGeom prst="rect">
+            <a:avLst/>
+          </a:prstGeom>
+          <a:noFill/>
+          <a:ln/>
+        </p:spPr>
+        <p:txBody>
+          <a:bodyPr wrap="square" lIns="0" tIns="0" rIns="0" bIns="0" rtlCol="0" anchor="ctr"/>
+          <a:lstStyle/>
+          <a:p>
+            <a:pPr algn="ctr" indent="0" marL="0">
+              <a:buNone/>
+            </a:pPr>
+            <a:r>
+              <a:rPr lang="en-US" sz="1300" b="1" dirty="0">
+                <a:solidFill>
+                  <a:srgbClr val="9D174D"/>
+                </a:solidFill>
+                <a:latin typeface="Trebuchet MS" pitchFamily="34" charset="0"/>
+                <a:ea typeface="Trebuchet MS" pitchFamily="34" charset="-122"/>
+                <a:cs typeface="Trebuchet MS" pitchFamily="34" charset="-120"/>
+              </a:rPr>
+              <a:t>ed</a:t>
+            </a:r>
+            <a:endParaRPr lang="en-US" sz="1300" dirty="0"/>
+          </a:p>
+        </p:txBody>
+      </p:sp>
+      <p:sp>
+        <p:nvSpPr>
+          <p:cNvPr id="27" name="Text 25"/>
+          <p:cNvSpPr/>
+          <p:nvPr/>
+        </p:nvSpPr>
+        <p:spPr>
+          <a:xfrm>
+            <a:off x="6998818" y="2569464"/>
+            <a:ext cx="1581912" cy="201168"/>
+          </a:xfrm>
+          <a:prstGeom prst="rect">
+            <a:avLst/>
+          </a:prstGeom>
+          <a:noFill/>
+          <a:ln/>
+        </p:spPr>
+        <p:txBody>
+          <a:bodyPr wrap="square" lIns="0" tIns="0" rIns="0" bIns="0" rtlCol="0" anchor="t"/>
+          <a:lstStyle/>
+          <a:p>
+            <a:pPr algn="ctr" indent="0" marL="0">
+              <a:buNone/>
+            </a:pPr>
+            <a:r>
+              <a:rPr lang="en-US" sz="850" dirty="0">
+                <a:solidFill>
+                  <a:srgbClr val="475569"/>
+                </a:solidFill>
+                <a:latin typeface="Calibri" pitchFamily="34" charset="0"/>
+                <a:ea typeface="Calibri" pitchFamily="34" charset="-122"/>
+                <a:cs typeface="Calibri" pitchFamily="34" charset="-120"/>
+              </a:rPr>
+              <a:t>past tense</a:t>
+            </a:r>
+            <a:endParaRPr lang="en-US" sz="850" dirty="0"/>
+          </a:p>
+        </p:txBody>
+      </p:sp>
+      <p:sp>
+        <p:nvSpPr>
+          <p:cNvPr id="28" name="Shape 26"/>
           <p:cNvSpPr/>
           <p:nvPr/>
         </p:nvSpPr>
@@ -31588,7 +34453,7 @@
       </p:sp>
       <p:sp>
         <p:nvSpPr>
-          <p:cNvPr id="23" name="Text 21"/>
+          <p:cNvPr id="29" name="Text 27"/>
           <p:cNvSpPr/>
           <p:nvPr/>
         </p:nvSpPr>
@@ -31627,7 +34492,7 @@
       </p:sp>
       <p:sp>
         <p:nvSpPr>
-          <p:cNvPr id="24" name="Shape 22"/>
+          <p:cNvPr id="30" name="Shape 28"/>
           <p:cNvSpPr/>
           <p:nvPr/>
         </p:nvSpPr>
@@ -31654,7 +34519,7 @@
       </p:sp>
       <p:sp>
         <p:nvSpPr>
-          <p:cNvPr id="25" name="Shape 23"/>
+          <p:cNvPr id="31" name="Shape 29"/>
           <p:cNvSpPr/>
           <p:nvPr/>
         </p:nvSpPr>
@@ -31681,7 +34546,7 @@
       </p:sp>
       <p:sp>
         <p:nvSpPr>
-          <p:cNvPr id="26" name="Text 24"/>
+          <p:cNvPr id="32" name="Text 30"/>
           <p:cNvSpPr/>
           <p:nvPr/>
         </p:nvSpPr>
@@ -31712,7 +34577,7 @@
                 <a:ea typeface="Trebuchet MS" pitchFamily="34" charset="-122"/>
                 <a:cs typeface="Trebuchet MS" pitchFamily="34" charset="-120"/>
               </a:rPr>
-              <a:t>trans</a:t>
+              <a:t>re</a:t>
             </a:r>
             <a:endParaRPr lang="en-US" sz="1400" dirty="0"/>
           </a:p>
@@ -31720,7 +34585,7 @@
       </p:sp>
       <p:sp>
         <p:nvSpPr>
-          <p:cNvPr id="27" name="Text 25"/>
+          <p:cNvPr id="33" name="Text 31"/>
           <p:cNvSpPr/>
           <p:nvPr/>
         </p:nvSpPr>
@@ -31759,7 +34624,7 @@
       </p:sp>
       <p:sp>
         <p:nvSpPr>
-          <p:cNvPr id="28" name="Shape 26"/>
+          <p:cNvPr id="34" name="Shape 32"/>
           <p:cNvSpPr/>
           <p:nvPr/>
         </p:nvSpPr>
@@ -31786,7 +34651,7 @@
       </p:sp>
       <p:sp>
         <p:nvSpPr>
-          <p:cNvPr id="29" name="Text 27"/>
+          <p:cNvPr id="35" name="Text 33"/>
           <p:cNvSpPr/>
           <p:nvPr/>
         </p:nvSpPr>
@@ -31817,7 +34682,7 @@
                 <a:ea typeface="Trebuchet MS" pitchFamily="34" charset="-122"/>
                 <a:cs typeface="Trebuchet MS" pitchFamily="34" charset="-120"/>
               </a:rPr>
-              <a:t>por</a:t>
+              <a:t>trans</a:t>
             </a:r>
             <a:endParaRPr lang="en-US" sz="1400" dirty="0"/>
           </a:p>
@@ -31825,7 +34690,7 @@
       </p:sp>
       <p:sp>
         <p:nvSpPr>
-          <p:cNvPr id="30" name="Text 28"/>
+          <p:cNvPr id="36" name="Text 34"/>
           <p:cNvSpPr/>
           <p:nvPr/>
         </p:nvSpPr>
@@ -31864,7 +34729,7 @@
       </p:sp>
       <p:sp>
         <p:nvSpPr>
-          <p:cNvPr id="31" name="Shape 29"/>
+          <p:cNvPr id="37" name="Shape 35"/>
           <p:cNvSpPr/>
           <p:nvPr/>
         </p:nvSpPr>
@@ -31891,7 +34756,7 @@
       </p:sp>
       <p:sp>
         <p:nvSpPr>
-          <p:cNvPr id="32" name="Text 30"/>
+          <p:cNvPr id="38" name="Text 36"/>
           <p:cNvSpPr/>
           <p:nvPr/>
         </p:nvSpPr>
@@ -31922,7 +34787,7 @@
                 <a:ea typeface="Trebuchet MS" pitchFamily="34" charset="-122"/>
                 <a:cs typeface="Trebuchet MS" pitchFamily="34" charset="-120"/>
               </a:rPr>
-              <a:t>ta</a:t>
+              <a:t>por</a:t>
             </a:r>
             <a:endParaRPr lang="en-US" sz="1400" dirty="0"/>
           </a:p>
@@ -31930,7 +34795,7 @@
       </p:sp>
       <p:sp>
         <p:nvSpPr>
-          <p:cNvPr id="33" name="Text 31"/>
+          <p:cNvPr id="39" name="Text 37"/>
           <p:cNvSpPr/>
           <p:nvPr/>
         </p:nvSpPr>
@@ -31969,7 +34834,7 @@
       </p:sp>
       <p:sp>
         <p:nvSpPr>
-          <p:cNvPr id="34" name="Shape 32"/>
+          <p:cNvPr id="40" name="Shape 38"/>
           <p:cNvSpPr/>
           <p:nvPr/>
         </p:nvSpPr>
@@ -31996,7 +34861,7 @@
       </p:sp>
       <p:sp>
         <p:nvSpPr>
-          <p:cNvPr id="35" name="Text 33"/>
+          <p:cNvPr id="41" name="Text 39"/>
           <p:cNvSpPr/>
           <p:nvPr/>
         </p:nvSpPr>
@@ -32027,7 +34892,7 @@
                 <a:ea typeface="Trebuchet MS" pitchFamily="34" charset="-122"/>
                 <a:cs typeface="Trebuchet MS" pitchFamily="34" charset="-120"/>
               </a:rPr>
-              <a:t>tion</a:t>
+              <a:t>ted</a:t>
             </a:r>
             <a:endParaRPr lang="en-US" sz="1400" dirty="0"/>
           </a:p>
@@ -32035,7 +34900,7 @@
       </p:sp>
       <p:sp>
         <p:nvSpPr>
-          <p:cNvPr id="36" name="Shape 34"/>
+          <p:cNvPr id="42" name="Shape 40"/>
           <p:cNvSpPr/>
           <p:nvPr/>
         </p:nvSpPr>
@@ -32062,7 +34927,7 @@
       </p:sp>
       <p:sp>
         <p:nvSpPr>
-          <p:cNvPr id="37" name="Text 35"/>
+          <p:cNvPr id="43" name="Text 41"/>
           <p:cNvSpPr/>
           <p:nvPr/>
         </p:nvSpPr>
@@ -32101,7 +34966,7 @@
       </p:sp>
       <p:sp>
         <p:nvSpPr>
-          <p:cNvPr id="38" name="Shape 36"/>
+          <p:cNvPr id="44" name="Shape 42"/>
           <p:cNvSpPr/>
           <p:nvPr/>
         </p:nvSpPr>
@@ -32128,7 +34993,7 @@
       </p:sp>
       <p:sp>
         <p:nvSpPr>
-          <p:cNvPr id="39" name="Text 37"/>
+          <p:cNvPr id="45" name="Text 43"/>
           <p:cNvSpPr/>
           <p:nvPr/>
         </p:nvSpPr>
@@ -32451,7 +35316,7 @@
                 <a:ea typeface="Calibri" pitchFamily="34" charset="-122"/>
                 <a:cs typeface="Calibri" pitchFamily="34" charset="-120"/>
               </a:rPr>
-              <a:t>Word Labs  •  wordlabs.app  •  Root: 'transport' = carry across or over</a:t>
+              <a:t>Word Labs  •  wordlabs.app  •  Root: 'transport' = carry across or beyond</a:t>
             </a:r>
             <a:endParaRPr lang="en-US" sz="800" dirty="0"/>
           </a:p>
@@ -32590,7 +35455,7 @@
                 <a:ea typeface="Trebuchet MS" pitchFamily="34" charset="-122"/>
                 <a:cs typeface="Trebuchet MS" pitchFamily="34" charset="-120"/>
               </a:rPr>
-              <a:t>transportation</a:t>
+              <a:t>retransported</a:t>
             </a:r>
             <a:endParaRPr lang="en-US" sz="2800" dirty="0"/>
           </a:p>
@@ -32670,8 +35535,8 @@
         </p:nvSpPr>
         <p:spPr>
           <a:xfrm>
-            <a:off x="2938272" y="2258568"/>
-            <a:ext cx="1828800" cy="292608"/>
+            <a:off x="1989734" y="2258568"/>
+            <a:ext cx="1581912" cy="292608"/>
           </a:xfrm>
           <a:prstGeom prst="rect">
             <a:avLst>
@@ -32679,11 +35544,11 @@
             </a:avLst>
           </a:prstGeom>
           <a:solidFill>
-            <a:srgbClr val="CCFBF1"/>
+            <a:srgbClr val="DDD6FE"/>
           </a:solidFill>
           <a:ln w="19050">
             <a:solidFill>
-              <a:srgbClr val="0D9488"/>
+              <a:srgbClr val="7C3AED"/>
             </a:solidFill>
             <a:prstDash val="solid"/>
           </a:ln>
@@ -32704,8 +35569,8 @@
         </p:nvSpPr>
         <p:spPr>
           <a:xfrm>
-            <a:off x="2938272" y="2258568"/>
-            <a:ext cx="1828800" cy="292608"/>
+            <a:off x="1989734" y="2258568"/>
+            <a:ext cx="1581912" cy="292608"/>
           </a:xfrm>
           <a:prstGeom prst="rect">
             <a:avLst/>
@@ -32723,13 +35588,13 @@
             <a:r>
               <a:rPr lang="en-US" sz="1300" b="1" dirty="0">
                 <a:solidFill>
-                  <a:srgbClr val="0F766E"/>
+                  <a:srgbClr val="4C1D95"/>
                 </a:solidFill>
                 <a:latin typeface="Trebuchet MS" pitchFamily="34" charset="0"/>
                 <a:ea typeface="Trebuchet MS" pitchFamily="34" charset="-122"/>
                 <a:cs typeface="Trebuchet MS" pitchFamily="34" charset="-120"/>
               </a:rPr>
-              <a:t>transport</a:t>
+              <a:t>re</a:t>
             </a:r>
             <a:endParaRPr lang="en-US" sz="1300" dirty="0"/>
           </a:p>
@@ -32743,8 +35608,8 @@
         </p:nvSpPr>
         <p:spPr>
           <a:xfrm>
-            <a:off x="2938272" y="2569464"/>
-            <a:ext cx="1828800" cy="201168"/>
+            <a:off x="1989734" y="2569464"/>
+            <a:ext cx="1581912" cy="201168"/>
           </a:xfrm>
           <a:prstGeom prst="rect">
             <a:avLst/>
@@ -32768,7 +35633,7 @@
                 <a:ea typeface="Calibri" pitchFamily="34" charset="-122"/>
                 <a:cs typeface="Calibri" pitchFamily="34" charset="-120"/>
               </a:rPr>
-              <a:t>carry across</a:t>
+              <a:t>again</a:t>
             </a:r>
             <a:endParaRPr lang="en-US" sz="850" dirty="0"/>
           </a:p>
@@ -32782,8 +35647,8 @@
         </p:nvSpPr>
         <p:spPr>
           <a:xfrm>
-            <a:off x="5803392" y="2258568"/>
-            <a:ext cx="1828800" cy="292608"/>
+            <a:off x="3659429" y="2258568"/>
+            <a:ext cx="1581912" cy="292608"/>
           </a:xfrm>
           <a:prstGeom prst="rect">
             <a:avLst>
@@ -32816,8 +35681,8 @@
         </p:nvSpPr>
         <p:spPr>
           <a:xfrm>
-            <a:off x="5803392" y="2258568"/>
-            <a:ext cx="1828800" cy="292608"/>
+            <a:off x="3659429" y="2258568"/>
+            <a:ext cx="1581912" cy="292608"/>
           </a:xfrm>
           <a:prstGeom prst="rect">
             <a:avLst/>
@@ -32841,7 +35706,7 @@
                 <a:ea typeface="Trebuchet MS" pitchFamily="34" charset="-122"/>
                 <a:cs typeface="Trebuchet MS" pitchFamily="34" charset="-120"/>
               </a:rPr>
-              <a:t>ation</a:t>
+              <a:t>trans</a:t>
             </a:r>
             <a:endParaRPr lang="en-US" sz="1300" dirty="0"/>
           </a:p>
@@ -32855,8 +35720,8 @@
         </p:nvSpPr>
         <p:spPr>
           <a:xfrm>
-            <a:off x="5803392" y="2569464"/>
-            <a:ext cx="1828800" cy="201168"/>
+            <a:off x="3659429" y="2569464"/>
+            <a:ext cx="1581912" cy="201168"/>
           </a:xfrm>
           <a:prstGeom prst="rect">
             <a:avLst/>
@@ -32880,7 +35745,7 @@
                 <a:ea typeface="Calibri" pitchFamily="34" charset="-122"/>
                 <a:cs typeface="Calibri" pitchFamily="34" charset="-120"/>
               </a:rPr>
-              <a:t>the act or process of</a:t>
+              <a:t>across, beyond</a:t>
             </a:r>
             <a:endParaRPr lang="en-US" sz="850" dirty="0"/>
           </a:p>
@@ -32889,6 +35754,230 @@
       <p:sp>
         <p:nvSpPr>
           <p:cNvPr id="22" name="Shape 20"/>
+          <p:cNvSpPr/>
+          <p:nvPr/>
+        </p:nvSpPr>
+        <p:spPr>
+          <a:xfrm>
+            <a:off x="5329123" y="2258568"/>
+            <a:ext cx="1581912" cy="292608"/>
+          </a:xfrm>
+          <a:prstGeom prst="rect">
+            <a:avLst>
+              <a:gd name="adj" fmla="val 25000"/>
+            </a:avLst>
+          </a:prstGeom>
+          <a:solidFill>
+            <a:srgbClr val="FCE7F3"/>
+          </a:solidFill>
+          <a:ln w="19050">
+            <a:solidFill>
+              <a:srgbClr val="DB2777"/>
+            </a:solidFill>
+            <a:prstDash val="solid"/>
+          </a:ln>
+          <a:effectLst>
+            <a:outerShdw sx="100000" sy="100000" kx="0" ky="0" algn="bl" rotWithShape="0" blurRad="101600" dist="38100" dir="8100000">
+              <a:srgbClr val="000000">
+                <a:alpha val="12000"/>
+              </a:srgbClr>
+            </a:outerShdw>
+          </a:effectLst>
+        </p:spPr>
+      </p:sp>
+      <p:sp>
+        <p:nvSpPr>
+          <p:cNvPr id="23" name="Text 21"/>
+          <p:cNvSpPr/>
+          <p:nvPr/>
+        </p:nvSpPr>
+        <p:spPr>
+          <a:xfrm>
+            <a:off x="5329123" y="2258568"/>
+            <a:ext cx="1581912" cy="292608"/>
+          </a:xfrm>
+          <a:prstGeom prst="rect">
+            <a:avLst/>
+          </a:prstGeom>
+          <a:noFill/>
+          <a:ln/>
+        </p:spPr>
+        <p:txBody>
+          <a:bodyPr wrap="square" lIns="0" tIns="0" rIns="0" bIns="0" rtlCol="0" anchor="ctr"/>
+          <a:lstStyle/>
+          <a:p>
+            <a:pPr algn="ctr" indent="0" marL="0">
+              <a:buNone/>
+            </a:pPr>
+            <a:r>
+              <a:rPr lang="en-US" sz="1300" b="1" dirty="0">
+                <a:solidFill>
+                  <a:srgbClr val="9D174D"/>
+                </a:solidFill>
+                <a:latin typeface="Trebuchet MS" pitchFamily="34" charset="0"/>
+                <a:ea typeface="Trebuchet MS" pitchFamily="34" charset="-122"/>
+                <a:cs typeface="Trebuchet MS" pitchFamily="34" charset="-120"/>
+              </a:rPr>
+              <a:t>port</a:t>
+            </a:r>
+            <a:endParaRPr lang="en-US" sz="1300" dirty="0"/>
+          </a:p>
+        </p:txBody>
+      </p:sp>
+      <p:sp>
+        <p:nvSpPr>
+          <p:cNvPr id="24" name="Text 22"/>
+          <p:cNvSpPr/>
+          <p:nvPr/>
+        </p:nvSpPr>
+        <p:spPr>
+          <a:xfrm>
+            <a:off x="5329123" y="2569464"/>
+            <a:ext cx="1581912" cy="201168"/>
+          </a:xfrm>
+          <a:prstGeom prst="rect">
+            <a:avLst/>
+          </a:prstGeom>
+          <a:noFill/>
+          <a:ln/>
+        </p:spPr>
+        <p:txBody>
+          <a:bodyPr wrap="square" lIns="0" tIns="0" rIns="0" bIns="0" rtlCol="0" anchor="t"/>
+          <a:lstStyle/>
+          <a:p>
+            <a:pPr algn="ctr" indent="0" marL="0">
+              <a:buNone/>
+            </a:pPr>
+            <a:r>
+              <a:rPr lang="en-US" sz="850" dirty="0">
+                <a:solidFill>
+                  <a:srgbClr val="475569"/>
+                </a:solidFill>
+                <a:latin typeface="Calibri" pitchFamily="34" charset="0"/>
+                <a:ea typeface="Calibri" pitchFamily="34" charset="-122"/>
+                <a:cs typeface="Calibri" pitchFamily="34" charset="-120"/>
+              </a:rPr>
+              <a:t>carry</a:t>
+            </a:r>
+            <a:endParaRPr lang="en-US" sz="850" dirty="0"/>
+          </a:p>
+        </p:txBody>
+      </p:sp>
+      <p:sp>
+        <p:nvSpPr>
+          <p:cNvPr id="25" name="Shape 23"/>
+          <p:cNvSpPr/>
+          <p:nvPr/>
+        </p:nvSpPr>
+        <p:spPr>
+          <a:xfrm>
+            <a:off x="6998818" y="2258568"/>
+            <a:ext cx="1581912" cy="292608"/>
+          </a:xfrm>
+          <a:prstGeom prst="rect">
+            <a:avLst>
+              <a:gd name="adj" fmla="val 25000"/>
+            </a:avLst>
+          </a:prstGeom>
+          <a:solidFill>
+            <a:srgbClr val="FCE7F3"/>
+          </a:solidFill>
+          <a:ln w="19050">
+            <a:solidFill>
+              <a:srgbClr val="DB2777"/>
+            </a:solidFill>
+            <a:prstDash val="solid"/>
+          </a:ln>
+          <a:effectLst>
+            <a:outerShdw sx="100000" sy="100000" kx="0" ky="0" algn="bl" rotWithShape="0" blurRad="101600" dist="38100" dir="8100000">
+              <a:srgbClr val="000000">
+                <a:alpha val="12000"/>
+              </a:srgbClr>
+            </a:outerShdw>
+          </a:effectLst>
+        </p:spPr>
+      </p:sp>
+      <p:sp>
+        <p:nvSpPr>
+          <p:cNvPr id="26" name="Text 24"/>
+          <p:cNvSpPr/>
+          <p:nvPr/>
+        </p:nvSpPr>
+        <p:spPr>
+          <a:xfrm>
+            <a:off x="6998818" y="2258568"/>
+            <a:ext cx="1581912" cy="292608"/>
+          </a:xfrm>
+          <a:prstGeom prst="rect">
+            <a:avLst/>
+          </a:prstGeom>
+          <a:noFill/>
+          <a:ln/>
+        </p:spPr>
+        <p:txBody>
+          <a:bodyPr wrap="square" lIns="0" tIns="0" rIns="0" bIns="0" rtlCol="0" anchor="ctr"/>
+          <a:lstStyle/>
+          <a:p>
+            <a:pPr algn="ctr" indent="0" marL="0">
+              <a:buNone/>
+            </a:pPr>
+            <a:r>
+              <a:rPr lang="en-US" sz="1300" b="1" dirty="0">
+                <a:solidFill>
+                  <a:srgbClr val="9D174D"/>
+                </a:solidFill>
+                <a:latin typeface="Trebuchet MS" pitchFamily="34" charset="0"/>
+                <a:ea typeface="Trebuchet MS" pitchFamily="34" charset="-122"/>
+                <a:cs typeface="Trebuchet MS" pitchFamily="34" charset="-120"/>
+              </a:rPr>
+              <a:t>ed</a:t>
+            </a:r>
+            <a:endParaRPr lang="en-US" sz="1300" dirty="0"/>
+          </a:p>
+        </p:txBody>
+      </p:sp>
+      <p:sp>
+        <p:nvSpPr>
+          <p:cNvPr id="27" name="Text 25"/>
+          <p:cNvSpPr/>
+          <p:nvPr/>
+        </p:nvSpPr>
+        <p:spPr>
+          <a:xfrm>
+            <a:off x="6998818" y="2569464"/>
+            <a:ext cx="1581912" cy="201168"/>
+          </a:xfrm>
+          <a:prstGeom prst="rect">
+            <a:avLst/>
+          </a:prstGeom>
+          <a:noFill/>
+          <a:ln/>
+        </p:spPr>
+        <p:txBody>
+          <a:bodyPr wrap="square" lIns="0" tIns="0" rIns="0" bIns="0" rtlCol="0" anchor="t"/>
+          <a:lstStyle/>
+          <a:p>
+            <a:pPr algn="ctr" indent="0" marL="0">
+              <a:buNone/>
+            </a:pPr>
+            <a:r>
+              <a:rPr lang="en-US" sz="850" dirty="0">
+                <a:solidFill>
+                  <a:srgbClr val="475569"/>
+                </a:solidFill>
+                <a:latin typeface="Calibri" pitchFamily="34" charset="0"/>
+                <a:ea typeface="Calibri" pitchFamily="34" charset="-122"/>
+                <a:cs typeface="Calibri" pitchFamily="34" charset="-120"/>
+              </a:rPr>
+              <a:t>past tense</a:t>
+            </a:r>
+            <a:endParaRPr lang="en-US" sz="850" dirty="0"/>
+          </a:p>
+        </p:txBody>
+      </p:sp>
+      <p:sp>
+        <p:nvSpPr>
+          <p:cNvPr id="28" name="Shape 26"/>
           <p:cNvSpPr/>
           <p:nvPr/>
         </p:nvSpPr>
@@ -32915,7 +36004,7 @@
       </p:sp>
       <p:sp>
         <p:nvSpPr>
-          <p:cNvPr id="23" name="Text 21"/>
+          <p:cNvPr id="29" name="Text 27"/>
           <p:cNvSpPr/>
           <p:nvPr/>
         </p:nvSpPr>
@@ -32954,7 +36043,7 @@
       </p:sp>
       <p:sp>
         <p:nvSpPr>
-          <p:cNvPr id="24" name="Shape 22"/>
+          <p:cNvPr id="30" name="Shape 28"/>
           <p:cNvSpPr/>
           <p:nvPr/>
         </p:nvSpPr>
@@ -32981,7 +36070,7 @@
       </p:sp>
       <p:sp>
         <p:nvSpPr>
-          <p:cNvPr id="25" name="Shape 23"/>
+          <p:cNvPr id="31" name="Shape 29"/>
           <p:cNvSpPr/>
           <p:nvPr/>
         </p:nvSpPr>
@@ -33008,7 +36097,7 @@
       </p:sp>
       <p:sp>
         <p:nvSpPr>
-          <p:cNvPr id="26" name="Text 24"/>
+          <p:cNvPr id="32" name="Text 30"/>
           <p:cNvSpPr/>
           <p:nvPr/>
         </p:nvSpPr>
@@ -33039,7 +36128,7 @@
                 <a:ea typeface="Trebuchet MS" pitchFamily="34" charset="-122"/>
                 <a:cs typeface="Trebuchet MS" pitchFamily="34" charset="-120"/>
               </a:rPr>
-              <a:t>trans</a:t>
+              <a:t>re</a:t>
             </a:r>
             <a:endParaRPr lang="en-US" sz="1400" dirty="0"/>
           </a:p>
@@ -33047,7 +36136,7 @@
       </p:sp>
       <p:sp>
         <p:nvSpPr>
-          <p:cNvPr id="27" name="Text 25"/>
+          <p:cNvPr id="33" name="Text 31"/>
           <p:cNvSpPr/>
           <p:nvPr/>
         </p:nvSpPr>
@@ -33086,7 +36175,7 @@
       </p:sp>
       <p:sp>
         <p:nvSpPr>
-          <p:cNvPr id="28" name="Shape 26"/>
+          <p:cNvPr id="34" name="Shape 32"/>
           <p:cNvSpPr/>
           <p:nvPr/>
         </p:nvSpPr>
@@ -33113,7 +36202,7 @@
       </p:sp>
       <p:sp>
         <p:nvSpPr>
-          <p:cNvPr id="29" name="Text 27"/>
+          <p:cNvPr id="35" name="Text 33"/>
           <p:cNvSpPr/>
           <p:nvPr/>
         </p:nvSpPr>
@@ -33144,7 +36233,7 @@
                 <a:ea typeface="Trebuchet MS" pitchFamily="34" charset="-122"/>
                 <a:cs typeface="Trebuchet MS" pitchFamily="34" charset="-120"/>
               </a:rPr>
-              <a:t>por</a:t>
+              <a:t>trans</a:t>
             </a:r>
             <a:endParaRPr lang="en-US" sz="1400" dirty="0"/>
           </a:p>
@@ -33152,7 +36241,7 @@
       </p:sp>
       <p:sp>
         <p:nvSpPr>
-          <p:cNvPr id="30" name="Text 28"/>
+          <p:cNvPr id="36" name="Text 34"/>
           <p:cNvSpPr/>
           <p:nvPr/>
         </p:nvSpPr>
@@ -33191,7 +36280,7 @@
       </p:sp>
       <p:sp>
         <p:nvSpPr>
-          <p:cNvPr id="31" name="Shape 29"/>
+          <p:cNvPr id="37" name="Shape 35"/>
           <p:cNvSpPr/>
           <p:nvPr/>
         </p:nvSpPr>
@@ -33218,7 +36307,7 @@
       </p:sp>
       <p:sp>
         <p:nvSpPr>
-          <p:cNvPr id="32" name="Text 30"/>
+          <p:cNvPr id="38" name="Text 36"/>
           <p:cNvSpPr/>
           <p:nvPr/>
         </p:nvSpPr>
@@ -33249,7 +36338,7 @@
                 <a:ea typeface="Trebuchet MS" pitchFamily="34" charset="-122"/>
                 <a:cs typeface="Trebuchet MS" pitchFamily="34" charset="-120"/>
               </a:rPr>
-              <a:t>ta</a:t>
+              <a:t>por</a:t>
             </a:r>
             <a:endParaRPr lang="en-US" sz="1400" dirty="0"/>
           </a:p>
@@ -33257,7 +36346,7 @@
       </p:sp>
       <p:sp>
         <p:nvSpPr>
-          <p:cNvPr id="33" name="Text 31"/>
+          <p:cNvPr id="39" name="Text 37"/>
           <p:cNvSpPr/>
           <p:nvPr/>
         </p:nvSpPr>
@@ -33296,7 +36385,7 @@
       </p:sp>
       <p:sp>
         <p:nvSpPr>
-          <p:cNvPr id="34" name="Shape 32"/>
+          <p:cNvPr id="40" name="Shape 38"/>
           <p:cNvSpPr/>
           <p:nvPr/>
         </p:nvSpPr>
@@ -33323,7 +36412,7 @@
       </p:sp>
       <p:sp>
         <p:nvSpPr>
-          <p:cNvPr id="35" name="Text 33"/>
+          <p:cNvPr id="41" name="Text 39"/>
           <p:cNvSpPr/>
           <p:nvPr/>
         </p:nvSpPr>
@@ -33354,7 +36443,7 @@
                 <a:ea typeface="Trebuchet MS" pitchFamily="34" charset="-122"/>
                 <a:cs typeface="Trebuchet MS" pitchFamily="34" charset="-120"/>
               </a:rPr>
-              <a:t>tion</a:t>
+              <a:t>ted</a:t>
             </a:r>
             <a:endParaRPr lang="en-US" sz="1400" dirty="0"/>
           </a:p>
@@ -33362,7 +36451,7 @@
       </p:sp>
       <p:sp>
         <p:nvSpPr>
-          <p:cNvPr id="36" name="Shape 34"/>
+          <p:cNvPr id="42" name="Shape 40"/>
           <p:cNvSpPr/>
           <p:nvPr/>
         </p:nvSpPr>
@@ -33389,7 +36478,7 @@
       </p:sp>
       <p:sp>
         <p:nvSpPr>
-          <p:cNvPr id="37" name="Text 35"/>
+          <p:cNvPr id="43" name="Text 41"/>
           <p:cNvSpPr/>
           <p:nvPr/>
         </p:nvSpPr>
@@ -33428,18 +36517,18 @@
       </p:sp>
       <p:sp>
         <p:nvSpPr>
-          <p:cNvPr id="38" name="Shape 36"/>
+          <p:cNvPr id="44" name="Shape 42"/>
           <p:cNvSpPr/>
           <p:nvPr/>
         </p:nvSpPr>
         <p:spPr>
           <a:xfrm>
             <a:off x="1874520" y="4096512"/>
-            <a:ext cx="6903720" cy="804672"/>
+            <a:ext cx="6903720" cy="658368"/>
           </a:xfrm>
           <a:prstGeom prst="rect">
             <a:avLst>
-              <a:gd name="adj" fmla="val 6818"/>
+              <a:gd name="adj" fmla="val 8333"/>
             </a:avLst>
           </a:prstGeom>
           <a:solidFill>
@@ -33455,18 +36544,18 @@
       </p:sp>
       <p:sp>
         <p:nvSpPr>
-          <p:cNvPr id="39" name="Shape 37"/>
-          <p:cNvSpPr/>
-          <p:nvPr/>
-        </p:nvSpPr>
-        <p:spPr>
-          <a:xfrm>
-            <a:off x="1952596" y="4169664"/>
-            <a:ext cx="493776" cy="384048"/>
+          <p:cNvPr id="45" name="Shape 43"/>
+          <p:cNvSpPr/>
+          <p:nvPr/>
+        </p:nvSpPr>
+        <p:spPr>
+          <a:xfrm>
+            <a:off x="1952244" y="4169664"/>
+            <a:ext cx="543652" cy="475488"/>
           </a:xfrm>
           <a:prstGeom prst="rect">
             <a:avLst>
-              <a:gd name="adj" fmla="val 9524"/>
+              <a:gd name="adj" fmla="val 7692"/>
             </a:avLst>
           </a:prstGeom>
           <a:solidFill>
@@ -33482,14 +36571,14 @@
       </p:sp>
       <p:sp>
         <p:nvSpPr>
-          <p:cNvPr id="40" name="Text 38"/>
-          <p:cNvSpPr/>
-          <p:nvPr/>
-        </p:nvSpPr>
-        <p:spPr>
-          <a:xfrm>
-            <a:off x="1952596" y="4169664"/>
-            <a:ext cx="493776" cy="384048"/>
+          <p:cNvPr id="46" name="Text 44"/>
+          <p:cNvSpPr/>
+          <p:nvPr/>
+        </p:nvSpPr>
+        <p:spPr>
+          <a:xfrm>
+            <a:off x="1952244" y="4169664"/>
+            <a:ext cx="543652" cy="475488"/>
           </a:xfrm>
           <a:prstGeom prst="rect">
             <a:avLst/>
@@ -33513,7 +36602,7 @@
                 <a:ea typeface="Trebuchet MS" pitchFamily="34" charset="-122"/>
                 <a:cs typeface="Trebuchet MS" pitchFamily="34" charset="-120"/>
               </a:rPr>
-              <a:t>t</a:t>
+              <a:t>r</a:t>
             </a:r>
             <a:endParaRPr lang="en-US" sz="900" dirty="0"/>
           </a:p>
@@ -33521,18 +36610,18 @@
       </p:sp>
       <p:sp>
         <p:nvSpPr>
-          <p:cNvPr id="41" name="Shape 39"/>
-          <p:cNvSpPr/>
-          <p:nvPr/>
-        </p:nvSpPr>
-        <p:spPr>
-          <a:xfrm>
-            <a:off x="2497015" y="4169664"/>
-            <a:ext cx="493776" cy="384048"/>
+          <p:cNvPr id="47" name="Shape 45"/>
+          <p:cNvSpPr/>
+          <p:nvPr/>
+        </p:nvSpPr>
+        <p:spPr>
+          <a:xfrm>
+            <a:off x="2546188" y="4169664"/>
+            <a:ext cx="543652" cy="475488"/>
           </a:xfrm>
           <a:prstGeom prst="rect">
             <a:avLst>
-              <a:gd name="adj" fmla="val 9524"/>
+              <a:gd name="adj" fmla="val 7692"/>
             </a:avLst>
           </a:prstGeom>
           <a:solidFill>
@@ -33548,14 +36637,14 @@
       </p:sp>
       <p:sp>
         <p:nvSpPr>
-          <p:cNvPr id="42" name="Text 40"/>
-          <p:cNvSpPr/>
-          <p:nvPr/>
-        </p:nvSpPr>
-        <p:spPr>
-          <a:xfrm>
-            <a:off x="2497015" y="4169664"/>
-            <a:ext cx="493776" cy="384048"/>
+          <p:cNvPr id="48" name="Text 46"/>
+          <p:cNvSpPr/>
+          <p:nvPr/>
+        </p:nvSpPr>
+        <p:spPr>
+          <a:xfrm>
+            <a:off x="2546188" y="4169664"/>
+            <a:ext cx="543652" cy="475488"/>
           </a:xfrm>
           <a:prstGeom prst="rect">
             <a:avLst/>
@@ -33579,7 +36668,7 @@
                 <a:ea typeface="Trebuchet MS" pitchFamily="34" charset="-122"/>
                 <a:cs typeface="Trebuchet MS" pitchFamily="34" charset="-120"/>
               </a:rPr>
-              <a:t>r</a:t>
+              <a:t>e</a:t>
             </a:r>
             <a:endParaRPr lang="en-US" sz="900" dirty="0"/>
           </a:p>
@@ -33587,18 +36676,18 @@
       </p:sp>
       <p:sp>
         <p:nvSpPr>
-          <p:cNvPr id="43" name="Shape 41"/>
-          <p:cNvSpPr/>
-          <p:nvPr/>
-        </p:nvSpPr>
-        <p:spPr>
-          <a:xfrm>
-            <a:off x="3041435" y="4169664"/>
-            <a:ext cx="493776" cy="384048"/>
+          <p:cNvPr id="49" name="Shape 47"/>
+          <p:cNvSpPr/>
+          <p:nvPr/>
+        </p:nvSpPr>
+        <p:spPr>
+          <a:xfrm>
+            <a:off x="3140133" y="4169664"/>
+            <a:ext cx="543652" cy="475488"/>
           </a:xfrm>
           <a:prstGeom prst="rect">
             <a:avLst>
-              <a:gd name="adj" fmla="val 9524"/>
+              <a:gd name="adj" fmla="val 7692"/>
             </a:avLst>
           </a:prstGeom>
           <a:solidFill>
@@ -33614,14 +36703,14 @@
       </p:sp>
       <p:sp>
         <p:nvSpPr>
-          <p:cNvPr id="44" name="Text 42"/>
-          <p:cNvSpPr/>
-          <p:nvPr/>
-        </p:nvSpPr>
-        <p:spPr>
-          <a:xfrm>
-            <a:off x="3041435" y="4169664"/>
-            <a:ext cx="493776" cy="384048"/>
+          <p:cNvPr id="50" name="Text 48"/>
+          <p:cNvSpPr/>
+          <p:nvPr/>
+        </p:nvSpPr>
+        <p:spPr>
+          <a:xfrm>
+            <a:off x="3140133" y="4169664"/>
+            <a:ext cx="543652" cy="475488"/>
           </a:xfrm>
           <a:prstGeom prst="rect">
             <a:avLst/>
@@ -33645,7 +36734,7 @@
                 <a:ea typeface="Trebuchet MS" pitchFamily="34" charset="-122"/>
                 <a:cs typeface="Trebuchet MS" pitchFamily="34" charset="-120"/>
               </a:rPr>
-              <a:t>a</a:t>
+              <a:t>t</a:t>
             </a:r>
             <a:endParaRPr lang="en-US" sz="900" dirty="0"/>
           </a:p>
@@ -33653,18 +36742,18 @@
       </p:sp>
       <p:sp>
         <p:nvSpPr>
-          <p:cNvPr id="45" name="Shape 43"/>
-          <p:cNvSpPr/>
-          <p:nvPr/>
-        </p:nvSpPr>
-        <p:spPr>
-          <a:xfrm>
-            <a:off x="3585855" y="4169664"/>
-            <a:ext cx="493776" cy="384048"/>
+          <p:cNvPr id="51" name="Shape 49"/>
+          <p:cNvSpPr/>
+          <p:nvPr/>
+        </p:nvSpPr>
+        <p:spPr>
+          <a:xfrm>
+            <a:off x="3734077" y="4169664"/>
+            <a:ext cx="543652" cy="475488"/>
           </a:xfrm>
           <a:prstGeom prst="rect">
             <a:avLst>
-              <a:gd name="adj" fmla="val 9524"/>
+              <a:gd name="adj" fmla="val 7692"/>
             </a:avLst>
           </a:prstGeom>
           <a:solidFill>
@@ -33680,14 +36769,14 @@
       </p:sp>
       <p:sp>
         <p:nvSpPr>
-          <p:cNvPr id="46" name="Text 44"/>
-          <p:cNvSpPr/>
-          <p:nvPr/>
-        </p:nvSpPr>
-        <p:spPr>
-          <a:xfrm>
-            <a:off x="3585855" y="4169664"/>
-            <a:ext cx="493776" cy="384048"/>
+          <p:cNvPr id="52" name="Text 50"/>
+          <p:cNvSpPr/>
+          <p:nvPr/>
+        </p:nvSpPr>
+        <p:spPr>
+          <a:xfrm>
+            <a:off x="3734077" y="4169664"/>
+            <a:ext cx="543652" cy="475488"/>
           </a:xfrm>
           <a:prstGeom prst="rect">
             <a:avLst/>
@@ -33711,7 +36800,7 @@
                 <a:ea typeface="Trebuchet MS" pitchFamily="34" charset="-122"/>
                 <a:cs typeface="Trebuchet MS" pitchFamily="34" charset="-120"/>
               </a:rPr>
-              <a:t>n</a:t>
+              <a:t>r</a:t>
             </a:r>
             <a:endParaRPr lang="en-US" sz="900" dirty="0"/>
           </a:p>
@@ -33719,18 +36808,18 @@
       </p:sp>
       <p:sp>
         <p:nvSpPr>
-          <p:cNvPr id="47" name="Shape 45"/>
-          <p:cNvSpPr/>
-          <p:nvPr/>
-        </p:nvSpPr>
-        <p:spPr>
-          <a:xfrm>
-            <a:off x="4130274" y="4169664"/>
-            <a:ext cx="493776" cy="384048"/>
+          <p:cNvPr id="53" name="Shape 51"/>
+          <p:cNvSpPr/>
+          <p:nvPr/>
+        </p:nvSpPr>
+        <p:spPr>
+          <a:xfrm>
+            <a:off x="4328021" y="4169664"/>
+            <a:ext cx="543652" cy="475488"/>
           </a:xfrm>
           <a:prstGeom prst="rect">
             <a:avLst>
-              <a:gd name="adj" fmla="val 9524"/>
+              <a:gd name="adj" fmla="val 7692"/>
             </a:avLst>
           </a:prstGeom>
           <a:solidFill>
@@ -33746,14 +36835,14 @@
       </p:sp>
       <p:sp>
         <p:nvSpPr>
-          <p:cNvPr id="48" name="Text 46"/>
-          <p:cNvSpPr/>
-          <p:nvPr/>
-        </p:nvSpPr>
-        <p:spPr>
-          <a:xfrm>
-            <a:off x="4130274" y="4169664"/>
-            <a:ext cx="493776" cy="384048"/>
+          <p:cNvPr id="54" name="Text 52"/>
+          <p:cNvSpPr/>
+          <p:nvPr/>
+        </p:nvSpPr>
+        <p:spPr>
+          <a:xfrm>
+            <a:off x="4328021" y="4169664"/>
+            <a:ext cx="543652" cy="475488"/>
           </a:xfrm>
           <a:prstGeom prst="rect">
             <a:avLst/>
@@ -33777,7 +36866,7 @@
                 <a:ea typeface="Trebuchet MS" pitchFamily="34" charset="-122"/>
                 <a:cs typeface="Trebuchet MS" pitchFamily="34" charset="-120"/>
               </a:rPr>
-              <a:t>s</a:t>
+              <a:t>a</a:t>
             </a:r>
             <a:endParaRPr lang="en-US" sz="900" dirty="0"/>
           </a:p>
@@ -33785,18 +36874,18 @@
       </p:sp>
       <p:sp>
         <p:nvSpPr>
-          <p:cNvPr id="49" name="Shape 47"/>
-          <p:cNvSpPr/>
-          <p:nvPr/>
-        </p:nvSpPr>
-        <p:spPr>
-          <a:xfrm>
-            <a:off x="4674694" y="4169664"/>
-            <a:ext cx="493776" cy="384048"/>
+          <p:cNvPr id="55" name="Shape 53"/>
+          <p:cNvSpPr/>
+          <p:nvPr/>
+        </p:nvSpPr>
+        <p:spPr>
+          <a:xfrm>
+            <a:off x="4921966" y="4169664"/>
+            <a:ext cx="543652" cy="475488"/>
           </a:xfrm>
           <a:prstGeom prst="rect">
             <a:avLst>
-              <a:gd name="adj" fmla="val 9524"/>
+              <a:gd name="adj" fmla="val 7692"/>
             </a:avLst>
           </a:prstGeom>
           <a:solidFill>
@@ -33812,14 +36901,14 @@
       </p:sp>
       <p:sp>
         <p:nvSpPr>
-          <p:cNvPr id="50" name="Text 48"/>
-          <p:cNvSpPr/>
-          <p:nvPr/>
-        </p:nvSpPr>
-        <p:spPr>
-          <a:xfrm>
-            <a:off x="4674694" y="4169664"/>
-            <a:ext cx="493776" cy="384048"/>
+          <p:cNvPr id="56" name="Text 54"/>
+          <p:cNvSpPr/>
+          <p:nvPr/>
+        </p:nvSpPr>
+        <p:spPr>
+          <a:xfrm>
+            <a:off x="4921966" y="4169664"/>
+            <a:ext cx="543652" cy="475488"/>
           </a:xfrm>
           <a:prstGeom prst="rect">
             <a:avLst/>
@@ -33843,7 +36932,7 @@
                 <a:ea typeface="Trebuchet MS" pitchFamily="34" charset="-122"/>
                 <a:cs typeface="Trebuchet MS" pitchFamily="34" charset="-120"/>
               </a:rPr>
-              <a:t>p</a:t>
+              <a:t>n</a:t>
             </a:r>
             <a:endParaRPr lang="en-US" sz="900" dirty="0"/>
           </a:p>
@@ -33851,18 +36940,18 @@
       </p:sp>
       <p:sp>
         <p:nvSpPr>
-          <p:cNvPr id="51" name="Shape 49"/>
-          <p:cNvSpPr/>
-          <p:nvPr/>
-        </p:nvSpPr>
-        <p:spPr>
-          <a:xfrm>
-            <a:off x="5219114" y="4169664"/>
-            <a:ext cx="493776" cy="384048"/>
+          <p:cNvPr id="57" name="Shape 55"/>
+          <p:cNvSpPr/>
+          <p:nvPr/>
+        </p:nvSpPr>
+        <p:spPr>
+          <a:xfrm>
+            <a:off x="5515910" y="4169664"/>
+            <a:ext cx="543652" cy="475488"/>
           </a:xfrm>
           <a:prstGeom prst="rect">
             <a:avLst>
-              <a:gd name="adj" fmla="val 9524"/>
+              <a:gd name="adj" fmla="val 7692"/>
             </a:avLst>
           </a:prstGeom>
           <a:solidFill>
@@ -33878,14 +36967,14 @@
       </p:sp>
       <p:sp>
         <p:nvSpPr>
-          <p:cNvPr id="52" name="Text 50"/>
-          <p:cNvSpPr/>
-          <p:nvPr/>
-        </p:nvSpPr>
-        <p:spPr>
-          <a:xfrm>
-            <a:off x="5219114" y="4169664"/>
-            <a:ext cx="493776" cy="384048"/>
+          <p:cNvPr id="58" name="Text 56"/>
+          <p:cNvSpPr/>
+          <p:nvPr/>
+        </p:nvSpPr>
+        <p:spPr>
+          <a:xfrm>
+            <a:off x="5515910" y="4169664"/>
+            <a:ext cx="543652" cy="475488"/>
           </a:xfrm>
           <a:prstGeom prst="rect">
             <a:avLst/>
@@ -33909,7 +36998,7 @@
                 <a:ea typeface="Trebuchet MS" pitchFamily="34" charset="-122"/>
                 <a:cs typeface="Trebuchet MS" pitchFamily="34" charset="-120"/>
               </a:rPr>
-              <a:t>or</a:t>
+              <a:t>s</a:t>
             </a:r>
             <a:endParaRPr lang="en-US" sz="900" dirty="0"/>
           </a:p>
@@ -33917,18 +37006,18 @@
       </p:sp>
       <p:sp>
         <p:nvSpPr>
-          <p:cNvPr id="53" name="Shape 51"/>
-          <p:cNvSpPr/>
-          <p:nvPr/>
-        </p:nvSpPr>
-        <p:spPr>
-          <a:xfrm>
-            <a:off x="5763534" y="4169664"/>
-            <a:ext cx="493776" cy="384048"/>
+          <p:cNvPr id="59" name="Shape 57"/>
+          <p:cNvSpPr/>
+          <p:nvPr/>
+        </p:nvSpPr>
+        <p:spPr>
+          <a:xfrm>
+            <a:off x="6109855" y="4169664"/>
+            <a:ext cx="543652" cy="475488"/>
           </a:xfrm>
           <a:prstGeom prst="rect">
             <a:avLst>
-              <a:gd name="adj" fmla="val 9524"/>
+              <a:gd name="adj" fmla="val 7692"/>
             </a:avLst>
           </a:prstGeom>
           <a:solidFill>
@@ -33944,14 +37033,14 @@
       </p:sp>
       <p:sp>
         <p:nvSpPr>
-          <p:cNvPr id="54" name="Text 52"/>
-          <p:cNvSpPr/>
-          <p:nvPr/>
-        </p:nvSpPr>
-        <p:spPr>
-          <a:xfrm>
-            <a:off x="5763534" y="4169664"/>
-            <a:ext cx="493776" cy="384048"/>
+          <p:cNvPr id="60" name="Text 58"/>
+          <p:cNvSpPr/>
+          <p:nvPr/>
+        </p:nvSpPr>
+        <p:spPr>
+          <a:xfrm>
+            <a:off x="6109855" y="4169664"/>
+            <a:ext cx="543652" cy="475488"/>
           </a:xfrm>
           <a:prstGeom prst="rect">
             <a:avLst/>
@@ -33975,7 +37064,7 @@
                 <a:ea typeface="Trebuchet MS" pitchFamily="34" charset="-122"/>
                 <a:cs typeface="Trebuchet MS" pitchFamily="34" charset="-120"/>
               </a:rPr>
-              <a:t>t</a:t>
+              <a:t>p</a:t>
             </a:r>
             <a:endParaRPr lang="en-US" sz="900" dirty="0"/>
           </a:p>
@@ -33983,18 +37072,18 @@
       </p:sp>
       <p:sp>
         <p:nvSpPr>
-          <p:cNvPr id="55" name="Shape 53"/>
-          <p:cNvSpPr/>
-          <p:nvPr/>
-        </p:nvSpPr>
-        <p:spPr>
-          <a:xfrm>
-            <a:off x="6307953" y="4169664"/>
-            <a:ext cx="493776" cy="384048"/>
+          <p:cNvPr id="61" name="Shape 59"/>
+          <p:cNvSpPr/>
+          <p:nvPr/>
+        </p:nvSpPr>
+        <p:spPr>
+          <a:xfrm>
+            <a:off x="6703799" y="4169664"/>
+            <a:ext cx="543652" cy="475488"/>
           </a:xfrm>
           <a:prstGeom prst="rect">
             <a:avLst>
-              <a:gd name="adj" fmla="val 9524"/>
+              <a:gd name="adj" fmla="val 7692"/>
             </a:avLst>
           </a:prstGeom>
           <a:solidFill>
@@ -34010,14 +37099,14 @@
       </p:sp>
       <p:sp>
         <p:nvSpPr>
-          <p:cNvPr id="56" name="Text 54"/>
-          <p:cNvSpPr/>
-          <p:nvPr/>
-        </p:nvSpPr>
-        <p:spPr>
-          <a:xfrm>
-            <a:off x="6307953" y="4169664"/>
-            <a:ext cx="493776" cy="384048"/>
+          <p:cNvPr id="62" name="Text 60"/>
+          <p:cNvSpPr/>
+          <p:nvPr/>
+        </p:nvSpPr>
+        <p:spPr>
+          <a:xfrm>
+            <a:off x="6703799" y="4169664"/>
+            <a:ext cx="543652" cy="475488"/>
           </a:xfrm>
           <a:prstGeom prst="rect">
             <a:avLst/>
@@ -34041,7 +37130,7 @@
                 <a:ea typeface="Trebuchet MS" pitchFamily="34" charset="-122"/>
                 <a:cs typeface="Trebuchet MS" pitchFamily="34" charset="-120"/>
               </a:rPr>
-              <a:t>a</a:t>
+              <a:t>or</a:t>
             </a:r>
             <a:endParaRPr lang="en-US" sz="900" dirty="0"/>
           </a:p>
@@ -34049,18 +37138,18 @@
       </p:sp>
       <p:sp>
         <p:nvSpPr>
-          <p:cNvPr id="57" name="Shape 55"/>
-          <p:cNvSpPr/>
-          <p:nvPr/>
-        </p:nvSpPr>
-        <p:spPr>
-          <a:xfrm>
-            <a:off x="6852373" y="4169664"/>
-            <a:ext cx="493776" cy="384048"/>
+          <p:cNvPr id="63" name="Shape 61"/>
+          <p:cNvSpPr/>
+          <p:nvPr/>
+        </p:nvSpPr>
+        <p:spPr>
+          <a:xfrm>
+            <a:off x="7297743" y="4169664"/>
+            <a:ext cx="543652" cy="475488"/>
           </a:xfrm>
           <a:prstGeom prst="rect">
             <a:avLst>
-              <a:gd name="adj" fmla="val 9524"/>
+              <a:gd name="adj" fmla="val 7692"/>
             </a:avLst>
           </a:prstGeom>
           <a:solidFill>
@@ -34076,14 +37165,14 @@
       </p:sp>
       <p:sp>
         <p:nvSpPr>
-          <p:cNvPr id="58" name="Text 56"/>
-          <p:cNvSpPr/>
-          <p:nvPr/>
-        </p:nvSpPr>
-        <p:spPr>
-          <a:xfrm>
-            <a:off x="6852373" y="4169664"/>
-            <a:ext cx="493776" cy="384048"/>
+          <p:cNvPr id="64" name="Text 62"/>
+          <p:cNvSpPr/>
+          <p:nvPr/>
+        </p:nvSpPr>
+        <p:spPr>
+          <a:xfrm>
+            <a:off x="7297743" y="4169664"/>
+            <a:ext cx="543652" cy="475488"/>
           </a:xfrm>
           <a:prstGeom prst="rect">
             <a:avLst/>
@@ -34115,57 +37204,18 @@
       </p:sp>
       <p:sp>
         <p:nvSpPr>
-          <p:cNvPr id="59" name="Text 57"/>
-          <p:cNvSpPr/>
-          <p:nvPr/>
-        </p:nvSpPr>
-        <p:spPr>
-          <a:xfrm>
-            <a:off x="6852373" y="4572000"/>
-            <a:ext cx="493776" cy="219456"/>
-          </a:xfrm>
-          <a:prstGeom prst="rect">
-            <a:avLst/>
-          </a:prstGeom>
-          <a:noFill/>
-          <a:ln/>
-        </p:spPr>
-        <p:txBody>
-          <a:bodyPr wrap="square" lIns="0" tIns="0" rIns="0" bIns="0" rtlCol="0" anchor="t"/>
-          <a:lstStyle/>
-          <a:p>
-            <a:pPr algn="ctr" indent="0" marL="0">
-              <a:buNone/>
-            </a:pPr>
-            <a:r>
-              <a:rPr lang="en-US" sz="750" i="1" dirty="0">
-                <a:solidFill>
-                  <a:srgbClr val="94A3B8"/>
-                </a:solidFill>
-                <a:latin typeface="Calibri" pitchFamily="34" charset="0"/>
-                <a:ea typeface="Calibri" pitchFamily="34" charset="-122"/>
-                <a:cs typeface="Calibri" pitchFamily="34" charset="-120"/>
-              </a:rPr>
-              <a:t>/sh/</a:t>
-            </a:r>
-            <a:endParaRPr lang="en-US" sz="750" dirty="0"/>
-          </a:p>
-        </p:txBody>
-      </p:sp>
-      <p:sp>
-        <p:nvSpPr>
-          <p:cNvPr id="60" name="Shape 58"/>
-          <p:cNvSpPr/>
-          <p:nvPr/>
-        </p:nvSpPr>
-        <p:spPr>
-          <a:xfrm>
-            <a:off x="7396793" y="4169664"/>
-            <a:ext cx="493776" cy="384048"/>
+          <p:cNvPr id="65" name="Shape 63"/>
+          <p:cNvSpPr/>
+          <p:nvPr/>
+        </p:nvSpPr>
+        <p:spPr>
+          <a:xfrm>
+            <a:off x="7891688" y="4169664"/>
+            <a:ext cx="543652" cy="475488"/>
           </a:xfrm>
           <a:prstGeom prst="rect">
             <a:avLst>
-              <a:gd name="adj" fmla="val 9524"/>
+              <a:gd name="adj" fmla="val 7692"/>
             </a:avLst>
           </a:prstGeom>
           <a:solidFill>
@@ -34181,14 +37231,14 @@
       </p:sp>
       <p:sp>
         <p:nvSpPr>
-          <p:cNvPr id="61" name="Text 59"/>
-          <p:cNvSpPr/>
-          <p:nvPr/>
-        </p:nvSpPr>
-        <p:spPr>
-          <a:xfrm>
-            <a:off x="7396793" y="4169664"/>
-            <a:ext cx="493776" cy="384048"/>
+          <p:cNvPr id="66" name="Text 64"/>
+          <p:cNvSpPr/>
+          <p:nvPr/>
+        </p:nvSpPr>
+        <p:spPr>
+          <a:xfrm>
+            <a:off x="7891688" y="4169664"/>
+            <a:ext cx="543652" cy="475488"/>
           </a:xfrm>
           <a:prstGeom prst="rect">
             <a:avLst/>
@@ -34212,73 +37262,7 @@
                 <a:ea typeface="Trebuchet MS" pitchFamily="34" charset="-122"/>
                 <a:cs typeface="Trebuchet MS" pitchFamily="34" charset="-120"/>
               </a:rPr>
-              <a:t>io</a:t>
-            </a:r>
-            <a:endParaRPr lang="en-US" sz="900" dirty="0"/>
-          </a:p>
-        </p:txBody>
-      </p:sp>
-      <p:sp>
-        <p:nvSpPr>
-          <p:cNvPr id="62" name="Shape 60"/>
-          <p:cNvSpPr/>
-          <p:nvPr/>
-        </p:nvSpPr>
-        <p:spPr>
-          <a:xfrm>
-            <a:off x="7941212" y="4169664"/>
-            <a:ext cx="493776" cy="384048"/>
-          </a:xfrm>
-          <a:prstGeom prst="rect">
-            <a:avLst>
-              <a:gd name="adj" fmla="val 9524"/>
-            </a:avLst>
-          </a:prstGeom>
-          <a:solidFill>
-            <a:srgbClr val="FFFFFF"/>
-          </a:solidFill>
-          <a:ln w="12700">
-            <a:solidFill>
-              <a:srgbClr val="DB2777"/>
-            </a:solidFill>
-            <a:prstDash val="solid"/>
-          </a:ln>
-        </p:spPr>
-      </p:sp>
-      <p:sp>
-        <p:nvSpPr>
-          <p:cNvPr id="63" name="Text 61"/>
-          <p:cNvSpPr/>
-          <p:nvPr/>
-        </p:nvSpPr>
-        <p:spPr>
-          <a:xfrm>
-            <a:off x="7941212" y="4169664"/>
-            <a:ext cx="493776" cy="384048"/>
-          </a:xfrm>
-          <a:prstGeom prst="rect">
-            <a:avLst/>
-          </a:prstGeom>
-          <a:noFill/>
-          <a:ln/>
-        </p:spPr>
-        <p:txBody>
-          <a:bodyPr wrap="square" lIns="0" tIns="0" rIns="0" bIns="0" rtlCol="0" anchor="ctr"/>
-          <a:lstStyle/>
-          <a:p>
-            <a:pPr algn="ctr" indent="0" marL="0">
-              <a:buNone/>
-            </a:pPr>
-            <a:r>
-              <a:rPr lang="en-US" sz="900" b="1" dirty="0">
-                <a:solidFill>
-                  <a:srgbClr val="9D174D"/>
-                </a:solidFill>
-                <a:latin typeface="Trebuchet MS" pitchFamily="34" charset="0"/>
-                <a:ea typeface="Trebuchet MS" pitchFamily="34" charset="-122"/>
-                <a:cs typeface="Trebuchet MS" pitchFamily="34" charset="-120"/>
-              </a:rPr>
-              <a:t>n</a:t>
+              <a:t>ed</a:t>
             </a:r>
             <a:endParaRPr lang="en-US" sz="900" dirty="0"/>
           </a:p>
@@ -34570,7 +37554,7 @@
                 <a:ea typeface="Calibri" pitchFamily="34" charset="-122"/>
                 <a:cs typeface="Calibri" pitchFamily="34" charset="-120"/>
               </a:rPr>
-              <a:t>Word Labs  •  wordlabs.app  •  Root: 'transport' = carry across or over</a:t>
+              <a:t>Word Labs  •  wordlabs.app  •  Root: 'transport' = carry across or beyond</a:t>
             </a:r>
             <a:endParaRPr lang="en-US" sz="800" dirty="0"/>
           </a:p>
@@ -35739,7 +38723,7 @@
                 <a:ea typeface="Calibri" pitchFamily="34" charset="-122"/>
                 <a:cs typeface="Calibri" pitchFamily="34" charset="-120"/>
               </a:rPr>
-              <a:t>Word Labs  •  wordlabs.app  •  Root: 'transport' = carry across or over</a:t>
+              <a:t>Word Labs  •  wordlabs.app  •  Root: 'transport' = carry across or beyond</a:t>
             </a:r>
             <a:endParaRPr lang="en-US" sz="800" dirty="0"/>
           </a:p>
@@ -36168,7 +39152,7 @@
                 <a:ea typeface="Trebuchet MS" pitchFamily="34" charset="-122"/>
                 <a:cs typeface="Trebuchet MS" pitchFamily="34" charset="-120"/>
               </a:rPr>
-              <a:t>-ation</a:t>
+              <a:t>-ed</a:t>
             </a:r>
             <a:endParaRPr lang="en-US" sz="1300" dirty="0"/>
           </a:p>
@@ -36232,7 +39216,7 @@
                 <a:ea typeface="Trebuchet MS" pitchFamily="34" charset="-122"/>
                 <a:cs typeface="Trebuchet MS" pitchFamily="34" charset="-120"/>
               </a:rPr>
-              <a:t>un-</a:t>
+              <a:t>trans-</a:t>
             </a:r>
             <a:endParaRPr lang="en-US" sz="1300" dirty="0"/>
           </a:p>
@@ -36321,7 +39305,7 @@
                 <a:ea typeface="Trebuchet MS" pitchFamily="34" charset="-122"/>
                 <a:cs typeface="Trebuchet MS" pitchFamily="34" charset="-120"/>
               </a:rPr>
-              <a:t>-er</a:t>
+              <a:t>-ing</a:t>
             </a:r>
             <a:endParaRPr lang="en-US" sz="1300" dirty="0"/>
           </a:p>
@@ -36474,7 +39458,7 @@
                 <a:ea typeface="Trebuchet MS" pitchFamily="34" charset="-122"/>
                 <a:cs typeface="Trebuchet MS" pitchFamily="34" charset="-120"/>
               </a:rPr>
-              <a:t>-ed</a:t>
+              <a:t>-er</a:t>
             </a:r>
             <a:endParaRPr lang="en-US" sz="1300" dirty="0"/>
           </a:p>
@@ -36538,7 +39522,7 @@
                 <a:ea typeface="Trebuchet MS" pitchFamily="34" charset="-122"/>
                 <a:cs typeface="Trebuchet MS" pitchFamily="34" charset="-120"/>
               </a:rPr>
-              <a:t>bio-</a:t>
+              <a:t>public-</a:t>
             </a:r>
             <a:endParaRPr lang="en-US" sz="1300" dirty="0"/>
           </a:p>
@@ -36627,7 +39611,7 @@
                 <a:ea typeface="Trebuchet MS" pitchFamily="34" charset="-122"/>
                 <a:cs typeface="Trebuchet MS" pitchFamily="34" charset="-120"/>
               </a:rPr>
-              <a:t>-ing</a:t>
+              <a:t>-ation</a:t>
             </a:r>
             <a:endParaRPr lang="en-US" sz="1300" dirty="0"/>
           </a:p>
@@ -36691,7 +39675,7 @@
                 <a:ea typeface="Trebuchet MS" pitchFamily="34" charset="-122"/>
                 <a:cs typeface="Trebuchet MS" pitchFamily="34" charset="-120"/>
               </a:rPr>
-              <a:t>tele-</a:t>
+              <a:t>air-</a:t>
             </a:r>
             <a:endParaRPr lang="en-US" sz="1300" dirty="0"/>
           </a:p>
@@ -36885,7 +39869,7 @@
                 <a:ea typeface="Trebuchet MS" pitchFamily="34" charset="-122"/>
                 <a:cs typeface="Trebuchet MS" pitchFamily="34" charset="-120"/>
               </a:rPr>
-              <a:t>transportation</a:t>
+              <a:t>transport</a:t>
             </a:r>
             <a:endParaRPr lang="en-US" sz="1200" dirty="0"/>
           </a:p>
@@ -36951,7 +39935,7 @@
                 <a:ea typeface="Trebuchet MS" pitchFamily="34" charset="-122"/>
                 <a:cs typeface="Trebuchet MS" pitchFamily="34" charset="-120"/>
               </a:rPr>
-              <a:t>transporter</a:t>
+              <a:t>transportation</a:t>
             </a:r>
             <a:endParaRPr lang="en-US" sz="1200" dirty="0"/>
           </a:p>
@@ -37149,7 +40133,7 @@
                 <a:ea typeface="Trebuchet MS" pitchFamily="34" charset="-122"/>
                 <a:cs typeface="Trebuchet MS" pitchFamily="34" charset="-120"/>
               </a:rPr>
-              <a:t>transportable</a:t>
+              <a:t>transporter</a:t>
             </a:r>
             <a:endParaRPr lang="en-US" sz="1200" dirty="0"/>
           </a:p>
@@ -37215,7 +40199,7 @@
                 <a:ea typeface="Trebuchet MS" pitchFamily="34" charset="-122"/>
                 <a:cs typeface="Trebuchet MS" pitchFamily="34" charset="-120"/>
               </a:rPr>
-              <a:t>retransport</a:t>
+              <a:t>transportable</a:t>
             </a:r>
             <a:endParaRPr lang="en-US" sz="1200" dirty="0"/>
           </a:p>
@@ -37281,7 +40265,7 @@
                 <a:ea typeface="Trebuchet MS" pitchFamily="34" charset="-122"/>
                 <a:cs typeface="Trebuchet MS" pitchFamily="34" charset="-120"/>
               </a:rPr>
-              <a:t>retransported</a:t>
+              <a:t>retransport</a:t>
             </a:r>
             <a:endParaRPr lang="en-US" sz="1200" dirty="0"/>
           </a:p>
@@ -37347,7 +40331,7 @@
                 <a:ea typeface="Trebuchet MS" pitchFamily="34" charset="-122"/>
                 <a:cs typeface="Trebuchet MS" pitchFamily="34" charset="-120"/>
               </a:rPr>
-              <a:t>intertransport</a:t>
+              <a:t>retransportation</a:t>
             </a:r>
             <a:endParaRPr lang="en-US" sz="1200" dirty="0"/>
           </a:p>
@@ -37639,7 +40623,7 @@
                 <a:ea typeface="Calibri" pitchFamily="34" charset="-122"/>
                 <a:cs typeface="Calibri" pitchFamily="34" charset="-120"/>
               </a:rPr>
-              <a:t>Word Labs  •  wordlabs.app  •  Root: 'transport' = carry across or over</a:t>
+              <a:t>Word Labs  •  wordlabs.app  •  Root: 'transport' = carry across or beyond</a:t>
             </a:r>
             <a:endParaRPr lang="en-US" sz="800" dirty="0"/>
           </a:p>
@@ -37803,7 +40787,7 @@
                 <a:ea typeface="Calibri" pitchFamily="34" charset="-122"/>
                 <a:cs typeface="Calibri" pitchFamily="34" charset="-120"/>
               </a:rPr>
-              <a:t>The core part of a word carrying its basic meaning. For example, 'transport' means 'carry across or over'.</a:t>
+              <a:t>The core part of a word carrying its basic meaning. For example, 'transport' means 'carry across or beyond'.</a:t>
             </a:r>
             <a:endParaRPr lang="en-US" sz="1350" dirty="0"/>
           </a:p>
@@ -38423,7 +41407,7 @@
                 <a:ea typeface="Calibri" pitchFamily="34" charset="-122"/>
                 <a:cs typeface="Calibri" pitchFamily="34" charset="-120"/>
               </a:rPr>
-              <a:t>Word Labs  •  wordlabs.app  •  Root: 'transport' = carry across or over</a:t>
+              <a:t>Word Labs  •  wordlabs.app  •  Root: 'transport' = carry across or beyond</a:t>
             </a:r>
             <a:endParaRPr lang="en-US" sz="800" dirty="0"/>
           </a:p>
@@ -38674,7 +41658,7 @@
                 <a:ea typeface="Calibri" pitchFamily="34" charset="-122"/>
                 <a:cs typeface="Calibri" pitchFamily="34" charset="-120"/>
               </a:rPr>
-              <a:t>2.  The word 'transported' has the suffix '-er' added to 'transport'.</a:t>
+              <a:t>2.  The word 'transport' can only be used as a noun, never a verb.</a:t>
             </a:r>
             <a:endParaRPr lang="en-US" sz="1300" dirty="0"/>
           </a:p>
@@ -38813,7 +41797,7 @@
                 <a:ea typeface="Calibri" pitchFamily="34" charset="-122"/>
                 <a:cs typeface="Calibri" pitchFamily="34" charset="-120"/>
               </a:rPr>
-              <a:t>3.  A transporter is someone or something that carries goods from one place to another.</a:t>
+              <a:t>3.  Adding the suffix '-ation' to 'transport' makes the word 'transportation'.</a:t>
             </a:r>
             <a:endParaRPr lang="en-US" sz="1300" dirty="0"/>
           </a:p>
@@ -38952,7 +41936,7 @@
                 <a:ea typeface="Calibri" pitchFamily="34" charset="-122"/>
                 <a:cs typeface="Calibri" pitchFamily="34" charset="-120"/>
               </a:rPr>
-              <a:t>4.  The word 'transportable' means something can be moved from place to place.</a:t>
+              <a:t>4.  A 'transporter' is a person or vehicle that carries things from place to place.</a:t>
             </a:r>
             <a:endParaRPr lang="en-US" sz="1300" dirty="0"/>
           </a:p>
@@ -39091,7 +42075,7 @@
                 <a:ea typeface="Calibri" pitchFamily="34" charset="-122"/>
                 <a:cs typeface="Calibri" pitchFamily="34" charset="-120"/>
               </a:rPr>
-              <a:t>5.  The prefix 're-' in 'retransport' means 'not' or 'against'.</a:t>
+              <a:t>5.  The prefix 're-' in 'retransport' means to do something for the very first time.</a:t>
             </a:r>
             <a:endParaRPr lang="en-US" sz="1300" dirty="0"/>
           </a:p>
@@ -39449,7 +42433,7 @@
                 <a:ea typeface="Calibri" pitchFamily="34" charset="-122"/>
                 <a:cs typeface="Calibri" pitchFamily="34" charset="-120"/>
               </a:rPr>
-              <a:t>Word Labs  •  wordlabs.app  •  Root: 'transport' = carry across or over</a:t>
+              <a:t>Word Labs  •  wordlabs.app  •  Root: 'transport' = carry across or beyond</a:t>
             </a:r>
             <a:endParaRPr lang="en-US" sz="800" dirty="0"/>
           </a:p>
@@ -39586,7 +42570,7 @@
                 <a:ea typeface="Trebuchet MS" pitchFamily="34" charset="-122"/>
                 <a:cs typeface="Trebuchet MS" pitchFamily="34" charset="-120"/>
               </a:rPr>
-              <a:t>carry across or over</a:t>
+              <a:t>carry across or beyond</a:t>
             </a:r>
             <a:endParaRPr lang="en-US" sz="2000" dirty="0"/>
           </a:p>
@@ -39730,7 +42714,7 @@
                 <a:ea typeface="Trebuchet MS" pitchFamily="34" charset="-122"/>
                 <a:cs typeface="Trebuchet MS" pitchFamily="34" charset="-120"/>
               </a:rPr>
-              <a:t>transportation</a:t>
+              <a:t>transport</a:t>
             </a:r>
             <a:endParaRPr lang="en-US" sz="1300" dirty="0"/>
           </a:p>
@@ -39796,7 +42780,7 @@
                 <a:ea typeface="Trebuchet MS" pitchFamily="34" charset="-122"/>
                 <a:cs typeface="Trebuchet MS" pitchFamily="34" charset="-120"/>
               </a:rPr>
-              <a:t>transporter</a:t>
+              <a:t>transportation</a:t>
             </a:r>
             <a:endParaRPr lang="en-US" sz="1300" dirty="0"/>
           </a:p>
@@ -39994,7 +42978,7 @@
                 <a:ea typeface="Trebuchet MS" pitchFamily="34" charset="-122"/>
                 <a:cs typeface="Trebuchet MS" pitchFamily="34" charset="-120"/>
               </a:rPr>
-              <a:t>transportable</a:t>
+              <a:t>transporter</a:t>
             </a:r>
             <a:endParaRPr lang="en-US" sz="1300" dirty="0"/>
           </a:p>
@@ -40060,7 +43044,7 @@
                 <a:ea typeface="Trebuchet MS" pitchFamily="34" charset="-122"/>
                 <a:cs typeface="Trebuchet MS" pitchFamily="34" charset="-120"/>
               </a:rPr>
-              <a:t>retransport</a:t>
+              <a:t>transportable</a:t>
             </a:r>
             <a:endParaRPr lang="en-US" sz="1300" dirty="0"/>
           </a:p>
@@ -40126,7 +43110,7 @@
                 <a:ea typeface="Trebuchet MS" pitchFamily="34" charset="-122"/>
                 <a:cs typeface="Trebuchet MS" pitchFamily="34" charset="-120"/>
               </a:rPr>
-              <a:t>retransported</a:t>
+              <a:t>retransport</a:t>
             </a:r>
             <a:endParaRPr lang="en-US" sz="1300" dirty="0"/>
           </a:p>
@@ -40418,7 +43402,7 @@
                 <a:ea typeface="Calibri" pitchFamily="34" charset="-122"/>
                 <a:cs typeface="Calibri" pitchFamily="34" charset="-120"/>
               </a:rPr>
-              <a:t>Word Labs  •  wordlabs.app  •  Root: 'transport' = carry across or over</a:t>
+              <a:t>Word Labs  •  wordlabs.app  •  Root: 'transport' = carry across or beyond</a:t>
             </a:r>
             <a:endParaRPr lang="en-US" sz="800" dirty="0"/>
           </a:p>
@@ -40847,7 +43831,7 @@
                 <a:ea typeface="Trebuchet MS" pitchFamily="34" charset="-122"/>
                 <a:cs typeface="Trebuchet MS" pitchFamily="34" charset="-120"/>
               </a:rPr>
-              <a:t>-ation</a:t>
+              <a:t>-ed</a:t>
             </a:r>
             <a:endParaRPr lang="en-US" sz="1300" dirty="0"/>
           </a:p>
@@ -40911,7 +43895,7 @@
                 <a:ea typeface="Trebuchet MS" pitchFamily="34" charset="-122"/>
                 <a:cs typeface="Trebuchet MS" pitchFamily="34" charset="-120"/>
               </a:rPr>
-              <a:t>un-</a:t>
+              <a:t>trans-</a:t>
             </a:r>
             <a:endParaRPr lang="en-US" sz="1300" dirty="0"/>
           </a:p>
@@ -41000,7 +43984,7 @@
                 <a:ea typeface="Trebuchet MS" pitchFamily="34" charset="-122"/>
                 <a:cs typeface="Trebuchet MS" pitchFamily="34" charset="-120"/>
               </a:rPr>
-              <a:t>-er</a:t>
+              <a:t>-ing</a:t>
             </a:r>
             <a:endParaRPr lang="en-US" sz="1300" dirty="0"/>
           </a:p>
@@ -41153,7 +44137,7 @@
                 <a:ea typeface="Trebuchet MS" pitchFamily="34" charset="-122"/>
                 <a:cs typeface="Trebuchet MS" pitchFamily="34" charset="-120"/>
               </a:rPr>
-              <a:t>-ed</a:t>
+              <a:t>-er</a:t>
             </a:r>
             <a:endParaRPr lang="en-US" sz="1300" dirty="0"/>
           </a:p>
@@ -41217,7 +44201,7 @@
                 <a:ea typeface="Trebuchet MS" pitchFamily="34" charset="-122"/>
                 <a:cs typeface="Trebuchet MS" pitchFamily="34" charset="-120"/>
               </a:rPr>
-              <a:t>bio-</a:t>
+              <a:t>public-</a:t>
             </a:r>
             <a:endParaRPr lang="en-US" sz="1300" dirty="0"/>
           </a:p>
@@ -41306,7 +44290,7 @@
                 <a:ea typeface="Trebuchet MS" pitchFamily="34" charset="-122"/>
                 <a:cs typeface="Trebuchet MS" pitchFamily="34" charset="-120"/>
               </a:rPr>
-              <a:t>-ing</a:t>
+              <a:t>-ation</a:t>
             </a:r>
             <a:endParaRPr lang="en-US" sz="1300" dirty="0"/>
           </a:p>
@@ -41370,7 +44354,7 @@
                 <a:ea typeface="Trebuchet MS" pitchFamily="34" charset="-122"/>
                 <a:cs typeface="Trebuchet MS" pitchFamily="34" charset="-120"/>
               </a:rPr>
-              <a:t>tele-</a:t>
+              <a:t>air-</a:t>
             </a:r>
             <a:endParaRPr lang="en-US" sz="1300" dirty="0"/>
           </a:p>
@@ -41737,7 +44721,7 @@
         <p:spPr>
           <a:xfrm>
             <a:off x="5056632" y="4178808"/>
-            <a:ext cx="1243584" cy="420624"/>
+            <a:ext cx="822960" cy="420624"/>
           </a:xfrm>
           <a:prstGeom prst="rect">
             <a:avLst>
@@ -41771,7 +44755,7 @@
         <p:spPr>
           <a:xfrm>
             <a:off x="5056632" y="4178808"/>
-            <a:ext cx="1243584" cy="420624"/>
+            <a:ext cx="822960" cy="420624"/>
           </a:xfrm>
           <a:prstGeom prst="rect">
             <a:avLst/>
@@ -41795,7 +44779,7 @@
                 <a:ea typeface="Trebuchet MS" pitchFamily="34" charset="-122"/>
                 <a:cs typeface="Trebuchet MS" pitchFamily="34" charset="-120"/>
               </a:rPr>
-              <a:t>-ation</a:t>
+              <a:t>-ed</a:t>
             </a:r>
             <a:endParaRPr lang="en-US" sz="1300" dirty="0"/>
           </a:p>
@@ -41809,7 +44793,7 @@
         </p:nvSpPr>
         <p:spPr>
           <a:xfrm>
-            <a:off x="6373368" y="4178808"/>
+            <a:off x="5952744" y="4178808"/>
             <a:ext cx="365760" cy="420624"/>
           </a:xfrm>
           <a:prstGeom prst="rect">
@@ -41848,7 +44832,7 @@
         </p:nvSpPr>
         <p:spPr>
           <a:xfrm>
-            <a:off x="6784848" y="4178808"/>
+            <a:off x="6364224" y="4178808"/>
             <a:ext cx="2194560" cy="420624"/>
           </a:xfrm>
           <a:prstGeom prst="rect">
@@ -41875,7 +44859,7 @@
         </p:nvSpPr>
         <p:spPr>
           <a:xfrm>
-            <a:off x="6784848" y="4178808"/>
+            <a:off x="6364224" y="4178808"/>
             <a:ext cx="2194560" cy="420624"/>
           </a:xfrm>
           <a:prstGeom prst="rect">
@@ -41900,7 +44884,7 @@
                 <a:ea typeface="Trebuchet MS" pitchFamily="34" charset="-122"/>
                 <a:cs typeface="Trebuchet MS" pitchFamily="34" charset="-120"/>
               </a:rPr>
-              <a:t>transportation</a:t>
+              <a:t>transport</a:t>
             </a:r>
             <a:endParaRPr lang="en-US" sz="1400" dirty="0"/>
           </a:p>
@@ -42192,7 +45176,7 @@
                 <a:ea typeface="Calibri" pitchFamily="34" charset="-122"/>
                 <a:cs typeface="Calibri" pitchFamily="34" charset="-120"/>
               </a:rPr>
-              <a:t>Word Labs  •  wordlabs.app  •  Root: 'transport' = carry across or over</a:t>
+              <a:t>Word Labs  •  wordlabs.app  •  Root: 'transport' = carry across or beyond</a:t>
             </a:r>
             <a:endParaRPr lang="en-US" sz="800" dirty="0"/>
           </a:p>
@@ -42304,7 +45288,7 @@
                 <a:ea typeface="Trebuchet MS" pitchFamily="34" charset="-122"/>
                 <a:cs typeface="Trebuchet MS" pitchFamily="34" charset="-120"/>
               </a:rPr>
-              <a:t>transportation</a:t>
+              <a:t>transport</a:t>
             </a:r>
             <a:endParaRPr lang="en-US" sz="1200" dirty="0"/>
           </a:p>
@@ -42370,7 +45354,7 @@
                 <a:ea typeface="Calibri" pitchFamily="34" charset="-122"/>
                 <a:cs typeface="Calibri" pitchFamily="34" charset="-120"/>
               </a:rPr>
-              <a:t>The system of moving people or goods from one place to another, like buses, trains, or trucks.</a:t>
+              <a:t>To move people or things from one place to another.</a:t>
             </a:r>
             <a:endParaRPr lang="en-US" sz="1200" dirty="0"/>
           </a:p>
@@ -42443,7 +45427,7 @@
                 <a:ea typeface="Trebuchet MS" pitchFamily="34" charset="-122"/>
                 <a:cs typeface="Trebuchet MS" pitchFamily="34" charset="-120"/>
               </a:rPr>
-              <a:t>transporter</a:t>
+              <a:t>transportation</a:t>
             </a:r>
             <a:endParaRPr lang="en-US" sz="1200" dirty="0"/>
           </a:p>
@@ -42509,7 +45493,7 @@
                 <a:ea typeface="Calibri" pitchFamily="34" charset="-122"/>
                 <a:cs typeface="Calibri" pitchFamily="34" charset="-120"/>
               </a:rPr>
-              <a:t>When something or someone has been moved from one place to another.</a:t>
+              <a:t>When something or someone has already been moved from one place to another.</a:t>
             </a:r>
             <a:endParaRPr lang="en-US" sz="1200" dirty="0"/>
           </a:p>
@@ -42648,7 +45632,7 @@
                 <a:ea typeface="Calibri" pitchFamily="34" charset="-122"/>
                 <a:cs typeface="Calibri" pitchFamily="34" charset="-120"/>
               </a:rPr>
-              <a:t>To carry or move something back to where it came from, or to transport it again.</a:t>
+              <a:t>Something that is able to be moved or carried from one place to another.</a:t>
             </a:r>
             <a:endParaRPr lang="en-US" sz="1200" dirty="0"/>
           </a:p>
@@ -42787,7 +45771,7 @@
                 <a:ea typeface="Calibri" pitchFamily="34" charset="-122"/>
                 <a:cs typeface="Calibri" pitchFamily="34" charset="-120"/>
               </a:rPr>
-              <a:t>The act of moving people or goods from one place to another right now.</a:t>
+              <a:t>In the process of moving people or things from one place to another right now.</a:t>
             </a:r>
             <a:endParaRPr lang="en-US" sz="1200" dirty="0"/>
           </a:p>
@@ -42860,7 +45844,7 @@
                 <a:ea typeface="Trebuchet MS" pitchFamily="34" charset="-122"/>
                 <a:cs typeface="Trebuchet MS" pitchFamily="34" charset="-120"/>
               </a:rPr>
-              <a:t>transportable</a:t>
+              <a:t>transporter</a:t>
             </a:r>
             <a:endParaRPr lang="en-US" sz="1200" dirty="0"/>
           </a:p>
@@ -42926,7 +45910,7 @@
                 <a:ea typeface="Calibri" pitchFamily="34" charset="-122"/>
                 <a:cs typeface="Calibri" pitchFamily="34" charset="-120"/>
               </a:rPr>
-              <a:t>Something that is able to be moved or carried from one place to another.</a:t>
+              <a:t>A vehicle or person that carries goods or people from one place to another.</a:t>
             </a:r>
             <a:endParaRPr lang="en-US" sz="1200" dirty="0"/>
           </a:p>
@@ -42999,7 +45983,7 @@
                 <a:ea typeface="Trebuchet MS" pitchFamily="34" charset="-122"/>
                 <a:cs typeface="Trebuchet MS" pitchFamily="34" charset="-120"/>
               </a:rPr>
-              <a:t>retransport</a:t>
+              <a:t>transportable</a:t>
             </a:r>
             <a:endParaRPr lang="en-US" sz="1200" dirty="0"/>
           </a:p>
@@ -43065,7 +46049,7 @@
                 <a:ea typeface="Calibri" pitchFamily="34" charset="-122"/>
                 <a:cs typeface="Calibri" pitchFamily="34" charset="-120"/>
               </a:rPr>
-              <a:t>Something that has been moved or carried again, back to its original place.</a:t>
+              <a:t>To move or carry something again to another place.</a:t>
             </a:r>
             <a:endParaRPr lang="en-US" sz="1200" dirty="0"/>
           </a:p>
@@ -43138,7 +46122,7 @@
                 <a:ea typeface="Trebuchet MS" pitchFamily="34" charset="-122"/>
                 <a:cs typeface="Trebuchet MS" pitchFamily="34" charset="-120"/>
               </a:rPr>
-              <a:t>retransported</a:t>
+              <a:t>retransport</a:t>
             </a:r>
             <a:endParaRPr lang="en-US" sz="1200" dirty="0"/>
           </a:p>
@@ -43204,7 +46188,7 @@
                 <a:ea typeface="Calibri" pitchFamily="34" charset="-122"/>
                 <a:cs typeface="Calibri" pitchFamily="34" charset="-120"/>
               </a:rPr>
-              <a:t>A person or vehicle that carries people or goods from one place to another.</a:t>
+              <a:t>The system or method used to move people or goods from place to place.</a:t>
             </a:r>
             <a:endParaRPr lang="en-US" sz="1200" dirty="0"/>
           </a:p>
@@ -43496,7 +46480,7 @@
                 <a:ea typeface="Calibri" pitchFamily="34" charset="-122"/>
                 <a:cs typeface="Calibri" pitchFamily="34" charset="-120"/>
               </a:rPr>
-              <a:t>Word Labs  •  wordlabs.app  •  Root: 'transport' = carry across or over</a:t>
+              <a:t>Word Labs  •  wordlabs.app  •  Root: 'transport' = carry across or beyond</a:t>
             </a:r>
             <a:endParaRPr lang="en-US" sz="800" dirty="0"/>
           </a:p>
@@ -43699,7 +46683,7 @@
                 <a:ea typeface="Calibri" pitchFamily="34" charset="-122"/>
                 <a:cs typeface="Calibri" pitchFamily="34" charset="-120"/>
               </a:rPr>
-              <a:t>The city's transportation system includes buses, trains, and ferries that help thousands of people get to school and work every day.</a:t>
+              <a:t>The city built a new transportation system to help people travel to school and work more easily.</a:t>
             </a:r>
             <a:endParaRPr lang="en-US" sz="1500" dirty="0"/>
           </a:p>
@@ -43863,7 +46847,7 @@
                 <a:ea typeface="Calibri" pitchFamily="34" charset="-122"/>
                 <a:cs typeface="Calibri" pitchFamily="34" charset="-120"/>
               </a:rPr>
-              <a:t>A large transporter truck carried the new playground equipment all the way from the factory to our school.</a:t>
+              <a:t>Large trucks are used for transporting fresh fruit and vegetables from farms to supermarkets across the country.</a:t>
             </a:r>
             <a:endParaRPr lang="en-US" sz="1500" dirty="0"/>
           </a:p>
@@ -44027,7 +47011,7 @@
                 <a:ea typeface="Calibri" pitchFamily="34" charset="-122"/>
                 <a:cs typeface="Calibri" pitchFamily="34" charset="-120"/>
               </a:rPr>
-              <a:t>The ancient Egyptians transported enormous stone blocks along the Nile River to build the pyramids.</a:t>
+              <a:t>The transporter carried the new cars safely from the factory to the dealership in town.</a:t>
             </a:r>
             <a:endParaRPr lang="en-US" sz="1500" dirty="0"/>
           </a:p>
